--- a/docs/kritical/TakeSure_BugHunters_KriticalHacks2026.pptx
+++ b/docs/kritical/TakeSure_BugHunters_KriticalHacks2026.pptx
@@ -15,9 +15,10 @@
     <p:sldId id="263" r:id="rId9"/>
     <p:sldId id="264" r:id="rId10"/>
     <p:sldId id="265" r:id="rId11"/>
+    <p:sldId id="266" r:id="rId12"/>
   </p:sldIdLst>
   <p:notesMasterIdLst>
-    <p:notesMasterId r:id="rId12"/>
+    <p:notesMasterId r:id="rId13"/>
   </p:notesMasterIdLst>
   <p:sldSz cx="9144000" cy="5143500"/>
   <p:notesSz cx="5143500" cy="9144000"/>
@@ -599,7 +600,7 @@
           <a:p>
             <a:r>
               <a:rPr lang="en-US" dirty="0"/>
-              <a:t>Eight references with live links; honest comparison with existing tools.</a:t>
+              <a:t>Roadmap and the 24-hour plan.</a:t>
             </a:r>
             <a:endParaRPr lang="en-US" dirty="0"/>
           </a:p>
@@ -623,6 +624,94 @@
             <a:fld id="{F7021451-1387-4CA6-816F-3879F97B5CBC}" type="slidenum">
               <a:rPr lang="en-US"/>
               <a:t>10</a:t>
+            </a:fld>
+            <a:endParaRPr lang="en-US"/>
+          </a:p>
+        </p:txBody>
+      </p:sp>
+    </p:spTree>
+    <p:extLst>
+      <p:ext uri="{BB962C8B-B14F-4D97-AF65-F5344CB8AC3E}">
+        <p14:creationId xmlns:p14="http://schemas.microsoft.com/office/powerpoint/2010/main" val="1024086991"/>
+      </p:ext>
+    </p:extLst>
+  </p:cSld>
+  <p:clrMapOvr>
+    <a:masterClrMapping/>
+  </p:clrMapOvr>
+</p:notes>
+</file>
+
+<file path=ppt/notesSlides/notesSlide11.xml><?xml version="1.0" encoding="utf-8"?>
+<p:notes xmlns:a="http://schemas.openxmlformats.org/drawingml/2006/main" xmlns:r="http://schemas.openxmlformats.org/officeDocument/2006/relationships" xmlns:p="http://schemas.openxmlformats.org/presentationml/2006/main">
+  <p:cSld>
+    <p:spTree>
+      <p:nvGrpSpPr>
+        <p:cNvPr id="1" name=""/>
+        <p:cNvGrpSpPr/>
+        <p:nvPr/>
+      </p:nvGrpSpPr>
+      <p:grpSpPr>
+        <a:xfrm>
+          <a:off x="0" y="0"/>
+          <a:ext cx="0" cy="0"/>
+          <a:chOff x="0" y="0"/>
+          <a:chExt cx="0" cy="0"/>
+        </a:xfrm>
+      </p:grpSpPr>
+      <p:sp>
+        <p:nvSpPr>
+          <p:cNvPr id="2" name="Slide Image Placeholder 1"/>
+          <p:cNvSpPr>
+            <a:spLocks noGrp="1" noRot="1" noChangeAspect="1"/>
+          </p:cNvSpPr>
+          <p:nvPr>
+            <p:ph type="sldImg"/>
+          </p:nvPr>
+        </p:nvSpPr>
+        <p:spPr/>
+      </p:sp>
+      <p:sp>
+        <p:nvSpPr>
+          <p:cNvPr id="3" name="Notes Placeholder 2"/>
+          <p:cNvSpPr>
+            <a:spLocks noGrp="1"/>
+          </p:cNvSpPr>
+          <p:nvPr>
+            <p:ph type="body" idx="1"/>
+          </p:nvPr>
+        </p:nvSpPr>
+        <p:spPr/>
+        <p:txBody>
+          <a:bodyPr/>
+          <a:lstStyle/>
+          <a:p>
+            <a:r>
+              <a:rPr lang="en-US" dirty="0"/>
+              <a:t>Eight references with live links; honest comparison with existing tools.</a:t>
+            </a:r>
+            <a:endParaRPr lang="en-US" dirty="0"/>
+          </a:p>
+        </p:txBody>
+      </p:sp>
+      <p:sp>
+        <p:nvSpPr>
+          <p:cNvPr id="4" name="Slide Number Placeholder 3"/>
+          <p:cNvSpPr>
+            <a:spLocks noGrp="1"/>
+          </p:cNvSpPr>
+          <p:nvPr>
+            <p:ph type="sldNum" sz="quarter" idx="10"/>
+          </p:nvPr>
+        </p:nvSpPr>
+        <p:spPr/>
+        <p:txBody>
+          <a:bodyPr/>
+          <a:lstStyle/>
+          <a:p>
+            <a:fld id="{F7021451-1387-4CA6-816F-3879F97B5CBC}" type="slidenum">
+              <a:rPr lang="en-US"/>
+              <a:t>11</a:t>
             </a:fld>
             <a:endParaRPr lang="en-US"/>
           </a:p>
@@ -1303,7 +1392,7 @@
           <a:p>
             <a:r>
               <a:rPr lang="en-US" dirty="0"/>
-              <a:t>Roadmap and the 24-hour plan.</a:t>
+              <a:t>Prices with justification; market sizing from public figures; three-year conservative path.</a:t>
             </a:r>
             <a:endParaRPr lang="en-US" dirty="0"/>
           </a:p>
@@ -2644,7 +2733,7 @@
                 <a:ea typeface="Times New Roman" pitchFamily="34" charset="-122"/>
                 <a:cs typeface="Times New Roman" pitchFamily="34" charset="-120"/>
               </a:rPr>
-              <a:t>RESEARCH &amp; REFERENCES</a:t>
+              <a:t>FUTURE SCOPE</a:t>
             </a:r>
             <a:endParaRPr lang="en-US" sz="2000" dirty="0"/>
           </a:p>
@@ -2821,12 +2910,12 @@
         </p:nvSpPr>
         <p:spPr>
           <a:xfrm>
-            <a:off x="228600" y="731520"/>
-            <a:ext cx="3154680" cy="4096512"/>
+            <a:off x="228600" y="777240"/>
+            <a:ext cx="4251960" cy="4023360"/>
           </a:xfrm>
           <a:prstGeom prst="roundRect">
             <a:avLst>
-              <a:gd name="adj" fmla="val 1449"/>
+              <a:gd name="adj" fmla="val 1136"/>
             </a:avLst>
           </a:prstGeom>
           <a:solidFill>
@@ -2848,8 +2937,8 @@
         </p:nvSpPr>
         <p:spPr>
           <a:xfrm>
-            <a:off x="228600" y="731520"/>
-            <a:ext cx="3154680" cy="237744"/>
+            <a:off x="228600" y="777240"/>
+            <a:ext cx="4251960" cy="237744"/>
           </a:xfrm>
           <a:prstGeom prst="rect">
             <a:avLst/>
@@ -2873,8 +2962,8 @@
         </p:nvSpPr>
         <p:spPr>
           <a:xfrm>
-            <a:off x="320040" y="731520"/>
-            <a:ext cx="2971800" cy="237744"/>
+            <a:off x="320040" y="777240"/>
+            <a:ext cx="4069080" cy="237744"/>
           </a:xfrm>
           <a:prstGeom prst="rect">
             <a:avLst/>
@@ -2898,7 +2987,7 @@
                 <a:ea typeface="Arial" pitchFamily="34" charset="-122"/>
                 <a:cs typeface="Arial" pitchFamily="34" charset="-120"/>
               </a:rPr>
-              <a:t>RESEARCH &amp; REFERENCES</a:t>
+              <a:t>ROADMAP</a:t>
             </a:r>
             <a:endParaRPr lang="en-US" sz="850" dirty="0"/>
           </a:p>
@@ -2906,18 +2995,321 @@
       </p:sp>
       <p:sp>
         <p:nvSpPr>
-          <p:cNvPr id="12" name="Shape 10"/>
+          <p:cNvPr id="12" name="Text 10"/>
+          <p:cNvSpPr txBox="1"/>
+          <p:nvPr/>
+        </p:nvSpPr>
+        <p:spPr>
+          <a:xfrm>
+            <a:off x="365760" y="1078992"/>
+            <a:ext cx="4023360" cy="3657600"/>
+          </a:xfrm>
+          <a:prstGeom prst="rect">
+            <a:avLst/>
+          </a:prstGeom>
+          <a:noFill/>
+          <a:ln/>
+        </p:spPr>
+        <p:txBody>
+          <a:bodyPr wrap="square" lIns="0" tIns="0" rIns="0" bIns="0" rtlCol="0" anchor="t"/>
+          <a:lstStyle/>
+          <a:p>
+            <a:pPr marL="114300" indent="-114300">
+              <a:spcAft>
+                <a:spcPts val="200"/>
+              </a:spcAft>
+              <a:buSzPct val="100000"/>
+              <a:buChar char="•"/>
+            </a:pPr>
+            <a:r>
+              <a:rPr lang="en-US" sz="840" b="1" dirty="0">
+                <a:solidFill>
+                  <a:srgbClr val="8B2A2A"/>
+                </a:solidFill>
+                <a:latin typeface="Arial" pitchFamily="34" charset="0"/>
+                <a:ea typeface="Arial" pitchFamily="34" charset="-122"/>
+                <a:cs typeface="Arial" pitchFamily="34" charset="-120"/>
+              </a:rPr>
+              <a:t>Knowledge base: </a:t>
+            </a:r>
+            <a:pPr indent="0" marL="0">
+              <a:spcAft>
+                <a:spcPts val="200"/>
+              </a:spcAft>
+              <a:buNone/>
+            </a:pPr>
+            <a:r>
+              <a:rPr lang="en-US" sz="840" dirty="0">
+                <a:solidFill>
+                  <a:srgbClr val="333333"/>
+                </a:solidFill>
+                <a:latin typeface="Arial" pitchFamily="34" charset="0"/>
+                <a:ea typeface="Arial" pitchFamily="34" charset="-122"/>
+                <a:cs typeface="Arial" pitchFamily="34" charset="-120"/>
+              </a:rPr>
+              <a:t>200+ pairs; second-reviewer rule on every citation; faculty review with an Ayurveda college or pharmacology department before public release.</a:t>
+            </a:r>
+            <a:endParaRPr lang="en-US" sz="840" dirty="0"/>
+          </a:p>
+          <a:p>
+            <a:pPr marL="114300" indent="-114300">
+              <a:spcAft>
+                <a:spcPts val="200"/>
+              </a:spcAft>
+              <a:buSzPct val="100000"/>
+              <a:buChar char="•"/>
+            </a:pPr>
+            <a:r>
+              <a:rPr lang="en-US" sz="840" b="1" dirty="0">
+                <a:solidFill>
+                  <a:srgbClr val="8B2A2A"/>
+                </a:solidFill>
+                <a:latin typeface="Arial" pitchFamily="34" charset="0"/>
+                <a:ea typeface="Arial" pitchFamily="34" charset="-122"/>
+                <a:cs typeface="Arial" pitchFamily="34" charset="-120"/>
+              </a:rPr>
+              <a:t>ML once data exists: </a:t>
+            </a:r>
+            <a:pPr indent="0" marL="0">
+              <a:spcAft>
+                <a:spcPts val="200"/>
+              </a:spcAft>
+              <a:buNone/>
+            </a:pPr>
+            <a:r>
+              <a:rPr lang="en-US" sz="840" dirty="0">
+                <a:solidFill>
+                  <a:srgbClr val="333333"/>
+                </a:solidFill>
+                <a:latin typeface="Arial" pitchFamily="34" charset="0"/>
+                <a:ea typeface="Arial" pitchFamily="34" charset="-122"/>
+                <a:cs typeface="Arial" pitchFamily="34" charset="-120"/>
+              </a:rPr>
+              <a:t>OCR fine-tuned on Indian labels and handwriting; a named-entity model for prescriptions; ranking of under-reported pairs for curation priority.</a:t>
+            </a:r>
+            <a:endParaRPr lang="en-US" sz="840" dirty="0"/>
+          </a:p>
+          <a:p>
+            <a:pPr marL="114300" indent="-114300">
+              <a:spcAft>
+                <a:spcPts val="200"/>
+              </a:spcAft>
+              <a:buSzPct val="100000"/>
+              <a:buChar char="•"/>
+            </a:pPr>
+            <a:r>
+              <a:rPr lang="en-US" sz="840" b="1" dirty="0">
+                <a:solidFill>
+                  <a:srgbClr val="8B2A2A"/>
+                </a:solidFill>
+                <a:latin typeface="Arial" pitchFamily="34" charset="0"/>
+                <a:ea typeface="Arial" pitchFamily="34" charset="-122"/>
+                <a:cs typeface="Arial" pitchFamily="34" charset="-120"/>
+              </a:rPr>
+              <a:t>TinyFish: </a:t>
+            </a:r>
+            <a:pPr indent="0" marL="0">
+              <a:spcAft>
+                <a:spcPts val="200"/>
+              </a:spcAft>
+              <a:buNone/>
+            </a:pPr>
+            <a:r>
+              <a:rPr lang="en-US" sz="840" dirty="0">
+                <a:solidFill>
+                  <a:srgbClr val="333333"/>
+                </a:solidFill>
+                <a:latin typeface="Arial" pitchFamily="34" charset="0"/>
+                <a:ea typeface="Arial" pitchFamily="34" charset="-122"/>
+                <a:cs typeface="Arial" pitchFamily="34" charset="-120"/>
+              </a:rPr>
+              <a:t>scheduled monthly re-verification of every citation; agent monitoring of LiverTox and Ayush Suraksha for new signals; product-catalogue sweeps of Himalaya, Dabur, Patanjali, Baidyanath.</a:t>
+            </a:r>
+            <a:endParaRPr lang="en-US" sz="840" dirty="0"/>
+          </a:p>
+          <a:p>
+            <a:pPr marL="114300" indent="-114300">
+              <a:spcAft>
+                <a:spcPts val="200"/>
+              </a:spcAft>
+              <a:buSzPct val="100000"/>
+              <a:buChar char="•"/>
+            </a:pPr>
+            <a:r>
+              <a:rPr lang="en-US" sz="840" b="1" dirty="0">
+                <a:solidFill>
+                  <a:srgbClr val="8B2A2A"/>
+                </a:solidFill>
+                <a:latin typeface="Arial" pitchFamily="34" charset="0"/>
+                <a:ea typeface="Arial" pitchFamily="34" charset="-122"/>
+                <a:cs typeface="Arial" pitchFamily="34" charset="-120"/>
+              </a:rPr>
+              <a:t>Integration: </a:t>
+            </a:r>
+            <a:pPr indent="0" marL="0">
+              <a:spcAft>
+                <a:spcPts val="200"/>
+              </a:spcAft>
+              <a:buNone/>
+            </a:pPr>
+            <a:r>
+              <a:rPr lang="en-US" sz="840" dirty="0">
+                <a:solidFill>
+                  <a:srgbClr val="333333"/>
+                </a:solidFill>
+                <a:latin typeface="Arial" pitchFamily="34" charset="0"/>
+                <a:ea typeface="Arial" pitchFamily="34" charset="-122"/>
+                <a:cs typeface="Arial" pitchFamily="34" charset="-120"/>
+              </a:rPr>
+              <a:t>Ayush Grid / ABDM so the verdict and ADR sit on the ABHA record; pharmacy-chain API; chemist QR pilot in one city.</a:t>
+            </a:r>
+            <a:endParaRPr lang="en-US" sz="840" dirty="0"/>
+          </a:p>
+          <a:p>
+            <a:pPr marL="114300" indent="-114300">
+              <a:spcAft>
+                <a:spcPts val="200"/>
+              </a:spcAft>
+              <a:buSzPct val="100000"/>
+              <a:buChar char="•"/>
+            </a:pPr>
+            <a:r>
+              <a:rPr lang="en-US" sz="840" b="1" dirty="0">
+                <a:solidFill>
+                  <a:srgbClr val="8B2A2A"/>
+                </a:solidFill>
+                <a:latin typeface="Arial" pitchFamily="34" charset="0"/>
+                <a:ea typeface="Arial" pitchFamily="34" charset="-122"/>
+                <a:cs typeface="Arial" pitchFamily="34" charset="-120"/>
+              </a:rPr>
+              <a:t>Out of scope by design: </a:t>
+            </a:r>
+            <a:pPr indent="0" marL="0">
+              <a:spcAft>
+                <a:spcPts val="200"/>
+              </a:spcAft>
+              <a:buNone/>
+            </a:pPr>
+            <a:r>
+              <a:rPr lang="en-US" sz="840" dirty="0">
+                <a:solidFill>
+                  <a:srgbClr val="333333"/>
+                </a:solidFill>
+                <a:latin typeface="Arial" pitchFamily="34" charset="0"/>
+                <a:ea typeface="Arial" pitchFamily="34" charset="-122"/>
+                <a:cs typeface="Arial" pitchFamily="34" charset="-120"/>
+              </a:rPr>
+              <a:t>diagnosis, dosing, herb–herb interactions, any trained model deciding a verdict.</a:t>
+            </a:r>
+            <a:endParaRPr lang="en-US" sz="840" dirty="0"/>
+          </a:p>
+        </p:txBody>
+      </p:sp>
+      <p:sp>
+        <p:nvSpPr>
+          <p:cNvPr id="13" name="Shape 11"/>
           <p:cNvSpPr/>
           <p:nvPr/>
         </p:nvSpPr>
         <p:spPr>
           <a:xfrm>
-            <a:off x="301752" y="1033272"/>
-            <a:ext cx="3017520" cy="384048"/>
+            <a:off x="4663440" y="777240"/>
+            <a:ext cx="4251960" cy="4023360"/>
           </a:xfrm>
           <a:prstGeom prst="roundRect">
             <a:avLst>
-              <a:gd name="adj" fmla="val 9524"/>
+              <a:gd name="adj" fmla="val 1136"/>
+            </a:avLst>
+          </a:prstGeom>
+          <a:solidFill>
+            <a:srgbClr val="FFFFFF"/>
+          </a:solidFill>
+          <a:ln w="9525">
+            <a:solidFill>
+              <a:srgbClr val="D9CFCF"/>
+            </a:solidFill>
+            <a:prstDash val="solid"/>
+          </a:ln>
+        </p:spPr>
+      </p:sp>
+      <p:sp>
+        <p:nvSpPr>
+          <p:cNvPr id="14" name="Shape 12"/>
+          <p:cNvSpPr/>
+          <p:nvPr/>
+        </p:nvSpPr>
+        <p:spPr>
+          <a:xfrm>
+            <a:off x="4663440" y="777240"/>
+            <a:ext cx="4251960" cy="237744"/>
+          </a:xfrm>
+          <a:prstGeom prst="rect">
+            <a:avLst/>
+          </a:prstGeom>
+          <a:solidFill>
+            <a:srgbClr val="8B2A2A"/>
+          </a:solidFill>
+          <a:ln w="12700">
+            <a:solidFill>
+              <a:srgbClr val="8B2A2A"/>
+            </a:solidFill>
+            <a:prstDash val="solid"/>
+          </a:ln>
+        </p:spPr>
+      </p:sp>
+      <p:sp>
+        <p:nvSpPr>
+          <p:cNvPr id="15" name="Text 13"/>
+          <p:cNvSpPr txBox="1"/>
+          <p:nvPr/>
+        </p:nvSpPr>
+        <p:spPr>
+          <a:xfrm>
+            <a:off x="4754880" y="777240"/>
+            <a:ext cx="4069080" cy="237744"/>
+          </a:xfrm>
+          <a:prstGeom prst="rect">
+            <a:avLst/>
+          </a:prstGeom>
+          <a:noFill/>
+          <a:ln/>
+        </p:spPr>
+        <p:txBody>
+          <a:bodyPr wrap="square" lIns="0" tIns="0" rIns="0" bIns="0" rtlCol="0" anchor="ctr"/>
+          <a:lstStyle/>
+          <a:p>
+            <a:pPr indent="0" marL="0">
+              <a:buNone/>
+            </a:pPr>
+            <a:r>
+              <a:rPr lang="en-US" sz="850" b="1" spc="100" kern="0" dirty="0">
+                <a:solidFill>
+                  <a:srgbClr val="FFFFFF"/>
+                </a:solidFill>
+                <a:latin typeface="Arial" pitchFamily="34" charset="0"/>
+                <a:ea typeface="Arial" pitchFamily="34" charset="-122"/>
+                <a:cs typeface="Arial" pitchFamily="34" charset="-120"/>
+              </a:rPr>
+              <a:t>24-HOUR BUILD PLAN · 31 OCT – 1 NOV</a:t>
+            </a:r>
+            <a:endParaRPr lang="en-US" sz="850" dirty="0"/>
+          </a:p>
+        </p:txBody>
+      </p:sp>
+      <p:sp>
+        <p:nvSpPr>
+          <p:cNvPr id="16" name="Shape 14"/>
+          <p:cNvSpPr/>
+          <p:nvPr/>
+        </p:nvSpPr>
+        <p:spPr>
+          <a:xfrm>
+            <a:off x="4800600" y="1097280"/>
+            <a:ext cx="3977640" cy="530352"/>
+          </a:xfrm>
+          <a:prstGeom prst="roundRect">
+            <a:avLst>
+              <a:gd name="adj" fmla="val 8621"/>
             </a:avLst>
           </a:prstGeom>
           <a:solidFill>
@@ -2933,16 +3325,1106 @@
       </p:sp>
       <p:sp>
         <p:nvSpPr>
-          <p:cNvPr id="13" name="Shape 11"/>
+          <p:cNvPr id="17" name="Shape 15"/>
           <p:cNvSpPr/>
           <p:nvPr/>
         </p:nvSpPr>
         <p:spPr>
           <a:xfrm>
-            <a:off x="347472" y="1133856"/>
-            <a:ext cx="219456" cy="219456"/>
+            <a:off x="4864608" y="1207008"/>
+            <a:ext cx="731520" cy="310896"/>
+          </a:xfrm>
+          <a:prstGeom prst="roundRect">
+            <a:avLst>
+              <a:gd name="adj" fmla="val 14706"/>
+            </a:avLst>
+          </a:prstGeom>
+          <a:solidFill>
+            <a:srgbClr val="8B2A2A"/>
+          </a:solidFill>
+          <a:ln w="9525">
+            <a:solidFill>
+              <a:srgbClr val="8B2A2A"/>
+            </a:solidFill>
+            <a:prstDash val="solid"/>
+          </a:ln>
+        </p:spPr>
+      </p:sp>
+      <p:sp>
+        <p:nvSpPr>
+          <p:cNvPr id="18" name="Text 16"/>
+          <p:cNvSpPr txBox="1"/>
+          <p:nvPr/>
+        </p:nvSpPr>
+        <p:spPr>
+          <a:xfrm>
+            <a:off x="4864608" y="1207008"/>
+            <a:ext cx="731520" cy="310896"/>
+          </a:xfrm>
+          <a:prstGeom prst="rect">
+            <a:avLst/>
+          </a:prstGeom>
+          <a:noFill/>
+          <a:ln/>
+        </p:spPr>
+        <p:txBody>
+          <a:bodyPr wrap="square" lIns="0" tIns="0" rIns="0" bIns="0" rtlCol="0" anchor="ctr"/>
+          <a:lstStyle/>
+          <a:p>
+            <a:pPr algn="ctr" indent="0" marL="0">
+              <a:buNone/>
+            </a:pPr>
+            <a:r>
+              <a:rPr lang="en-US" sz="850" b="1" dirty="0">
+                <a:solidFill>
+                  <a:srgbClr val="FFFFFF"/>
+                </a:solidFill>
+                <a:latin typeface="Arial" pitchFamily="34" charset="0"/>
+                <a:ea typeface="Arial" pitchFamily="34" charset="-122"/>
+                <a:cs typeface="Arial" pitchFamily="34" charset="-120"/>
+              </a:rPr>
+              <a:t>0–3 h</a:t>
+            </a:r>
+            <a:endParaRPr lang="en-US" sz="850" dirty="0"/>
+          </a:p>
+        </p:txBody>
+      </p:sp>
+      <p:sp>
+        <p:nvSpPr>
+          <p:cNvPr id="19" name="Text 17"/>
+          <p:cNvSpPr txBox="1"/>
+          <p:nvPr/>
+        </p:nvSpPr>
+        <p:spPr>
+          <a:xfrm>
+            <a:off x="5687568" y="1152144"/>
+            <a:ext cx="3017520" cy="438912"/>
+          </a:xfrm>
+          <a:prstGeom prst="rect">
+            <a:avLst/>
+          </a:prstGeom>
+          <a:noFill/>
+          <a:ln/>
+        </p:spPr>
+        <p:txBody>
+          <a:bodyPr wrap="square" lIns="0" tIns="0" rIns="0" bIns="0" rtlCol="0" anchor="ctr"/>
+          <a:lstStyle/>
+          <a:p>
+            <a:pPr indent="0" marL="0">
+              <a:buNone/>
+            </a:pPr>
+            <a:r>
+              <a:rPr lang="en-US" sz="780" dirty="0">
+                <a:solidFill>
+                  <a:srgbClr val="333333"/>
+                </a:solidFill>
+                <a:latin typeface="Arial" pitchFamily="34" charset="0"/>
+                <a:ea typeface="Arial" pitchFamily="34" charset="-122"/>
+                <a:cs typeface="Arial" pitchFamily="34" charset="-120"/>
+              </a:rPr>
+              <a:t>Set up at venue; load KB; core loop photo → OCR → confirm → verdict green.</a:t>
+            </a:r>
+            <a:endParaRPr lang="en-US" sz="780" dirty="0"/>
+          </a:p>
+        </p:txBody>
+      </p:sp>
+      <p:sp>
+        <p:nvSpPr>
+          <p:cNvPr id="20" name="Shape 18"/>
+          <p:cNvSpPr/>
+          <p:nvPr/>
+        </p:nvSpPr>
+        <p:spPr>
+          <a:xfrm>
+            <a:off x="4800600" y="1700784"/>
+            <a:ext cx="3977640" cy="530352"/>
+          </a:xfrm>
+          <a:prstGeom prst="roundRect">
+            <a:avLst>
+              <a:gd name="adj" fmla="val 8621"/>
+            </a:avLst>
+          </a:prstGeom>
+          <a:solidFill>
+            <a:srgbClr val="F6F3F3"/>
+          </a:solidFill>
+          <a:ln w="9525">
+            <a:solidFill>
+              <a:srgbClr val="D9CFCF"/>
+            </a:solidFill>
+            <a:prstDash val="solid"/>
+          </a:ln>
+        </p:spPr>
+      </p:sp>
+      <p:sp>
+        <p:nvSpPr>
+          <p:cNvPr id="21" name="Shape 19"/>
+          <p:cNvSpPr/>
+          <p:nvPr/>
+        </p:nvSpPr>
+        <p:spPr>
+          <a:xfrm>
+            <a:off x="4864608" y="1810512"/>
+            <a:ext cx="731520" cy="310896"/>
+          </a:xfrm>
+          <a:prstGeom prst="roundRect">
+            <a:avLst>
+              <a:gd name="adj" fmla="val 14706"/>
+            </a:avLst>
+          </a:prstGeom>
+          <a:solidFill>
+            <a:srgbClr val="6D28D9"/>
+          </a:solidFill>
+          <a:ln w="9525">
+            <a:solidFill>
+              <a:srgbClr val="6D28D9"/>
+            </a:solidFill>
+            <a:prstDash val="solid"/>
+          </a:ln>
+        </p:spPr>
+      </p:sp>
+      <p:sp>
+        <p:nvSpPr>
+          <p:cNvPr id="22" name="Text 20"/>
+          <p:cNvSpPr txBox="1"/>
+          <p:nvPr/>
+        </p:nvSpPr>
+        <p:spPr>
+          <a:xfrm>
+            <a:off x="4864608" y="1810512"/>
+            <a:ext cx="731520" cy="310896"/>
+          </a:xfrm>
+          <a:prstGeom prst="rect">
+            <a:avLst/>
+          </a:prstGeom>
+          <a:noFill/>
+          <a:ln/>
+        </p:spPr>
+        <p:txBody>
+          <a:bodyPr wrap="square" lIns="0" tIns="0" rIns="0" bIns="0" rtlCol="0" anchor="ctr"/>
+          <a:lstStyle/>
+          <a:p>
+            <a:pPr algn="ctr" indent="0" marL="0">
+              <a:buNone/>
+            </a:pPr>
+            <a:r>
+              <a:rPr lang="en-US" sz="850" b="1" dirty="0">
+                <a:solidFill>
+                  <a:srgbClr val="FFFFFF"/>
+                </a:solidFill>
+                <a:latin typeface="Arial" pitchFamily="34" charset="0"/>
+                <a:ea typeface="Arial" pitchFamily="34" charset="-122"/>
+                <a:cs typeface="Arial" pitchFamily="34" charset="-120"/>
+              </a:rPr>
+              <a:t>3–9 h</a:t>
+            </a:r>
+            <a:endParaRPr lang="en-US" sz="850" dirty="0"/>
+          </a:p>
+        </p:txBody>
+      </p:sp>
+      <p:sp>
+        <p:nvSpPr>
+          <p:cNvPr id="23" name="Text 21"/>
+          <p:cNvSpPr txBox="1"/>
+          <p:nvPr/>
+        </p:nvSpPr>
+        <p:spPr>
+          <a:xfrm>
+            <a:off x="5687568" y="1755648"/>
+            <a:ext cx="3017520" cy="438912"/>
+          </a:xfrm>
+          <a:prstGeom prst="rect">
+            <a:avLst/>
+          </a:prstGeom>
+          <a:noFill/>
+          <a:ln/>
+        </p:spPr>
+        <p:txBody>
+          <a:bodyPr wrap="square" lIns="0" tIns="0" rIns="0" bIns="0" rtlCol="0" anchor="ctr"/>
+          <a:lstStyle/>
+          <a:p>
+            <a:pPr indent="0" marL="0">
+              <a:buNone/>
+            </a:pPr>
+            <a:r>
+              <a:rPr lang="en-US" sz="780" dirty="0">
+                <a:solidFill>
+                  <a:srgbClr val="333333"/>
+                </a:solidFill>
+                <a:latin typeface="Arial" pitchFamily="34" charset="0"/>
+                <a:ea typeface="Arial" pitchFamily="34" charset="-122"/>
+                <a:cs typeface="Arial" pitchFamily="34" charset="-120"/>
+              </a:rPr>
+              <a:t>TinyFish verifier over all 78 citations; reviewer pass on mismatches.</a:t>
+            </a:r>
+            <a:endParaRPr lang="en-US" sz="780" dirty="0"/>
+          </a:p>
+        </p:txBody>
+      </p:sp>
+      <p:sp>
+        <p:nvSpPr>
+          <p:cNvPr id="24" name="Shape 22"/>
+          <p:cNvSpPr/>
+          <p:nvPr/>
+        </p:nvSpPr>
+        <p:spPr>
+          <a:xfrm>
+            <a:off x="4800600" y="2304288"/>
+            <a:ext cx="3977640" cy="530352"/>
+          </a:xfrm>
+          <a:prstGeom prst="roundRect">
+            <a:avLst>
+              <a:gd name="adj" fmla="val 8621"/>
+            </a:avLst>
+          </a:prstGeom>
+          <a:solidFill>
+            <a:srgbClr val="F6F3F3"/>
+          </a:solidFill>
+          <a:ln w="9525">
+            <a:solidFill>
+              <a:srgbClr val="D9CFCF"/>
+            </a:solidFill>
+            <a:prstDash val="solid"/>
+          </a:ln>
+        </p:spPr>
+      </p:sp>
+      <p:sp>
+        <p:nvSpPr>
+          <p:cNvPr id="25" name="Shape 23"/>
+          <p:cNvSpPr/>
+          <p:nvPr/>
+        </p:nvSpPr>
+        <p:spPr>
+          <a:xfrm>
+            <a:off x="4864608" y="2414016"/>
+            <a:ext cx="731520" cy="310896"/>
+          </a:xfrm>
+          <a:prstGeom prst="roundRect">
+            <a:avLst>
+              <a:gd name="adj" fmla="val 14706"/>
+            </a:avLst>
+          </a:prstGeom>
+          <a:solidFill>
+            <a:srgbClr val="6D28D9"/>
+          </a:solidFill>
+          <a:ln w="9525">
+            <a:solidFill>
+              <a:srgbClr val="6D28D9"/>
+            </a:solidFill>
+            <a:prstDash val="solid"/>
+          </a:ln>
+        </p:spPr>
+      </p:sp>
+      <p:sp>
+        <p:nvSpPr>
+          <p:cNvPr id="26" name="Text 24"/>
+          <p:cNvSpPr txBox="1"/>
+          <p:nvPr/>
+        </p:nvSpPr>
+        <p:spPr>
+          <a:xfrm>
+            <a:off x="4864608" y="2414016"/>
+            <a:ext cx="731520" cy="310896"/>
+          </a:xfrm>
+          <a:prstGeom prst="rect">
+            <a:avLst/>
+          </a:prstGeom>
+          <a:noFill/>
+          <a:ln/>
+        </p:spPr>
+        <p:txBody>
+          <a:bodyPr wrap="square" lIns="0" tIns="0" rIns="0" bIns="0" rtlCol="0" anchor="ctr"/>
+          <a:lstStyle/>
+          <a:p>
+            <a:pPr algn="ctr" indent="0" marL="0">
+              <a:buNone/>
+            </a:pPr>
+            <a:r>
+              <a:rPr lang="en-US" sz="850" b="1" dirty="0">
+                <a:solidFill>
+                  <a:srgbClr val="FFFFFF"/>
+                </a:solidFill>
+                <a:latin typeface="Arial" pitchFamily="34" charset="0"/>
+                <a:ea typeface="Arial" pitchFamily="34" charset="-122"/>
+                <a:cs typeface="Arial" pitchFamily="34" charset="-120"/>
+              </a:rPr>
+              <a:t>9–15 h</a:t>
+            </a:r>
+            <a:endParaRPr lang="en-US" sz="850" dirty="0"/>
+          </a:p>
+        </p:txBody>
+      </p:sp>
+      <p:sp>
+        <p:nvSpPr>
+          <p:cNvPr id="27" name="Text 25"/>
+          <p:cNvSpPr txBox="1"/>
+          <p:nvPr/>
+        </p:nvSpPr>
+        <p:spPr>
+          <a:xfrm>
+            <a:off x="5687568" y="2359152"/>
+            <a:ext cx="3017520" cy="438912"/>
+          </a:xfrm>
+          <a:prstGeom prst="rect">
+            <a:avLst/>
+          </a:prstGeom>
+          <a:noFill/>
+          <a:ln/>
+        </p:spPr>
+        <p:txBody>
+          <a:bodyPr wrap="square" lIns="0" tIns="0" rIns="0" bIns="0" rtlCol="0" anchor="ctr"/>
+          <a:lstStyle/>
+          <a:p>
+            <a:pPr indent="0" marL="0">
+              <a:buNone/>
+            </a:pPr>
+            <a:r>
+              <a:rPr lang="en-US" sz="780" dirty="0">
+                <a:solidFill>
+                  <a:srgbClr val="333333"/>
+                </a:solidFill>
+                <a:latin typeface="Arial" pitchFamily="34" charset="0"/>
+                <a:ea typeface="Arial" pitchFamily="34" charset="-122"/>
+                <a:cs typeface="Arial" pitchFamily="34" charset="-120"/>
+              </a:rPr>
+              <a:t>Agent discovery for 16 herbs → draft rows → review → 100+ rows.</a:t>
+            </a:r>
+            <a:endParaRPr lang="en-US" sz="780" dirty="0"/>
+          </a:p>
+        </p:txBody>
+      </p:sp>
+      <p:sp>
+        <p:nvSpPr>
+          <p:cNvPr id="28" name="Shape 26"/>
+          <p:cNvSpPr/>
+          <p:nvPr/>
+        </p:nvSpPr>
+        <p:spPr>
+          <a:xfrm>
+            <a:off x="4800600" y="2907792"/>
+            <a:ext cx="3977640" cy="530352"/>
+          </a:xfrm>
+          <a:prstGeom prst="roundRect">
+            <a:avLst>
+              <a:gd name="adj" fmla="val 8621"/>
+            </a:avLst>
+          </a:prstGeom>
+          <a:solidFill>
+            <a:srgbClr val="F6F3F3"/>
+          </a:solidFill>
+          <a:ln w="9525">
+            <a:solidFill>
+              <a:srgbClr val="D9CFCF"/>
+            </a:solidFill>
+            <a:prstDash val="solid"/>
+          </a:ln>
+        </p:spPr>
+      </p:sp>
+      <p:sp>
+        <p:nvSpPr>
+          <p:cNvPr id="29" name="Shape 27"/>
+          <p:cNvSpPr/>
+          <p:nvPr/>
+        </p:nvSpPr>
+        <p:spPr>
+          <a:xfrm>
+            <a:off x="4864608" y="3017520"/>
+            <a:ext cx="731520" cy="310896"/>
+          </a:xfrm>
+          <a:prstGeom prst="roundRect">
+            <a:avLst>
+              <a:gd name="adj" fmla="val 14706"/>
+            </a:avLst>
+          </a:prstGeom>
+          <a:solidFill>
+            <a:srgbClr val="6D28D9"/>
+          </a:solidFill>
+          <a:ln w="9525">
+            <a:solidFill>
+              <a:srgbClr val="6D28D9"/>
+            </a:solidFill>
+            <a:prstDash val="solid"/>
+          </a:ln>
+        </p:spPr>
+      </p:sp>
+      <p:sp>
+        <p:nvSpPr>
+          <p:cNvPr id="30" name="Text 28"/>
+          <p:cNvSpPr txBox="1"/>
+          <p:nvPr/>
+        </p:nvSpPr>
+        <p:spPr>
+          <a:xfrm>
+            <a:off x="4864608" y="3017520"/>
+            <a:ext cx="731520" cy="310896"/>
+          </a:xfrm>
+          <a:prstGeom prst="rect">
+            <a:avLst/>
+          </a:prstGeom>
+          <a:noFill/>
+          <a:ln/>
+        </p:spPr>
+        <p:txBody>
+          <a:bodyPr wrap="square" lIns="0" tIns="0" rIns="0" bIns="0" rtlCol="0" anchor="ctr"/>
+          <a:lstStyle/>
+          <a:p>
+            <a:pPr algn="ctr" indent="0" marL="0">
+              <a:buNone/>
+            </a:pPr>
+            <a:r>
+              <a:rPr lang="en-US" sz="850" b="1" dirty="0">
+                <a:solidFill>
+                  <a:srgbClr val="FFFFFF"/>
+                </a:solidFill>
+                <a:latin typeface="Arial" pitchFamily="34" charset="0"/>
+                <a:ea typeface="Arial" pitchFamily="34" charset="-122"/>
+                <a:cs typeface="Arial" pitchFamily="34" charset="-120"/>
+              </a:rPr>
+              <a:t>15–19 h</a:t>
+            </a:r>
+            <a:endParaRPr lang="en-US" sz="850" dirty="0"/>
+          </a:p>
+        </p:txBody>
+      </p:sp>
+      <p:sp>
+        <p:nvSpPr>
+          <p:cNvPr id="31" name="Text 29"/>
+          <p:cNvSpPr txBox="1"/>
+          <p:nvPr/>
+        </p:nvSpPr>
+        <p:spPr>
+          <a:xfrm>
+            <a:off x="5687568" y="2962656"/>
+            <a:ext cx="3017520" cy="438912"/>
+          </a:xfrm>
+          <a:prstGeom prst="rect">
+            <a:avLst/>
+          </a:prstGeom>
+          <a:noFill/>
+          <a:ln/>
+        </p:spPr>
+        <p:txBody>
+          <a:bodyPr wrap="square" lIns="0" tIns="0" rIns="0" bIns="0" rtlCol="0" anchor="ctr"/>
+          <a:lstStyle/>
+          <a:p>
+            <a:pPr indent="0" marL="0">
+              <a:buNone/>
+            </a:pPr>
+            <a:r>
+              <a:rPr lang="en-US" sz="780" dirty="0">
+                <a:solidFill>
+                  <a:srgbClr val="333333"/>
+                </a:solidFill>
+                <a:latin typeface="Arial" pitchFamily="34" charset="0"/>
+                <a:ea typeface="Arial" pitchFamily="34" charset="-122"/>
+                <a:cs typeface="Arial" pitchFamily="34" charset="-120"/>
+              </a:rPr>
+              <a:t>Product mapping for top 30 Indian products; Hindi in every PDF.</a:t>
+            </a:r>
+            <a:endParaRPr lang="en-US" sz="780" dirty="0"/>
+          </a:p>
+        </p:txBody>
+      </p:sp>
+      <p:sp>
+        <p:nvSpPr>
+          <p:cNvPr id="32" name="Shape 30"/>
+          <p:cNvSpPr/>
+          <p:nvPr/>
+        </p:nvSpPr>
+        <p:spPr>
+          <a:xfrm>
+            <a:off x="4800600" y="3511296"/>
+            <a:ext cx="3977640" cy="530352"/>
+          </a:xfrm>
+          <a:prstGeom prst="roundRect">
+            <a:avLst>
+              <a:gd name="adj" fmla="val 8621"/>
+            </a:avLst>
+          </a:prstGeom>
+          <a:solidFill>
+            <a:srgbClr val="F6F3F3"/>
+          </a:solidFill>
+          <a:ln w="9525">
+            <a:solidFill>
+              <a:srgbClr val="D9CFCF"/>
+            </a:solidFill>
+            <a:prstDash val="solid"/>
+          </a:ln>
+        </p:spPr>
+      </p:sp>
+      <p:sp>
+        <p:nvSpPr>
+          <p:cNvPr id="33" name="Shape 31"/>
+          <p:cNvSpPr/>
+          <p:nvPr/>
+        </p:nvSpPr>
+        <p:spPr>
+          <a:xfrm>
+            <a:off x="4864608" y="3621024"/>
+            <a:ext cx="731520" cy="310896"/>
+          </a:xfrm>
+          <a:prstGeom prst="roundRect">
+            <a:avLst>
+              <a:gd name="adj" fmla="val 14706"/>
+            </a:avLst>
+          </a:prstGeom>
+          <a:solidFill>
+            <a:srgbClr val="8B2A2A"/>
+          </a:solidFill>
+          <a:ln w="9525">
+            <a:solidFill>
+              <a:srgbClr val="8B2A2A"/>
+            </a:solidFill>
+            <a:prstDash val="solid"/>
+          </a:ln>
+        </p:spPr>
+      </p:sp>
+      <p:sp>
+        <p:nvSpPr>
+          <p:cNvPr id="34" name="Text 32"/>
+          <p:cNvSpPr txBox="1"/>
+          <p:nvPr/>
+        </p:nvSpPr>
+        <p:spPr>
+          <a:xfrm>
+            <a:off x="4864608" y="3621024"/>
+            <a:ext cx="731520" cy="310896"/>
+          </a:xfrm>
+          <a:prstGeom prst="rect">
+            <a:avLst/>
+          </a:prstGeom>
+          <a:noFill/>
+          <a:ln/>
+        </p:spPr>
+        <p:txBody>
+          <a:bodyPr wrap="square" lIns="0" tIns="0" rIns="0" bIns="0" rtlCol="0" anchor="ctr"/>
+          <a:lstStyle/>
+          <a:p>
+            <a:pPr algn="ctr" indent="0" marL="0">
+              <a:buNone/>
+            </a:pPr>
+            <a:r>
+              <a:rPr lang="en-US" sz="850" b="1" dirty="0">
+                <a:solidFill>
+                  <a:srgbClr val="FFFFFF"/>
+                </a:solidFill>
+                <a:latin typeface="Arial" pitchFamily="34" charset="0"/>
+                <a:ea typeface="Arial" pitchFamily="34" charset="-122"/>
+                <a:cs typeface="Arial" pitchFamily="34" charset="-120"/>
+              </a:rPr>
+              <a:t>19–22 h</a:t>
+            </a:r>
+            <a:endParaRPr lang="en-US" sz="850" dirty="0"/>
+          </a:p>
+        </p:txBody>
+      </p:sp>
+      <p:sp>
+        <p:nvSpPr>
+          <p:cNvPr id="35" name="Text 33"/>
+          <p:cNvSpPr txBox="1"/>
+          <p:nvPr/>
+        </p:nvSpPr>
+        <p:spPr>
+          <a:xfrm>
+            <a:off x="5687568" y="3566160"/>
+            <a:ext cx="3017520" cy="438912"/>
+          </a:xfrm>
+          <a:prstGeom prst="rect">
+            <a:avLst/>
+          </a:prstGeom>
+          <a:noFill/>
+          <a:ln/>
+        </p:spPr>
+        <p:txBody>
+          <a:bodyPr wrap="square" lIns="0" tIns="0" rIns="0" bIns="0" rtlCol="0" anchor="ctr"/>
+          <a:lstStyle/>
+          <a:p>
+            <a:pPr indent="0" marL="0">
+              <a:buNone/>
+            </a:pPr>
+            <a:r>
+              <a:rPr lang="en-US" sz="780" dirty="0">
+                <a:solidFill>
+                  <a:srgbClr val="333333"/>
+                </a:solidFill>
+                <a:latin typeface="Arial" pitchFamily="34" charset="0"/>
+                <a:ea typeface="Arial" pitchFamily="34" charset="-122"/>
+                <a:cs typeface="Arial" pitchFamily="34" charset="-120"/>
+              </a:rPr>
+              <a:t>Public deploy (Vercel + Render + Supabase); chemist QR flow.</a:t>
+            </a:r>
+            <a:endParaRPr lang="en-US" sz="780" dirty="0"/>
+          </a:p>
+        </p:txBody>
+      </p:sp>
+      <p:sp>
+        <p:nvSpPr>
+          <p:cNvPr id="36" name="Shape 34"/>
+          <p:cNvSpPr/>
+          <p:nvPr/>
+        </p:nvSpPr>
+        <p:spPr>
+          <a:xfrm>
+            <a:off x="4800600" y="4114800"/>
+            <a:ext cx="3977640" cy="530352"/>
+          </a:xfrm>
+          <a:prstGeom prst="roundRect">
+            <a:avLst>
+              <a:gd name="adj" fmla="val 8621"/>
+            </a:avLst>
+          </a:prstGeom>
+          <a:solidFill>
+            <a:srgbClr val="F6F3F3"/>
+          </a:solidFill>
+          <a:ln w="9525">
+            <a:solidFill>
+              <a:srgbClr val="D9CFCF"/>
+            </a:solidFill>
+            <a:prstDash val="solid"/>
+          </a:ln>
+        </p:spPr>
+      </p:sp>
+      <p:sp>
+        <p:nvSpPr>
+          <p:cNvPr id="37" name="Shape 35"/>
+          <p:cNvSpPr/>
+          <p:nvPr/>
+        </p:nvSpPr>
+        <p:spPr>
+          <a:xfrm>
+            <a:off x="4864608" y="4224528"/>
+            <a:ext cx="731520" cy="310896"/>
+          </a:xfrm>
+          <a:prstGeom prst="roundRect">
+            <a:avLst>
+              <a:gd name="adj" fmla="val 14706"/>
+            </a:avLst>
+          </a:prstGeom>
+          <a:solidFill>
+            <a:srgbClr val="8B2A2A"/>
+          </a:solidFill>
+          <a:ln w="9525">
+            <a:solidFill>
+              <a:srgbClr val="8B2A2A"/>
+            </a:solidFill>
+            <a:prstDash val="solid"/>
+          </a:ln>
+        </p:spPr>
+      </p:sp>
+      <p:sp>
+        <p:nvSpPr>
+          <p:cNvPr id="38" name="Text 36"/>
+          <p:cNvSpPr txBox="1"/>
+          <p:nvPr/>
+        </p:nvSpPr>
+        <p:spPr>
+          <a:xfrm>
+            <a:off x="4864608" y="4224528"/>
+            <a:ext cx="731520" cy="310896"/>
+          </a:xfrm>
+          <a:prstGeom prst="rect">
+            <a:avLst/>
+          </a:prstGeom>
+          <a:noFill/>
+          <a:ln/>
+        </p:spPr>
+        <p:txBody>
+          <a:bodyPr wrap="square" lIns="0" tIns="0" rIns="0" bIns="0" rtlCol="0" anchor="ctr"/>
+          <a:lstStyle/>
+          <a:p>
+            <a:pPr algn="ctr" indent="0" marL="0">
+              <a:buNone/>
+            </a:pPr>
+            <a:r>
+              <a:rPr lang="en-US" sz="850" b="1" dirty="0">
+                <a:solidFill>
+                  <a:srgbClr val="FFFFFF"/>
+                </a:solidFill>
+                <a:latin typeface="Arial" pitchFamily="34" charset="0"/>
+                <a:ea typeface="Arial" pitchFamily="34" charset="-122"/>
+                <a:cs typeface="Arial" pitchFamily="34" charset="-120"/>
+              </a:rPr>
+              <a:t>22–24 h</a:t>
+            </a:r>
+            <a:endParaRPr lang="en-US" sz="850" dirty="0"/>
+          </a:p>
+        </p:txBody>
+      </p:sp>
+      <p:sp>
+        <p:nvSpPr>
+          <p:cNvPr id="39" name="Text 37"/>
+          <p:cNvSpPr txBox="1"/>
+          <p:nvPr/>
+        </p:nvSpPr>
+        <p:spPr>
+          <a:xfrm>
+            <a:off x="5687568" y="4169664"/>
+            <a:ext cx="3017520" cy="438912"/>
+          </a:xfrm>
+          <a:prstGeom prst="rect">
+            <a:avLst/>
+          </a:prstGeom>
+          <a:noFill/>
+          <a:ln/>
+        </p:spPr>
+        <p:txBody>
+          <a:bodyPr wrap="square" lIns="0" tIns="0" rIns="0" bIns="0" rtlCol="0" anchor="ctr"/>
+          <a:lstStyle/>
+          <a:p>
+            <a:pPr indent="0" marL="0">
+              <a:buNone/>
+            </a:pPr>
+            <a:r>
+              <a:rPr lang="en-US" sz="780" dirty="0">
+                <a:solidFill>
+                  <a:srgbClr val="333333"/>
+                </a:solidFill>
+                <a:latin typeface="Arial" pitchFamily="34" charset="0"/>
+                <a:ea typeface="Arial" pitchFamily="34" charset="-122"/>
+                <a:cs typeface="Arial" pitchFamily="34" charset="-120"/>
+              </a:rPr>
+              <a:t>Freeze, run tests, rehearse the demo on the deployed link.</a:t>
+            </a:r>
+            <a:endParaRPr lang="en-US" sz="780" dirty="0"/>
+          </a:p>
+        </p:txBody>
+      </p:sp>
+    </p:spTree>
+  </p:cSld>
+  <p:clrMapOvr>
+    <a:masterClrMapping/>
+  </p:clrMapOvr>
+</p:sld>
+</file>
+
+<file path=ppt/slides/slide11.xml><?xml version="1.0" encoding="utf-8"?>
+<p:sld xmlns:a="http://schemas.openxmlformats.org/drawingml/2006/main" xmlns:r="http://schemas.openxmlformats.org/officeDocument/2006/relationships" xmlns:p="http://schemas.openxmlformats.org/presentationml/2006/main">
+  <p:cSld name="Slide 11">
+    <p:bg>
+      <p:bgPr>
+        <a:solidFill>
+          <a:srgbClr val="FFFFFF"/>
+        </a:solidFill>
+      </p:bgPr>
+    </p:bg>
+    <p:spTree>
+      <p:nvGrpSpPr>
+        <p:cNvPr id="1" name=""/>
+        <p:cNvGrpSpPr/>
+        <p:nvPr/>
+      </p:nvGrpSpPr>
+      <p:grpSpPr>
+        <a:xfrm>
+          <a:off x="0" y="0"/>
+          <a:ext cx="0" cy="0"/>
+          <a:chOff x="0" y="0"/>
+          <a:chExt cx="0" cy="0"/>
+        </a:xfrm>
+      </p:grpSpPr>
+      <p:sp>
+        <p:nvSpPr>
+          <p:cNvPr id="2" name="Shape 0"/>
+          <p:cNvSpPr/>
+          <p:nvPr/>
+        </p:nvSpPr>
+        <p:spPr>
+          <a:xfrm>
+            <a:off x="109728" y="128016"/>
+            <a:ext cx="1691640" cy="475488"/>
           </a:xfrm>
           <a:prstGeom prst="ellipse">
+            <a:avLst/>
+          </a:prstGeom>
+          <a:solidFill>
+            <a:srgbClr val="FFFFFF"/>
+          </a:solidFill>
+          <a:ln w="9525">
+            <a:solidFill>
+              <a:srgbClr val="000000"/>
+            </a:solidFill>
+            <a:prstDash val="solid"/>
+          </a:ln>
+        </p:spPr>
+      </p:sp>
+      <p:sp>
+        <p:nvSpPr>
+          <p:cNvPr id="3" name="Text 1"/>
+          <p:cNvSpPr txBox="1"/>
+          <p:nvPr/>
+        </p:nvSpPr>
+        <p:spPr>
+          <a:xfrm>
+            <a:off x="109728" y="128016"/>
+            <a:ext cx="1691640" cy="475488"/>
+          </a:xfrm>
+          <a:prstGeom prst="rect">
+            <a:avLst/>
+          </a:prstGeom>
+          <a:noFill/>
+          <a:ln/>
+        </p:spPr>
+        <p:txBody>
+          <a:bodyPr wrap="square" lIns="0" tIns="0" rIns="0" bIns="0" rtlCol="0" anchor="ctr"/>
+          <a:lstStyle/>
+          <a:p>
+            <a:pPr algn="ctr" indent="0" marL="0">
+              <a:buNone/>
+            </a:pPr>
+            <a:r>
+              <a:rPr lang="en-US" sz="1300" b="1" dirty="0">
+                <a:solidFill>
+                  <a:srgbClr val="000000"/>
+                </a:solidFill>
+                <a:latin typeface="Times New Roman" pitchFamily="34" charset="0"/>
+                <a:ea typeface="Times New Roman" pitchFamily="34" charset="-122"/>
+                <a:cs typeface="Times New Roman" pitchFamily="34" charset="-120"/>
+              </a:rPr>
+              <a:t>Bug Hunters</a:t>
+            </a:r>
+            <a:endParaRPr lang="en-US" sz="1300" dirty="0"/>
+          </a:p>
+        </p:txBody>
+      </p:sp>
+      <p:sp>
+        <p:nvSpPr>
+          <p:cNvPr id="4" name="Text 2"/>
+          <p:cNvSpPr txBox="1"/>
+          <p:nvPr/>
+        </p:nvSpPr>
+        <p:spPr>
+          <a:xfrm>
+            <a:off x="1874520" y="91440"/>
+            <a:ext cx="5760720" cy="548640"/>
+          </a:xfrm>
+          <a:prstGeom prst="rect">
+            <a:avLst/>
+          </a:prstGeom>
+          <a:noFill/>
+          <a:ln/>
+        </p:spPr>
+        <p:txBody>
+          <a:bodyPr wrap="square" lIns="0" tIns="0" rIns="0" bIns="0" rtlCol="0" anchor="ctr"/>
+          <a:lstStyle/>
+          <a:p>
+            <a:pPr algn="ctr" indent="0" marL="0">
+              <a:buNone/>
+            </a:pPr>
+            <a:r>
+              <a:rPr lang="en-US" sz="2000" b="1" u="sng" dirty="0">
+                <a:solidFill>
+                  <a:srgbClr val="000000"/>
+                </a:solidFill>
+                <a:latin typeface="Times New Roman" pitchFamily="34" charset="0"/>
+                <a:ea typeface="Times New Roman" pitchFamily="34" charset="-122"/>
+                <a:cs typeface="Times New Roman" pitchFamily="34" charset="-120"/>
+              </a:rPr>
+              <a:t>RESEARCH &amp; REFERENCES</a:t>
+            </a:r>
+            <a:endParaRPr lang="en-US" sz="2000" dirty="0"/>
+          </a:p>
+        </p:txBody>
+      </p:sp>
+      <p:sp>
+        <p:nvSpPr>
+          <p:cNvPr id="5" name="Text 3"/>
+          <p:cNvSpPr txBox="1"/>
+          <p:nvPr/>
+        </p:nvSpPr>
+        <p:spPr>
+          <a:xfrm>
+            <a:off x="7635240" y="128016"/>
+            <a:ext cx="1371600" cy="475488"/>
+          </a:xfrm>
+          <a:prstGeom prst="rect">
+            <a:avLst/>
+          </a:prstGeom>
+          <a:noFill/>
+          <a:ln/>
+        </p:spPr>
+        <p:txBody>
+          <a:bodyPr wrap="square" lIns="0" tIns="0" rIns="0" bIns="0" rtlCol="0" anchor="ctr"/>
+          <a:lstStyle/>
+          <a:p>
+            <a:pPr algn="r" indent="0" marL="0">
+              <a:lnSpc>
+                <a:spcPct val="105000"/>
+              </a:lnSpc>
+              <a:buNone/>
+            </a:pPr>
+            <a:r>
+              <a:rPr lang="en-US" sz="750" b="1" dirty="0">
+                <a:solidFill>
+                  <a:srgbClr val="8B2A2A"/>
+                </a:solidFill>
+                <a:latin typeface="Arial" pitchFamily="34" charset="0"/>
+                <a:ea typeface="Arial" pitchFamily="34" charset="-122"/>
+                <a:cs typeface="Arial" pitchFamily="34" charset="-120"/>
+              </a:rPr>
+              <a:t>KRITICAL HACKS 2026</a:t>
+            </a:r>
+            <a:endParaRPr lang="en-US" sz="750" dirty="0"/>
+          </a:p>
+          <a:p>
+            <a:pPr algn="r" indent="0" marL="0">
+              <a:lnSpc>
+                <a:spcPct val="105000"/>
+              </a:lnSpc>
+              <a:buNone/>
+            </a:pPr>
+            <a:r>
+              <a:rPr lang="en-US" sz="750" b="1" dirty="0">
+                <a:solidFill>
+                  <a:srgbClr val="8B2A2A"/>
+                </a:solidFill>
+                <a:latin typeface="Arial" pitchFamily="34" charset="0"/>
+                <a:ea typeface="Arial" pitchFamily="34" charset="-122"/>
+                <a:cs typeface="Arial" pitchFamily="34" charset="-120"/>
+              </a:rPr>
+              <a:t>IGDTUW · AI/ML Track</a:t>
+            </a:r>
+            <a:endParaRPr lang="en-US" sz="750" dirty="0"/>
+          </a:p>
+        </p:txBody>
+      </p:sp>
+      <p:sp>
+        <p:nvSpPr>
+          <p:cNvPr id="6" name="Shape 4"/>
+          <p:cNvSpPr/>
+          <p:nvPr/>
+        </p:nvSpPr>
+        <p:spPr>
+          <a:xfrm>
+            <a:off x="228600" y="676656"/>
+            <a:ext cx="8686800" cy="0"/>
+          </a:xfrm>
+          <a:prstGeom prst="line">
+            <a:avLst/>
+          </a:prstGeom>
+          <a:noFill/>
+          <a:ln w="15875">
+            <a:solidFill>
+              <a:srgbClr val="8B2A2A"/>
+            </a:solidFill>
+            <a:prstDash val="solid"/>
+          </a:ln>
+        </p:spPr>
+      </p:sp>
+      <p:sp>
+        <p:nvSpPr>
+          <p:cNvPr id="7" name="Text 5"/>
+          <p:cNvSpPr txBox="1"/>
+          <p:nvPr/>
+        </p:nvSpPr>
+        <p:spPr>
+          <a:xfrm>
+            <a:off x="228600" y="4919472"/>
+            <a:ext cx="7589520" cy="201168"/>
+          </a:xfrm>
+          <a:prstGeom prst="rect">
+            <a:avLst/>
+          </a:prstGeom>
+          <a:noFill/>
+          <a:ln/>
+        </p:spPr>
+        <p:txBody>
+          <a:bodyPr wrap="square" lIns="0" tIns="0" rIns="0" bIns="0" rtlCol="0" anchor="ctr"/>
+          <a:lstStyle/>
+          <a:p>
+            <a:pPr indent="0" marL="0">
+              <a:buNone/>
+            </a:pPr>
+            <a:r>
+              <a:rPr lang="en-US" sz="700" dirty="0">
+                <a:solidFill>
+                  <a:srgbClr val="5D6166"/>
+                </a:solidFill>
+                <a:latin typeface="Arial" pitchFamily="34" charset="0"/>
+                <a:ea typeface="Arial" pitchFamily="34" charset="-122"/>
+                <a:cs typeface="Arial" pitchFamily="34" charset="-120"/>
+              </a:rPr>
+              <a:t>TakeSure · Confidence before taking something · Team Bug Hunters · Kritical Hacks 2026 · Decision support, not diagnosis</a:t>
+            </a:r>
+            <a:endParaRPr lang="en-US" sz="700" dirty="0"/>
+          </a:p>
+        </p:txBody>
+      </p:sp>
+      <p:sp>
+        <p:nvSpPr>
+          <p:cNvPr id="8" name="Text 6"/>
+          <p:cNvSpPr txBox="1"/>
+          <p:nvPr/>
+        </p:nvSpPr>
+        <p:spPr>
+          <a:xfrm>
+            <a:off x="8001000" y="4919472"/>
+            <a:ext cx="914400" cy="201168"/>
+          </a:xfrm>
+          <a:prstGeom prst="rect">
+            <a:avLst/>
+          </a:prstGeom>
+          <a:noFill/>
+          <a:ln/>
+        </p:spPr>
+        <p:txBody>
+          <a:bodyPr wrap="square" lIns="0" tIns="0" rIns="0" bIns="0" rtlCol="0" anchor="ctr"/>
+          <a:lstStyle/>
+          <a:p>
+            <a:pPr algn="r" indent="0" marL="0">
+              <a:buNone/>
+            </a:pPr>
+            <a:r>
+              <a:rPr lang="en-US" sz="700" dirty="0">
+                <a:solidFill>
+                  <a:srgbClr val="5D6166"/>
+                </a:solidFill>
+                <a:latin typeface="Arial" pitchFamily="34" charset="0"/>
+                <a:ea typeface="Arial" pitchFamily="34" charset="-122"/>
+                <a:cs typeface="Arial" pitchFamily="34" charset="-120"/>
+              </a:rPr>
+              <a:t>11</a:t>
+            </a:r>
+            <a:endParaRPr lang="en-US" sz="700" dirty="0"/>
+          </a:p>
+        </p:txBody>
+      </p:sp>
+      <p:sp>
+        <p:nvSpPr>
+          <p:cNvPr id="9" name="Shape 7"/>
+          <p:cNvSpPr/>
+          <p:nvPr/>
+        </p:nvSpPr>
+        <p:spPr>
+          <a:xfrm>
+            <a:off x="228600" y="731520"/>
+            <a:ext cx="3154680" cy="4096512"/>
+          </a:xfrm>
+          <a:prstGeom prst="roundRect">
+            <a:avLst>
+              <a:gd name="adj" fmla="val 1449"/>
+            </a:avLst>
+          </a:prstGeom>
+          <a:solidFill>
+            <a:srgbClr val="FFFFFF"/>
+          </a:solidFill>
+          <a:ln w="9525">
+            <a:solidFill>
+              <a:srgbClr val="D9CFCF"/>
+            </a:solidFill>
+            <a:prstDash val="solid"/>
+          </a:ln>
+        </p:spPr>
+      </p:sp>
+      <p:sp>
+        <p:nvSpPr>
+          <p:cNvPr id="10" name="Shape 8"/>
+          <p:cNvSpPr/>
+          <p:nvPr/>
+        </p:nvSpPr>
+        <p:spPr>
+          <a:xfrm>
+            <a:off x="228600" y="731520"/>
+            <a:ext cx="3154680" cy="237744"/>
+          </a:xfrm>
+          <a:prstGeom prst="rect">
             <a:avLst/>
           </a:prstGeom>
           <a:solidFill>
@@ -2958,14 +4440,14 @@
       </p:sp>
       <p:sp>
         <p:nvSpPr>
-          <p:cNvPr id="14" name="Text 12"/>
-          <p:cNvSpPr txBox="1"/>
-          <p:nvPr/>
-        </p:nvSpPr>
-        <p:spPr>
-          <a:xfrm>
-            <a:off x="347472" y="1133856"/>
-            <a:ext cx="219456" cy="219456"/>
+          <p:cNvPr id="11" name="Text 9"/>
+          <p:cNvSpPr txBox="1"/>
+          <p:nvPr/>
+        </p:nvSpPr>
+        <p:spPr>
+          <a:xfrm>
+            <a:off x="320040" y="731520"/>
+            <a:ext cx="2971800" cy="237744"/>
           </a:xfrm>
           <a:prstGeom prst="rect">
             <a:avLst/>
@@ -2977,11 +4459,11 @@
           <a:bodyPr wrap="square" lIns="0" tIns="0" rIns="0" bIns="0" rtlCol="0" anchor="ctr"/>
           <a:lstStyle/>
           <a:p>
-            <a:pPr algn="ctr" indent="0" marL="0">
-              <a:buNone/>
-            </a:pPr>
-            <a:r>
-              <a:rPr lang="en-US" sz="864" b="1" dirty="0">
+            <a:pPr indent="0" marL="0">
+              <a:buNone/>
+            </a:pPr>
+            <a:r>
+              <a:rPr lang="en-US" sz="850" b="1" spc="100" kern="0" dirty="0">
                 <a:solidFill>
                   <a:srgbClr val="FFFFFF"/>
                 </a:solidFill>
@@ -2989,145 +4471,21 @@
                 <a:ea typeface="Arial" pitchFamily="34" charset="-122"/>
                 <a:cs typeface="Arial" pitchFamily="34" charset="-120"/>
               </a:rPr>
-              <a:t>1</a:t>
-            </a:r>
-            <a:endParaRPr lang="en-US" sz="864" dirty="0"/>
-          </a:p>
-        </p:txBody>
-      </p:sp>
-      <p:sp>
-        <p:nvSpPr>
-          <p:cNvPr id="15" name="Text 13"/>
-          <p:cNvSpPr txBox="1"/>
-          <p:nvPr/>
-        </p:nvSpPr>
-        <p:spPr>
-          <a:xfrm>
-            <a:off x="621792" y="1051560"/>
-            <a:ext cx="2670048" cy="146304"/>
-          </a:xfrm>
-          <a:prstGeom prst="rect">
-            <a:avLst/>
-          </a:prstGeom>
-          <a:noFill/>
-          <a:ln/>
-        </p:spPr>
-        <p:txBody>
-          <a:bodyPr wrap="square" lIns="0" tIns="0" rIns="0" bIns="0" rtlCol="0" anchor="t"/>
-          <a:lstStyle/>
-          <a:p>
-            <a:pPr indent="0" marL="0">
-              <a:buNone/>
-            </a:pPr>
-            <a:r>
-              <a:rPr lang="en-US" sz="690" b="1" dirty="0">
-                <a:solidFill>
-                  <a:srgbClr val="8B2A2A"/>
-                </a:solidFill>
-                <a:latin typeface="Arial" pitchFamily="34" charset="0"/>
-                <a:ea typeface="Arial" pitchFamily="34" charset="-122"/>
-                <a:cs typeface="Arial" pitchFamily="34" charset="-120"/>
-              </a:rPr>
-              <a:t>Sharma 2018: ashwagandha &amp; thyroid trial</a:t>
-            </a:r>
-            <a:endParaRPr lang="en-US" sz="690" dirty="0"/>
-          </a:p>
-        </p:txBody>
-      </p:sp>
-      <p:sp>
-        <p:nvSpPr>
-          <p:cNvPr id="16" name="Text 14"/>
-          <p:cNvSpPr txBox="1"/>
-          <p:nvPr/>
-        </p:nvSpPr>
-        <p:spPr>
-          <a:xfrm>
-            <a:off x="621792" y="1170432"/>
-            <a:ext cx="2670048" cy="118872"/>
-          </a:xfrm>
-          <a:prstGeom prst="rect">
-            <a:avLst/>
-          </a:prstGeom>
-          <a:noFill/>
-          <a:ln/>
-        </p:spPr>
-        <p:txBody>
-          <a:bodyPr wrap="square" lIns="0" tIns="0" rIns="0" bIns="0" rtlCol="0" anchor="t"/>
-          <a:lstStyle/>
-          <a:p>
-            <a:pPr indent="0" marL="0">
-              <a:buNone/>
-            </a:pPr>
-            <a:r>
-              <a:rPr lang="en-US" sz="580" dirty="0">
-                <a:solidFill>
-                  <a:srgbClr val="5D6166"/>
-                </a:solidFill>
-                <a:latin typeface="Arial" pitchFamily="34" charset="0"/>
-                <a:ea typeface="Arial" pitchFamily="34" charset="-122"/>
-                <a:cs typeface="Arial" pitchFamily="34" charset="-120"/>
-              </a:rPr>
-              <a:t>RCT, 50 patients, 600 mg/day, 8 weeks</a:t>
-            </a:r>
-            <a:endParaRPr lang="en-US" sz="580" dirty="0"/>
-          </a:p>
-        </p:txBody>
-      </p:sp>
-      <p:sp>
-        <p:nvSpPr>
-          <p:cNvPr id="17" name="Text 15"/>
-          <p:cNvSpPr txBox="1"/>
-          <p:nvPr/>
-        </p:nvSpPr>
-        <p:spPr>
-          <a:xfrm>
-            <a:off x="621792" y="1289304"/>
-            <a:ext cx="2670048" cy="118872"/>
-          </a:xfrm>
-          <a:prstGeom prst="rect">
-            <a:avLst/>
-          </a:prstGeom>
-          <a:noFill/>
-          <a:ln/>
-        </p:spPr>
-        <p:txBody>
-          <a:bodyPr wrap="square" lIns="0" tIns="0" rIns="0" bIns="0" rtlCol="0" anchor="t"/>
-          <a:lstStyle/>
-          <a:p>
-            <a:pPr indent="0" marL="0">
-              <a:buNone/>
-            </a:pPr>
-            <a:r>
-              <a:rPr lang="en-US" sz="580" u="sng" dirty="0">
-                <a:solidFill>
-                  <a:srgbClr val="1155CC"/>
-                </a:solidFill>
-                <a:latin typeface="Arial" pitchFamily="34" charset="0"/>
-                <a:ea typeface="Arial" pitchFamily="34" charset="-122"/>
-                <a:cs typeface="Arial" pitchFamily="34" charset="-120"/>
-                <a:hlinkClick r:id="rId1" invalidUrl="" action="" tgtFrame="" tooltip="https://pubmed.ncbi.nlm.nih.gov/28829155/" history="1" highlightClick="0" endSnd="0">
-                  <a:extLst>
-                    <a:ext uri="{A12FA001-AC4F-418D-AE19-62706E023703}">
-                      <ahyp:hlinkClr xmlns:ahyp="http://schemas.microsoft.com/office/drawing/2018/hyperlinkcolor" val="tx"/>
-                    </a:ext>
-                  </a:extLst>
-                </a:hlinkClick>
-              </a:rPr>
-              <a:t>pubmed.ncbi.nlm.nih.gov/28829155</a:t>
-            </a:r>
-            <a:endParaRPr lang="en-US" sz="580" dirty="0"/>
-          </a:p>
-        </p:txBody>
-      </p:sp>
-      <p:sp>
-        <p:nvSpPr>
-          <p:cNvPr id="18" name="Shape 16"/>
+              <a:t>RESEARCH &amp; REFERENCES</a:t>
+            </a:r>
+            <a:endParaRPr lang="en-US" sz="850" dirty="0"/>
+          </a:p>
+        </p:txBody>
+      </p:sp>
+      <p:sp>
+        <p:nvSpPr>
+          <p:cNvPr id="12" name="Shape 10"/>
           <p:cNvSpPr/>
           <p:nvPr/>
         </p:nvSpPr>
         <p:spPr>
           <a:xfrm>
-            <a:off x="301752" y="1449324"/>
+            <a:off x="301752" y="1033272"/>
             <a:ext cx="3017520" cy="384048"/>
           </a:xfrm>
           <a:prstGeom prst="roundRect">
@@ -3148,13 +4506,13 @@
       </p:sp>
       <p:sp>
         <p:nvSpPr>
-          <p:cNvPr id="19" name="Shape 17"/>
+          <p:cNvPr id="13" name="Shape 11"/>
           <p:cNvSpPr/>
           <p:nvPr/>
         </p:nvSpPr>
         <p:spPr>
           <a:xfrm>
-            <a:off x="347472" y="1549908"/>
+            <a:off x="347472" y="1133856"/>
             <a:ext cx="219456" cy="219456"/>
           </a:xfrm>
           <a:prstGeom prst="ellipse">
@@ -3173,13 +4531,13 @@
       </p:sp>
       <p:sp>
         <p:nvSpPr>
-          <p:cNvPr id="20" name="Text 18"/>
-          <p:cNvSpPr txBox="1"/>
-          <p:nvPr/>
-        </p:nvSpPr>
-        <p:spPr>
-          <a:xfrm>
-            <a:off x="347472" y="1549908"/>
+          <p:cNvPr id="14" name="Text 12"/>
+          <p:cNvSpPr txBox="1"/>
+          <p:nvPr/>
+        </p:nvSpPr>
+        <p:spPr>
+          <a:xfrm>
+            <a:off x="347472" y="1133856"/>
             <a:ext cx="219456" cy="219456"/>
           </a:xfrm>
           <a:prstGeom prst="rect">
@@ -3204,7 +4562,7 @@
                 <a:ea typeface="Arial" pitchFamily="34" charset="-122"/>
                 <a:cs typeface="Arial" pitchFamily="34" charset="-120"/>
               </a:rPr>
-              <a:t>2</a:t>
+              <a:t>1</a:t>
             </a:r>
             <a:endParaRPr lang="en-US" sz="864" dirty="0"/>
           </a:p>
@@ -3212,13 +4570,13 @@
       </p:sp>
       <p:sp>
         <p:nvSpPr>
-          <p:cNvPr id="21" name="Text 19"/>
-          <p:cNvSpPr txBox="1"/>
-          <p:nvPr/>
-        </p:nvSpPr>
-        <p:spPr>
-          <a:xfrm>
-            <a:off x="621792" y="1467612"/>
+          <p:cNvPr id="15" name="Text 13"/>
+          <p:cNvSpPr txBox="1"/>
+          <p:nvPr/>
+        </p:nvSpPr>
+        <p:spPr>
+          <a:xfrm>
+            <a:off x="621792" y="1051560"/>
             <a:ext cx="2670048" cy="146304"/>
           </a:xfrm>
           <a:prstGeom prst="rect">
@@ -3243,7 +4601,7 @@
                 <a:ea typeface="Arial" pitchFamily="34" charset="-122"/>
                 <a:cs typeface="Arial" pitchFamily="34" charset="-120"/>
               </a:rPr>
-              <a:t>Gohil &amp; Patel 2007: herb–drug case reports</a:t>
+              <a:t>Sharma 2018: ashwagandha &amp; thyroid trial</a:t>
             </a:r>
             <a:endParaRPr lang="en-US" sz="690" dirty="0"/>
           </a:p>
@@ -3251,13 +4609,13 @@
       </p:sp>
       <p:sp>
         <p:nvSpPr>
-          <p:cNvPr id="22" name="Text 20"/>
-          <p:cNvSpPr txBox="1"/>
-          <p:nvPr/>
-        </p:nvSpPr>
-        <p:spPr>
-          <a:xfrm>
-            <a:off x="621792" y="1586484"/>
+          <p:cNvPr id="16" name="Text 14"/>
+          <p:cNvSpPr txBox="1"/>
+          <p:nvPr/>
+        </p:nvSpPr>
+        <p:spPr>
+          <a:xfrm>
+            <a:off x="621792" y="1170432"/>
             <a:ext cx="2670048" cy="118872"/>
           </a:xfrm>
           <a:prstGeom prst="rect">
@@ -3282,7 +4640,7 @@
                 <a:ea typeface="Arial" pitchFamily="34" charset="-122"/>
                 <a:cs typeface="Arial" pitchFamily="34" charset="-120"/>
               </a:rPr>
-              <a:t>133 cases, only 6% well documented (Indian J Pharmacol)</a:t>
+              <a:t>RCT, 50 patients, 600 mg/day, 8 weeks</a:t>
             </a:r>
             <a:endParaRPr lang="en-US" sz="580" dirty="0"/>
           </a:p>
@@ -3290,13 +4648,13 @@
       </p:sp>
       <p:sp>
         <p:nvSpPr>
-          <p:cNvPr id="23" name="Text 21"/>
-          <p:cNvSpPr txBox="1"/>
-          <p:nvPr/>
-        </p:nvSpPr>
-        <p:spPr>
-          <a:xfrm>
-            <a:off x="621792" y="1705356"/>
+          <p:cNvPr id="17" name="Text 15"/>
+          <p:cNvSpPr txBox="1"/>
+          <p:nvPr/>
+        </p:nvSpPr>
+        <p:spPr>
+          <a:xfrm>
+            <a:off x="621792" y="1289304"/>
             <a:ext cx="2670048" cy="118872"/>
           </a:xfrm>
           <a:prstGeom prst="rect">
@@ -3320,7 +4678,7 @@
                 <a:latin typeface="Arial" pitchFamily="34" charset="0"/>
                 <a:ea typeface="Arial" pitchFamily="34" charset="-122"/>
                 <a:cs typeface="Arial" pitchFamily="34" charset="-120"/>
-                <a:hlinkClick r:id="rId2" invalidUrl="" action="" tgtFrame="" tooltip="https://doi.org/10.4103/0253-7613.33432" history="1" highlightClick="0" endSnd="0">
+                <a:hlinkClick r:id="rId1" invalidUrl="" action="" tgtFrame="" tooltip="https://pubmed.ncbi.nlm.nih.gov/28829155/" history="1" highlightClick="0" endSnd="0">
                   <a:extLst>
                     <a:ext uri="{A12FA001-AC4F-418D-AE19-62706E023703}">
                       <ahyp:hlinkClr xmlns:ahyp="http://schemas.microsoft.com/office/drawing/2018/hyperlinkcolor" val="tx"/>
@@ -3328,7 +4686,7 @@
                   </a:extLst>
                 </a:hlinkClick>
               </a:rPr>
-              <a:t>doi.org/10.4103/0253-7613.33432</a:t>
+              <a:t>pubmed.ncbi.nlm.nih.gov/28829155</a:t>
             </a:r>
             <a:endParaRPr lang="en-US" sz="580" dirty="0"/>
           </a:p>
@@ -3336,13 +4694,13 @@
       </p:sp>
       <p:sp>
         <p:nvSpPr>
-          <p:cNvPr id="24" name="Shape 22"/>
+          <p:cNvPr id="18" name="Shape 16"/>
           <p:cNvSpPr/>
           <p:nvPr/>
         </p:nvSpPr>
         <p:spPr>
           <a:xfrm>
-            <a:off x="301752" y="1865376"/>
+            <a:off x="301752" y="1449324"/>
             <a:ext cx="3017520" cy="384048"/>
           </a:xfrm>
           <a:prstGeom prst="roundRect">
@@ -3363,13 +4721,13 @@
       </p:sp>
       <p:sp>
         <p:nvSpPr>
-          <p:cNvPr id="25" name="Shape 23"/>
+          <p:cNvPr id="19" name="Shape 17"/>
           <p:cNvSpPr/>
           <p:nvPr/>
         </p:nvSpPr>
         <p:spPr>
           <a:xfrm>
-            <a:off x="347472" y="1965960"/>
+            <a:off x="347472" y="1549908"/>
             <a:ext cx="219456" cy="219456"/>
           </a:xfrm>
           <a:prstGeom prst="ellipse">
@@ -3388,13 +4746,13 @@
       </p:sp>
       <p:sp>
         <p:nvSpPr>
-          <p:cNvPr id="26" name="Text 24"/>
-          <p:cNvSpPr txBox="1"/>
-          <p:nvPr/>
-        </p:nvSpPr>
-        <p:spPr>
-          <a:xfrm>
-            <a:off x="347472" y="1965960"/>
+          <p:cNvPr id="20" name="Text 18"/>
+          <p:cNvSpPr txBox="1"/>
+          <p:nvPr/>
+        </p:nvSpPr>
+        <p:spPr>
+          <a:xfrm>
+            <a:off x="347472" y="1549908"/>
             <a:ext cx="219456" cy="219456"/>
           </a:xfrm>
           <a:prstGeom prst="rect">
@@ -3419,7 +4777,7 @@
                 <a:ea typeface="Arial" pitchFamily="34" charset="-122"/>
                 <a:cs typeface="Arial" pitchFamily="34" charset="-120"/>
               </a:rPr>
-              <a:t>3</a:t>
+              <a:t>2</a:t>
             </a:r>
             <a:endParaRPr lang="en-US" sz="864" dirty="0"/>
           </a:p>
@@ -3427,13 +4785,13 @@
       </p:sp>
       <p:sp>
         <p:nvSpPr>
-          <p:cNvPr id="27" name="Text 25"/>
-          <p:cNvSpPr txBox="1"/>
-          <p:nvPr/>
-        </p:nvSpPr>
-        <p:spPr>
-          <a:xfrm>
-            <a:off x="621792" y="1883664"/>
+          <p:cNvPr id="21" name="Text 19"/>
+          <p:cNvSpPr txBox="1"/>
+          <p:nvPr/>
+        </p:nvSpPr>
+        <p:spPr>
+          <a:xfrm>
+            <a:off x="621792" y="1467612"/>
             <a:ext cx="2670048" cy="146304"/>
           </a:xfrm>
           <a:prstGeom prst="rect">
@@ -3458,7 +4816,7 @@
                 <a:ea typeface="Arial" pitchFamily="34" charset="-122"/>
                 <a:cs typeface="Arial" pitchFamily="34" charset="-120"/>
               </a:rPr>
-              <a:t>Ghosh et al. 2009: herb–drug interaction</a:t>
+              <a:t>Gohil &amp; Patel 2007: herb–drug case reports</a:t>
             </a:r>
             <a:endParaRPr lang="en-US" sz="690" dirty="0"/>
           </a:p>
@@ -3466,13 +4824,13 @@
       </p:sp>
       <p:sp>
         <p:nvSpPr>
-          <p:cNvPr id="28" name="Text 26"/>
-          <p:cNvSpPr txBox="1"/>
-          <p:nvPr/>
-        </p:nvSpPr>
-        <p:spPr>
-          <a:xfrm>
-            <a:off x="621792" y="2002536"/>
+          <p:cNvPr id="22" name="Text 20"/>
+          <p:cNvSpPr txBox="1"/>
+          <p:nvPr/>
+        </p:nvSpPr>
+        <p:spPr>
+          <a:xfrm>
+            <a:off x="621792" y="1586484"/>
             <a:ext cx="2670048" cy="118872"/>
           </a:xfrm>
           <a:prstGeom prst="rect">
@@ -3497,7 +4855,7 @@
                 <a:ea typeface="Arial" pitchFamily="34" charset="-122"/>
                 <a:cs typeface="Arial" pitchFamily="34" charset="-120"/>
               </a:rPr>
-              <a:t>Fallout of poor doctor–patient communication (JCDR)</a:t>
+              <a:t>133 cases, only 6% well documented (Indian J Pharmacol)</a:t>
             </a:r>
             <a:endParaRPr lang="en-US" sz="580" dirty="0"/>
           </a:p>
@@ -3505,13 +4863,13 @@
       </p:sp>
       <p:sp>
         <p:nvSpPr>
-          <p:cNvPr id="29" name="Text 27"/>
-          <p:cNvSpPr txBox="1"/>
-          <p:nvPr/>
-        </p:nvSpPr>
-        <p:spPr>
-          <a:xfrm>
-            <a:off x="621792" y="2121408"/>
+          <p:cNvPr id="23" name="Text 21"/>
+          <p:cNvSpPr txBox="1"/>
+          <p:nvPr/>
+        </p:nvSpPr>
+        <p:spPr>
+          <a:xfrm>
+            <a:off x="621792" y="1705356"/>
             <a:ext cx="2670048" cy="118872"/>
           </a:xfrm>
           <a:prstGeom prst="rect">
@@ -3535,7 +4893,7 @@
                 <a:latin typeface="Arial" pitchFamily="34" charset="0"/>
                 <a:ea typeface="Arial" pitchFamily="34" charset="-122"/>
                 <a:cs typeface="Arial" pitchFamily="34" charset="-120"/>
-                <a:hlinkClick r:id="rId3" invalidUrl="" action="" tgtFrame="" tooltip="https://www.jcdr.net/articles/PDF/576/501.pdf" history="1" highlightClick="0" endSnd="0">
+                <a:hlinkClick r:id="rId2" invalidUrl="" action="" tgtFrame="" tooltip="https://doi.org/10.4103/0253-7613.33432" history="1" highlightClick="0" endSnd="0">
                   <a:extLst>
                     <a:ext uri="{A12FA001-AC4F-418D-AE19-62706E023703}">
                       <ahyp:hlinkClr xmlns:ahyp="http://schemas.microsoft.com/office/drawing/2018/hyperlinkcolor" val="tx"/>
@@ -3543,7 +4901,7 @@
                   </a:extLst>
                 </a:hlinkClick>
               </a:rPr>
-              <a:t>jcdr.net/articles/PDF/576/501.pdf</a:t>
+              <a:t>doi.org/10.4103/0253-7613.33432</a:t>
             </a:r>
             <a:endParaRPr lang="en-US" sz="580" dirty="0"/>
           </a:p>
@@ -3551,13 +4909,13 @@
       </p:sp>
       <p:sp>
         <p:nvSpPr>
-          <p:cNvPr id="30" name="Shape 28"/>
+          <p:cNvPr id="24" name="Shape 22"/>
           <p:cNvSpPr/>
           <p:nvPr/>
         </p:nvSpPr>
         <p:spPr>
           <a:xfrm>
-            <a:off x="301752" y="2281428"/>
+            <a:off x="301752" y="1865376"/>
             <a:ext cx="3017520" cy="384048"/>
           </a:xfrm>
           <a:prstGeom prst="roundRect">
@@ -3578,13 +4936,13 @@
       </p:sp>
       <p:sp>
         <p:nvSpPr>
-          <p:cNvPr id="31" name="Shape 29"/>
+          <p:cNvPr id="25" name="Shape 23"/>
           <p:cNvSpPr/>
           <p:nvPr/>
         </p:nvSpPr>
         <p:spPr>
           <a:xfrm>
-            <a:off x="347472" y="2382012"/>
+            <a:off x="347472" y="1965960"/>
             <a:ext cx="219456" cy="219456"/>
           </a:xfrm>
           <a:prstGeom prst="ellipse">
@@ -3603,13 +4961,13 @@
       </p:sp>
       <p:sp>
         <p:nvSpPr>
-          <p:cNvPr id="32" name="Text 30"/>
-          <p:cNvSpPr txBox="1"/>
-          <p:nvPr/>
-        </p:nvSpPr>
-        <p:spPr>
-          <a:xfrm>
-            <a:off x="347472" y="2382012"/>
+          <p:cNvPr id="26" name="Text 24"/>
+          <p:cNvSpPr txBox="1"/>
+          <p:nvPr/>
+        </p:nvSpPr>
+        <p:spPr>
+          <a:xfrm>
+            <a:off x="347472" y="1965960"/>
             <a:ext cx="219456" cy="219456"/>
           </a:xfrm>
           <a:prstGeom prst="rect">
@@ -3634,7 +4992,7 @@
                 <a:ea typeface="Arial" pitchFamily="34" charset="-122"/>
                 <a:cs typeface="Arial" pitchFamily="34" charset="-120"/>
               </a:rPr>
-              <a:t>4</a:t>
+              <a:t>3</a:t>
             </a:r>
             <a:endParaRPr lang="en-US" sz="864" dirty="0"/>
           </a:p>
@@ -3642,13 +5000,13 @@
       </p:sp>
       <p:sp>
         <p:nvSpPr>
-          <p:cNvPr id="33" name="Text 31"/>
-          <p:cNvSpPr txBox="1"/>
-          <p:nvPr/>
-        </p:nvSpPr>
-        <p:spPr>
-          <a:xfrm>
-            <a:off x="621792" y="2299716"/>
+          <p:cNvPr id="27" name="Text 25"/>
+          <p:cNvSpPr txBox="1"/>
+          <p:nvPr/>
+        </p:nvSpPr>
+        <p:spPr>
+          <a:xfrm>
+            <a:off x="621792" y="1883664"/>
             <a:ext cx="2670048" cy="146304"/>
           </a:xfrm>
           <a:prstGeom prst="rect">
@@ -3673,7 +5031,7 @@
                 <a:ea typeface="Arial" pitchFamily="34" charset="-122"/>
                 <a:cs typeface="Arial" pitchFamily="34" charset="-120"/>
               </a:rPr>
-              <a:t>Interactions between substances in Ayurveda</a:t>
+              <a:t>Ghosh et al. 2009: herb–drug interaction</a:t>
             </a:r>
             <a:endParaRPr lang="en-US" sz="690" dirty="0"/>
           </a:p>
@@ -3681,13 +5039,13 @@
       </p:sp>
       <p:sp>
         <p:nvSpPr>
-          <p:cNvPr id="34" name="Text 32"/>
-          <p:cNvSpPr txBox="1"/>
-          <p:nvPr/>
-        </p:nvSpPr>
-        <p:spPr>
-          <a:xfrm>
-            <a:off x="621792" y="2418588"/>
+          <p:cNvPr id="28" name="Text 26"/>
+          <p:cNvSpPr txBox="1"/>
+          <p:nvPr/>
+        </p:nvSpPr>
+        <p:spPr>
+          <a:xfrm>
+            <a:off x="621792" y="2002536"/>
             <a:ext cx="2670048" cy="118872"/>
           </a:xfrm>
           <a:prstGeom prst="rect">
@@ -3712,7 +5070,7 @@
                 <a:ea typeface="Arial" pitchFamily="34" charset="-122"/>
                 <a:cs typeface="Arial" pitchFamily="34" charset="-120"/>
               </a:rPr>
-              <a:t>Food–drug &amp; Ayurveda–modern drug review, 2013</a:t>
+              <a:t>Fallout of poor doctor–patient communication (JCDR)</a:t>
             </a:r>
             <a:endParaRPr lang="en-US" sz="580" dirty="0"/>
           </a:p>
@@ -3720,13 +5078,13 @@
       </p:sp>
       <p:sp>
         <p:nvSpPr>
-          <p:cNvPr id="35" name="Text 33"/>
-          <p:cNvSpPr txBox="1"/>
-          <p:nvPr/>
-        </p:nvSpPr>
-        <p:spPr>
-          <a:xfrm>
-            <a:off x="621792" y="2537460"/>
+          <p:cNvPr id="29" name="Text 27"/>
+          <p:cNvSpPr txBox="1"/>
+          <p:nvPr/>
+        </p:nvSpPr>
+        <p:spPr>
+          <a:xfrm>
+            <a:off x="621792" y="2121408"/>
             <a:ext cx="2670048" cy="118872"/>
           </a:xfrm>
           <a:prstGeom prst="rect">
@@ -3750,7 +5108,7 @@
                 <a:latin typeface="Arial" pitchFamily="34" charset="0"/>
                 <a:ea typeface="Arial" pitchFamily="34" charset="-122"/>
                 <a:cs typeface="Arial" pitchFamily="34" charset="-120"/>
-                <a:hlinkClick r:id="rId4" invalidUrl="" action="" tgtFrame="" tooltip="https://doi.org/10.1515/dmdi-2013-0014" history="1" highlightClick="0" endSnd="0">
+                <a:hlinkClick r:id="rId3" invalidUrl="" action="" tgtFrame="" tooltip="https://www.jcdr.net/articles/PDF/576/501.pdf" history="1" highlightClick="0" endSnd="0">
                   <a:extLst>
                     <a:ext uri="{A12FA001-AC4F-418D-AE19-62706E023703}">
                       <ahyp:hlinkClr xmlns:ahyp="http://schemas.microsoft.com/office/drawing/2018/hyperlinkcolor" val="tx"/>
@@ -3758,7 +5116,7 @@
                   </a:extLst>
                 </a:hlinkClick>
               </a:rPr>
-              <a:t>doi.org/10.1515/dmdi-2013-0014</a:t>
+              <a:t>jcdr.net/articles/PDF/576/501.pdf</a:t>
             </a:r>
             <a:endParaRPr lang="en-US" sz="580" dirty="0"/>
           </a:p>
@@ -3766,13 +5124,13 @@
       </p:sp>
       <p:sp>
         <p:nvSpPr>
-          <p:cNvPr id="36" name="Shape 34"/>
+          <p:cNvPr id="30" name="Shape 28"/>
           <p:cNvSpPr/>
           <p:nvPr/>
         </p:nvSpPr>
         <p:spPr>
           <a:xfrm>
-            <a:off x="301752" y="2697480"/>
+            <a:off x="301752" y="2281428"/>
             <a:ext cx="3017520" cy="384048"/>
           </a:xfrm>
           <a:prstGeom prst="roundRect">
@@ -3793,13 +5151,13 @@
       </p:sp>
       <p:sp>
         <p:nvSpPr>
-          <p:cNvPr id="37" name="Shape 35"/>
+          <p:cNvPr id="31" name="Shape 29"/>
           <p:cNvSpPr/>
           <p:nvPr/>
         </p:nvSpPr>
         <p:spPr>
           <a:xfrm>
-            <a:off x="347472" y="2798064"/>
+            <a:off x="347472" y="2382012"/>
             <a:ext cx="219456" cy="219456"/>
           </a:xfrm>
           <a:prstGeom prst="ellipse">
@@ -3818,13 +5176,13 @@
       </p:sp>
       <p:sp>
         <p:nvSpPr>
-          <p:cNvPr id="38" name="Text 36"/>
-          <p:cNvSpPr txBox="1"/>
-          <p:nvPr/>
-        </p:nvSpPr>
-        <p:spPr>
-          <a:xfrm>
-            <a:off x="347472" y="2798064"/>
+          <p:cNvPr id="32" name="Text 30"/>
+          <p:cNvSpPr txBox="1"/>
+          <p:nvPr/>
+        </p:nvSpPr>
+        <p:spPr>
+          <a:xfrm>
+            <a:off x="347472" y="2382012"/>
             <a:ext cx="219456" cy="219456"/>
           </a:xfrm>
           <a:prstGeom prst="rect">
@@ -3849,7 +5207,7 @@
                 <a:ea typeface="Arial" pitchFamily="34" charset="-122"/>
                 <a:cs typeface="Arial" pitchFamily="34" charset="-120"/>
               </a:rPr>
-              <a:t>5</a:t>
+              <a:t>4</a:t>
             </a:r>
             <a:endParaRPr lang="en-US" sz="864" dirty="0"/>
           </a:p>
@@ -3857,13 +5215,13 @@
       </p:sp>
       <p:sp>
         <p:nvSpPr>
-          <p:cNvPr id="39" name="Text 37"/>
-          <p:cNvSpPr txBox="1"/>
-          <p:nvPr/>
-        </p:nvSpPr>
-        <p:spPr>
-          <a:xfrm>
-            <a:off x="621792" y="2715768"/>
+          <p:cNvPr id="33" name="Text 31"/>
+          <p:cNvSpPr txBox="1"/>
+          <p:nvPr/>
+        </p:nvSpPr>
+        <p:spPr>
+          <a:xfrm>
+            <a:off x="621792" y="2299716"/>
             <a:ext cx="2670048" cy="146304"/>
           </a:xfrm>
           <a:prstGeom prst="rect">
@@ -3888,7 +5246,7 @@
                 <a:ea typeface="Arial" pitchFamily="34" charset="-122"/>
                 <a:cs typeface="Arial" pitchFamily="34" charset="-120"/>
               </a:rPr>
-              <a:t>NSSO Survey on Ayush 2022-23 (MoSPI press note)</a:t>
+              <a:t>Interactions between substances in Ayurveda</a:t>
             </a:r>
             <a:endParaRPr lang="en-US" sz="690" dirty="0"/>
           </a:p>
@@ -3896,13 +5254,13 @@
       </p:sp>
       <p:sp>
         <p:nvSpPr>
-          <p:cNvPr id="40" name="Text 38"/>
-          <p:cNvSpPr txBox="1"/>
-          <p:nvPr/>
-        </p:nvSpPr>
-        <p:spPr>
-          <a:xfrm>
-            <a:off x="621792" y="2834640"/>
+          <p:cNvPr id="34" name="Text 32"/>
+          <p:cNvSpPr txBox="1"/>
+          <p:nvPr/>
+        </p:nvSpPr>
+        <p:spPr>
+          <a:xfrm>
+            <a:off x="621792" y="2418588"/>
             <a:ext cx="2670048" cy="118872"/>
           </a:xfrm>
           <a:prstGeom prst="rect">
@@ -3927,7 +5285,7 @@
                 <a:ea typeface="Arial" pitchFamily="34" charset="-122"/>
                 <a:cs typeface="Arial" pitchFamily="34" charset="-120"/>
               </a:rPr>
-              <a:t>Ayurveda is the most used Ayush system</a:t>
+              <a:t>Food–drug &amp; Ayurveda–modern drug review, 2013</a:t>
             </a:r>
             <a:endParaRPr lang="en-US" sz="580" dirty="0"/>
           </a:p>
@@ -3935,13 +5293,13 @@
       </p:sp>
       <p:sp>
         <p:nvSpPr>
-          <p:cNvPr id="41" name="Text 39"/>
-          <p:cNvSpPr txBox="1"/>
-          <p:nvPr/>
-        </p:nvSpPr>
-        <p:spPr>
-          <a:xfrm>
-            <a:off x="621792" y="2953512"/>
+          <p:cNvPr id="35" name="Text 33"/>
+          <p:cNvSpPr txBox="1"/>
+          <p:nvPr/>
+        </p:nvSpPr>
+        <p:spPr>
+          <a:xfrm>
+            <a:off x="621792" y="2537460"/>
             <a:ext cx="2670048" cy="118872"/>
           </a:xfrm>
           <a:prstGeom prst="rect">
@@ -3965,7 +5323,7 @@
                 <a:latin typeface="Arial" pitchFamily="34" charset="0"/>
                 <a:ea typeface="Arial" pitchFamily="34" charset="-122"/>
                 <a:cs typeface="Arial" pitchFamily="34" charset="-120"/>
-                <a:hlinkClick r:id="rId5" invalidUrl="" action="" tgtFrame="" tooltip="https://www.mospi.gov.in/sites/default/files/press_release/PressNote_Ayush_13062024N.pdf" history="1" highlightClick="0" endSnd="0">
+                <a:hlinkClick r:id="rId4" invalidUrl="" action="" tgtFrame="" tooltip="https://doi.org/10.1515/dmdi-2013-0014" history="1" highlightClick="0" endSnd="0">
                   <a:extLst>
                     <a:ext uri="{A12FA001-AC4F-418D-AE19-62706E023703}">
                       <ahyp:hlinkClr xmlns:ahyp="http://schemas.microsoft.com/office/drawing/2018/hyperlinkcolor" val="tx"/>
@@ -3973,7 +5331,7 @@
                   </a:extLst>
                 </a:hlinkClick>
               </a:rPr>
-              <a:t>mospi.gov.in/…/PressNote_Ayush_13062024N.pdf</a:t>
+              <a:t>doi.org/10.1515/dmdi-2013-0014</a:t>
             </a:r>
             <a:endParaRPr lang="en-US" sz="580" dirty="0"/>
           </a:p>
@@ -3981,13 +5339,13 @@
       </p:sp>
       <p:sp>
         <p:nvSpPr>
-          <p:cNvPr id="42" name="Shape 40"/>
+          <p:cNvPr id="36" name="Shape 34"/>
           <p:cNvSpPr/>
           <p:nvPr/>
         </p:nvSpPr>
         <p:spPr>
           <a:xfrm>
-            <a:off x="301752" y="3113532"/>
+            <a:off x="301752" y="2697480"/>
             <a:ext cx="3017520" cy="384048"/>
           </a:xfrm>
           <a:prstGeom prst="roundRect">
@@ -4008,13 +5366,13 @@
       </p:sp>
       <p:sp>
         <p:nvSpPr>
-          <p:cNvPr id="43" name="Shape 41"/>
+          <p:cNvPr id="37" name="Shape 35"/>
           <p:cNvSpPr/>
           <p:nvPr/>
         </p:nvSpPr>
         <p:spPr>
           <a:xfrm>
-            <a:off x="347472" y="3214116"/>
+            <a:off x="347472" y="2798064"/>
             <a:ext cx="219456" cy="219456"/>
           </a:xfrm>
           <a:prstGeom prst="ellipse">
@@ -4033,13 +5391,13 @@
       </p:sp>
       <p:sp>
         <p:nvSpPr>
-          <p:cNvPr id="44" name="Text 42"/>
-          <p:cNvSpPr txBox="1"/>
-          <p:nvPr/>
-        </p:nvSpPr>
-        <p:spPr>
-          <a:xfrm>
-            <a:off x="347472" y="3214116"/>
+          <p:cNvPr id="38" name="Text 36"/>
+          <p:cNvSpPr txBox="1"/>
+          <p:nvPr/>
+        </p:nvSpPr>
+        <p:spPr>
+          <a:xfrm>
+            <a:off x="347472" y="2798064"/>
             <a:ext cx="219456" cy="219456"/>
           </a:xfrm>
           <a:prstGeom prst="rect">
@@ -4064,7 +5422,7 @@
                 <a:ea typeface="Arial" pitchFamily="34" charset="-122"/>
                 <a:cs typeface="Arial" pitchFamily="34" charset="-120"/>
               </a:rPr>
-              <a:t>6</a:t>
+              <a:t>5</a:t>
             </a:r>
             <a:endParaRPr lang="en-US" sz="864" dirty="0"/>
           </a:p>
@@ -4072,13 +5430,13 @@
       </p:sp>
       <p:sp>
         <p:nvSpPr>
-          <p:cNvPr id="45" name="Text 43"/>
-          <p:cNvSpPr txBox="1"/>
-          <p:nvPr/>
-        </p:nvSpPr>
-        <p:spPr>
-          <a:xfrm>
-            <a:off x="621792" y="3131820"/>
+          <p:cNvPr id="39" name="Text 37"/>
+          <p:cNvSpPr txBox="1"/>
+          <p:nvPr/>
+        </p:nvSpPr>
+        <p:spPr>
+          <a:xfrm>
+            <a:off x="621792" y="2715768"/>
             <a:ext cx="2670048" cy="146304"/>
           </a:xfrm>
           <a:prstGeom prst="rect">
@@ -4103,7 +5461,7 @@
                 <a:ea typeface="Arial" pitchFamily="34" charset="-122"/>
                 <a:cs typeface="Arial" pitchFamily="34" charset="-120"/>
               </a:rPr>
-              <a:t>Ayush Suraksha portal (Ministry of Ayush)</a:t>
+              <a:t>NSSO Survey on Ayush 2022-23 (MoSPI press note)</a:t>
             </a:r>
             <a:endParaRPr lang="en-US" sz="690" dirty="0"/>
           </a:p>
@@ -4111,13 +5469,13 @@
       </p:sp>
       <p:sp>
         <p:nvSpPr>
-          <p:cNvPr id="46" name="Text 44"/>
-          <p:cNvSpPr txBox="1"/>
-          <p:nvPr/>
-        </p:nvSpPr>
-        <p:spPr>
-          <a:xfrm>
-            <a:off x="621792" y="3250692"/>
+          <p:cNvPr id="40" name="Text 38"/>
+          <p:cNvSpPr txBox="1"/>
+          <p:nvPr/>
+        </p:nvSpPr>
+        <p:spPr>
+          <a:xfrm>
+            <a:off x="621792" y="2834640"/>
             <a:ext cx="2670048" cy="118872"/>
           </a:xfrm>
           <a:prstGeom prst="rect">
@@ -4142,7 +5500,7 @@
                 <a:ea typeface="Arial" pitchFamily="34" charset="-122"/>
                 <a:cs typeface="Arial" pitchFamily="34" charset="-120"/>
               </a:rPr>
-              <a:t>Suspected ADR reporting for ASU&amp;H drugs</a:t>
+              <a:t>Ayurveda is the most used Ayush system</a:t>
             </a:r>
             <a:endParaRPr lang="en-US" sz="580" dirty="0"/>
           </a:p>
@@ -4150,13 +5508,13 @@
       </p:sp>
       <p:sp>
         <p:nvSpPr>
-          <p:cNvPr id="47" name="Text 45"/>
-          <p:cNvSpPr txBox="1"/>
-          <p:nvPr/>
-        </p:nvSpPr>
-        <p:spPr>
-          <a:xfrm>
-            <a:off x="621792" y="3369564"/>
+          <p:cNvPr id="41" name="Text 39"/>
+          <p:cNvSpPr txBox="1"/>
+          <p:nvPr/>
+        </p:nvSpPr>
+        <p:spPr>
+          <a:xfrm>
+            <a:off x="621792" y="2953512"/>
             <a:ext cx="2670048" cy="118872"/>
           </a:xfrm>
           <a:prstGeom prst="rect">
@@ -4180,7 +5538,7 @@
                 <a:latin typeface="Arial" pitchFamily="34" charset="0"/>
                 <a:ea typeface="Arial" pitchFamily="34" charset="-122"/>
                 <a:cs typeface="Arial" pitchFamily="34" charset="-120"/>
-                <a:hlinkClick r:id="rId6" invalidUrl="" action="" tgtFrame="" tooltip="https://suraksha.ayush.gov.in/" history="1" highlightClick="0" endSnd="0">
+                <a:hlinkClick r:id="rId5" invalidUrl="" action="" tgtFrame="" tooltip="https://www.mospi.gov.in/sites/default/files/press_release/PressNote_Ayush_13062024N.pdf" history="1" highlightClick="0" endSnd="0">
                   <a:extLst>
                     <a:ext uri="{A12FA001-AC4F-418D-AE19-62706E023703}">
                       <ahyp:hlinkClr xmlns:ahyp="http://schemas.microsoft.com/office/drawing/2018/hyperlinkcolor" val="tx"/>
@@ -4188,7 +5546,7 @@
                   </a:extLst>
                 </a:hlinkClick>
               </a:rPr>
-              <a:t>suraksha.ayush.gov.in</a:t>
+              <a:t>mospi.gov.in/…/PressNote_Ayush_13062024N.pdf</a:t>
             </a:r>
             <a:endParaRPr lang="en-US" sz="580" dirty="0"/>
           </a:p>
@@ -4196,13 +5554,13 @@
       </p:sp>
       <p:sp>
         <p:nvSpPr>
-          <p:cNvPr id="48" name="Shape 46"/>
+          <p:cNvPr id="42" name="Shape 40"/>
           <p:cNvSpPr/>
           <p:nvPr/>
         </p:nvSpPr>
         <p:spPr>
           <a:xfrm>
-            <a:off x="301752" y="3529584"/>
+            <a:off x="301752" y="3113532"/>
             <a:ext cx="3017520" cy="384048"/>
           </a:xfrm>
           <a:prstGeom prst="roundRect">
@@ -4223,13 +5581,13 @@
       </p:sp>
       <p:sp>
         <p:nvSpPr>
-          <p:cNvPr id="49" name="Shape 47"/>
+          <p:cNvPr id="43" name="Shape 41"/>
           <p:cNvSpPr/>
           <p:nvPr/>
         </p:nvSpPr>
         <p:spPr>
           <a:xfrm>
-            <a:off x="347472" y="3630168"/>
+            <a:off x="347472" y="3214116"/>
             <a:ext cx="219456" cy="219456"/>
           </a:xfrm>
           <a:prstGeom prst="ellipse">
@@ -4248,13 +5606,13 @@
       </p:sp>
       <p:sp>
         <p:nvSpPr>
-          <p:cNvPr id="50" name="Text 48"/>
-          <p:cNvSpPr txBox="1"/>
-          <p:nvPr/>
-        </p:nvSpPr>
-        <p:spPr>
-          <a:xfrm>
-            <a:off x="347472" y="3630168"/>
+          <p:cNvPr id="44" name="Text 42"/>
+          <p:cNvSpPr txBox="1"/>
+          <p:nvPr/>
+        </p:nvSpPr>
+        <p:spPr>
+          <a:xfrm>
+            <a:off x="347472" y="3214116"/>
             <a:ext cx="219456" cy="219456"/>
           </a:xfrm>
           <a:prstGeom prst="rect">
@@ -4279,7 +5637,7 @@
                 <a:ea typeface="Arial" pitchFamily="34" charset="-122"/>
                 <a:cs typeface="Arial" pitchFamily="34" charset="-120"/>
               </a:rPr>
-              <a:t>7</a:t>
+              <a:t>6</a:t>
             </a:r>
             <a:endParaRPr lang="en-US" sz="864" dirty="0"/>
           </a:p>
@@ -4287,13 +5645,13 @@
       </p:sp>
       <p:sp>
         <p:nvSpPr>
-          <p:cNvPr id="51" name="Text 49"/>
-          <p:cNvSpPr txBox="1"/>
-          <p:nvPr/>
-        </p:nvSpPr>
-        <p:spPr>
-          <a:xfrm>
-            <a:off x="621792" y="3547872"/>
+          <p:cNvPr id="45" name="Text 43"/>
+          <p:cNvSpPr txBox="1"/>
+          <p:nvPr/>
+        </p:nvSpPr>
+        <p:spPr>
+          <a:xfrm>
+            <a:off x="621792" y="3131820"/>
             <a:ext cx="2670048" cy="146304"/>
           </a:xfrm>
           <a:prstGeom prst="rect">
@@ -4318,7 +5676,7 @@
                 <a:ea typeface="Arial" pitchFamily="34" charset="-122"/>
                 <a:cs typeface="Arial" pitchFamily="34" charset="-120"/>
               </a:rPr>
-              <a:t>ASU&amp;H pharmacovigilance (ITRA, Jamnagar)</a:t>
+              <a:t>Ayush Suraksha portal (Ministry of Ayush)</a:t>
             </a:r>
             <a:endParaRPr lang="en-US" sz="690" dirty="0"/>
           </a:p>
@@ -4326,13 +5684,13 @@
       </p:sp>
       <p:sp>
         <p:nvSpPr>
-          <p:cNvPr id="52" name="Text 50"/>
-          <p:cNvSpPr txBox="1"/>
-          <p:nvPr/>
-        </p:nvSpPr>
-        <p:spPr>
-          <a:xfrm>
-            <a:off x="621792" y="3666744"/>
+          <p:cNvPr id="46" name="Text 44"/>
+          <p:cNvSpPr txBox="1"/>
+          <p:nvPr/>
+        </p:nvSpPr>
+        <p:spPr>
+          <a:xfrm>
+            <a:off x="621792" y="3250692"/>
             <a:ext cx="2670048" cy="118872"/>
           </a:xfrm>
           <a:prstGeom prst="rect">
@@ -4357,7 +5715,7 @@
                 <a:ea typeface="Arial" pitchFamily="34" charset="-122"/>
                 <a:cs typeface="Arial" pitchFamily="34" charset="-120"/>
               </a:rPr>
-              <a:t>PPvC / IPvC reporting network</a:t>
+              <a:t>Suspected ADR reporting for ASU&amp;H drugs</a:t>
             </a:r>
             <a:endParaRPr lang="en-US" sz="580" dirty="0"/>
           </a:p>
@@ -4365,13 +5723,13 @@
       </p:sp>
       <p:sp>
         <p:nvSpPr>
-          <p:cNvPr id="53" name="Text 51"/>
-          <p:cNvSpPr txBox="1"/>
-          <p:nvPr/>
-        </p:nvSpPr>
-        <p:spPr>
-          <a:xfrm>
-            <a:off x="621792" y="3785616"/>
+          <p:cNvPr id="47" name="Text 45"/>
+          <p:cNvSpPr txBox="1"/>
+          <p:nvPr/>
+        </p:nvSpPr>
+        <p:spPr>
+          <a:xfrm>
+            <a:off x="621792" y="3369564"/>
             <a:ext cx="2670048" cy="118872"/>
           </a:xfrm>
           <a:prstGeom prst="rect">
@@ -4395,7 +5753,7 @@
                 <a:latin typeface="Arial" pitchFamily="34" charset="0"/>
                 <a:ea typeface="Arial" pitchFamily="34" charset="-122"/>
                 <a:cs typeface="Arial" pitchFamily="34" charset="-120"/>
-                <a:hlinkClick r:id="rId7" invalidUrl="" action="" tgtFrame="" tooltip="https://itra.ac.in/pharmacovigilance" history="1" highlightClick="0" endSnd="0">
+                <a:hlinkClick r:id="rId6" invalidUrl="" action="" tgtFrame="" tooltip="https://suraksha.ayush.gov.in/" history="1" highlightClick="0" endSnd="0">
                   <a:extLst>
                     <a:ext uri="{A12FA001-AC4F-418D-AE19-62706E023703}">
                       <ahyp:hlinkClr xmlns:ahyp="http://schemas.microsoft.com/office/drawing/2018/hyperlinkcolor" val="tx"/>
@@ -4403,7 +5761,7 @@
                   </a:extLst>
                 </a:hlinkClick>
               </a:rPr>
-              <a:t>itra.ac.in/pharmacovigilance</a:t>
+              <a:t>suraksha.ayush.gov.in</a:t>
             </a:r>
             <a:endParaRPr lang="en-US" sz="580" dirty="0"/>
           </a:p>
@@ -4411,13 +5769,13 @@
       </p:sp>
       <p:sp>
         <p:nvSpPr>
-          <p:cNvPr id="54" name="Shape 52"/>
+          <p:cNvPr id="48" name="Shape 46"/>
           <p:cNvSpPr/>
           <p:nvPr/>
         </p:nvSpPr>
         <p:spPr>
           <a:xfrm>
-            <a:off x="301752" y="3945636"/>
+            <a:off x="301752" y="3529584"/>
             <a:ext cx="3017520" cy="384048"/>
           </a:xfrm>
           <a:prstGeom prst="roundRect">
@@ -4438,13 +5796,13 @@
       </p:sp>
       <p:sp>
         <p:nvSpPr>
-          <p:cNvPr id="55" name="Shape 53"/>
+          <p:cNvPr id="49" name="Shape 47"/>
           <p:cNvSpPr/>
           <p:nvPr/>
         </p:nvSpPr>
         <p:spPr>
           <a:xfrm>
-            <a:off x="347472" y="4046220"/>
+            <a:off x="347472" y="3630168"/>
             <a:ext cx="219456" cy="219456"/>
           </a:xfrm>
           <a:prstGeom prst="ellipse">
@@ -4463,13 +5821,13 @@
       </p:sp>
       <p:sp>
         <p:nvSpPr>
-          <p:cNvPr id="56" name="Text 54"/>
-          <p:cNvSpPr txBox="1"/>
-          <p:nvPr/>
-        </p:nvSpPr>
-        <p:spPr>
-          <a:xfrm>
-            <a:off x="347472" y="4046220"/>
+          <p:cNvPr id="50" name="Text 48"/>
+          <p:cNvSpPr txBox="1"/>
+          <p:nvPr/>
+        </p:nvSpPr>
+        <p:spPr>
+          <a:xfrm>
+            <a:off x="347472" y="3630168"/>
             <a:ext cx="219456" cy="219456"/>
           </a:xfrm>
           <a:prstGeom prst="rect">
@@ -4494,7 +5852,7 @@
                 <a:ea typeface="Arial" pitchFamily="34" charset="-122"/>
                 <a:cs typeface="Arial" pitchFamily="34" charset="-120"/>
               </a:rPr>
-              <a:t>8</a:t>
+              <a:t>7</a:t>
             </a:r>
             <a:endParaRPr lang="en-US" sz="864" dirty="0"/>
           </a:p>
@@ -4502,13 +5860,13 @@
       </p:sp>
       <p:sp>
         <p:nvSpPr>
-          <p:cNvPr id="57" name="Text 55"/>
-          <p:cNvSpPr txBox="1"/>
-          <p:nvPr/>
-        </p:nvSpPr>
-        <p:spPr>
-          <a:xfrm>
-            <a:off x="621792" y="3963924"/>
+          <p:cNvPr id="51" name="Text 49"/>
+          <p:cNvSpPr txBox="1"/>
+          <p:nvPr/>
+        </p:nvSpPr>
+        <p:spPr>
+          <a:xfrm>
+            <a:off x="621792" y="3547872"/>
             <a:ext cx="2670048" cy="146304"/>
           </a:xfrm>
           <a:prstGeom prst="rect">
@@ -4533,7 +5891,7 @@
                 <a:ea typeface="Arial" pitchFamily="34" charset="-122"/>
                 <a:cs typeface="Arial" pitchFamily="34" charset="-120"/>
               </a:rPr>
-              <a:t>Open-source tools we build on</a:t>
+              <a:t>ASU&amp;H pharmacovigilance (ITRA, Jamnagar)</a:t>
             </a:r>
             <a:endParaRPr lang="en-US" sz="690" dirty="0"/>
           </a:p>
@@ -4541,13 +5899,13 @@
       </p:sp>
       <p:sp>
         <p:nvSpPr>
-          <p:cNvPr id="58" name="Text 56"/>
-          <p:cNvSpPr txBox="1"/>
-          <p:nvPr/>
-        </p:nvSpPr>
-        <p:spPr>
-          <a:xfrm>
-            <a:off x="621792" y="4082796"/>
+          <p:cNvPr id="52" name="Text 50"/>
+          <p:cNvSpPr txBox="1"/>
+          <p:nvPr/>
+        </p:nvSpPr>
+        <p:spPr>
+          <a:xfrm>
+            <a:off x="621792" y="3666744"/>
             <a:ext cx="2670048" cy="118872"/>
           </a:xfrm>
           <a:prstGeom prst="rect">
@@ -4572,7 +5930,7 @@
                 <a:ea typeface="Arial" pitchFamily="34" charset="-122"/>
                 <a:cs typeface="Arial" pitchFamily="34" charset="-120"/>
               </a:rPr>
-              <a:t>OCR (Tesseract) and name matching (RapidFuzz)</a:t>
+              <a:t>PPvC / IPvC reporting network</a:t>
             </a:r>
             <a:endParaRPr lang="en-US" sz="580" dirty="0"/>
           </a:p>
@@ -4580,13 +5938,13 @@
       </p:sp>
       <p:sp>
         <p:nvSpPr>
-          <p:cNvPr id="59" name="Text 57"/>
-          <p:cNvSpPr txBox="1"/>
-          <p:nvPr/>
-        </p:nvSpPr>
-        <p:spPr>
-          <a:xfrm>
-            <a:off x="621792" y="4201668"/>
+          <p:cNvPr id="53" name="Text 51"/>
+          <p:cNvSpPr txBox="1"/>
+          <p:nvPr/>
+        </p:nvSpPr>
+        <p:spPr>
+          <a:xfrm>
+            <a:off x="621792" y="3785616"/>
             <a:ext cx="2670048" cy="118872"/>
           </a:xfrm>
           <a:prstGeom prst="rect">
@@ -4610,7 +5968,7 @@
                 <a:latin typeface="Arial" pitchFamily="34" charset="0"/>
                 <a:ea typeface="Arial" pitchFamily="34" charset="-122"/>
                 <a:cs typeface="Arial" pitchFamily="34" charset="-120"/>
-                <a:hlinkClick r:id="rId8" invalidUrl="" action="" tgtFrame="" tooltip="https://github.com/tesseract-ocr/tesseract" history="1" highlightClick="0" endSnd="0">
+                <a:hlinkClick r:id="rId7" invalidUrl="" action="" tgtFrame="" tooltip="https://itra.ac.in/pharmacovigilance" history="1" highlightClick="0" endSnd="0">
                   <a:extLst>
                     <a:ext uri="{A12FA001-AC4F-418D-AE19-62706E023703}">
                       <ahyp:hlinkClr xmlns:ahyp="http://schemas.microsoft.com/office/drawing/2018/hyperlinkcolor" val="tx"/>
@@ -4618,7 +5976,7 @@
                   </a:extLst>
                 </a:hlinkClick>
               </a:rPr>
-              <a:t>github.com/tesseract-ocr · github.com/rapidfuzz</a:t>
+              <a:t>itra.ac.in/pharmacovigilance</a:t>
             </a:r>
             <a:endParaRPr lang="en-US" sz="580" dirty="0"/>
           </a:p>
@@ -4626,13 +5984,13 @@
       </p:sp>
       <p:sp>
         <p:nvSpPr>
-          <p:cNvPr id="60" name="Shape 58"/>
+          <p:cNvPr id="54" name="Shape 52"/>
           <p:cNvSpPr/>
           <p:nvPr/>
         </p:nvSpPr>
         <p:spPr>
           <a:xfrm>
-            <a:off x="301752" y="4361688"/>
+            <a:off x="301752" y="3945636"/>
             <a:ext cx="3017520" cy="384048"/>
           </a:xfrm>
           <a:prstGeom prst="roundRect">
@@ -4653,13 +6011,13 @@
       </p:sp>
       <p:sp>
         <p:nvSpPr>
-          <p:cNvPr id="61" name="Shape 59"/>
+          <p:cNvPr id="55" name="Shape 53"/>
           <p:cNvSpPr/>
           <p:nvPr/>
         </p:nvSpPr>
         <p:spPr>
           <a:xfrm>
-            <a:off x="347472" y="4462272"/>
+            <a:off x="347472" y="4046220"/>
             <a:ext cx="219456" cy="219456"/>
           </a:xfrm>
           <a:prstGeom prst="ellipse">
@@ -4678,6 +6036,221 @@
       </p:sp>
       <p:sp>
         <p:nvSpPr>
+          <p:cNvPr id="56" name="Text 54"/>
+          <p:cNvSpPr txBox="1"/>
+          <p:nvPr/>
+        </p:nvSpPr>
+        <p:spPr>
+          <a:xfrm>
+            <a:off x="347472" y="4046220"/>
+            <a:ext cx="219456" cy="219456"/>
+          </a:xfrm>
+          <a:prstGeom prst="rect">
+            <a:avLst/>
+          </a:prstGeom>
+          <a:noFill/>
+          <a:ln/>
+        </p:spPr>
+        <p:txBody>
+          <a:bodyPr wrap="square" lIns="0" tIns="0" rIns="0" bIns="0" rtlCol="0" anchor="ctr"/>
+          <a:lstStyle/>
+          <a:p>
+            <a:pPr algn="ctr" indent="0" marL="0">
+              <a:buNone/>
+            </a:pPr>
+            <a:r>
+              <a:rPr lang="en-US" sz="864" b="1" dirty="0">
+                <a:solidFill>
+                  <a:srgbClr val="FFFFFF"/>
+                </a:solidFill>
+                <a:latin typeface="Arial" pitchFamily="34" charset="0"/>
+                <a:ea typeface="Arial" pitchFamily="34" charset="-122"/>
+                <a:cs typeface="Arial" pitchFamily="34" charset="-120"/>
+              </a:rPr>
+              <a:t>8</a:t>
+            </a:r>
+            <a:endParaRPr lang="en-US" sz="864" dirty="0"/>
+          </a:p>
+        </p:txBody>
+      </p:sp>
+      <p:sp>
+        <p:nvSpPr>
+          <p:cNvPr id="57" name="Text 55"/>
+          <p:cNvSpPr txBox="1"/>
+          <p:nvPr/>
+        </p:nvSpPr>
+        <p:spPr>
+          <a:xfrm>
+            <a:off x="621792" y="3963924"/>
+            <a:ext cx="2670048" cy="146304"/>
+          </a:xfrm>
+          <a:prstGeom prst="rect">
+            <a:avLst/>
+          </a:prstGeom>
+          <a:noFill/>
+          <a:ln/>
+        </p:spPr>
+        <p:txBody>
+          <a:bodyPr wrap="square" lIns="0" tIns="0" rIns="0" bIns="0" rtlCol="0" anchor="t"/>
+          <a:lstStyle/>
+          <a:p>
+            <a:pPr indent="0" marL="0">
+              <a:buNone/>
+            </a:pPr>
+            <a:r>
+              <a:rPr lang="en-US" sz="690" b="1" dirty="0">
+                <a:solidFill>
+                  <a:srgbClr val="8B2A2A"/>
+                </a:solidFill>
+                <a:latin typeface="Arial" pitchFamily="34" charset="0"/>
+                <a:ea typeface="Arial" pitchFamily="34" charset="-122"/>
+                <a:cs typeface="Arial" pitchFamily="34" charset="-120"/>
+              </a:rPr>
+              <a:t>Open-source tools we build on</a:t>
+            </a:r>
+            <a:endParaRPr lang="en-US" sz="690" dirty="0"/>
+          </a:p>
+        </p:txBody>
+      </p:sp>
+      <p:sp>
+        <p:nvSpPr>
+          <p:cNvPr id="58" name="Text 56"/>
+          <p:cNvSpPr txBox="1"/>
+          <p:nvPr/>
+        </p:nvSpPr>
+        <p:spPr>
+          <a:xfrm>
+            <a:off x="621792" y="4082796"/>
+            <a:ext cx="2670048" cy="118872"/>
+          </a:xfrm>
+          <a:prstGeom prst="rect">
+            <a:avLst/>
+          </a:prstGeom>
+          <a:noFill/>
+          <a:ln/>
+        </p:spPr>
+        <p:txBody>
+          <a:bodyPr wrap="square" lIns="0" tIns="0" rIns="0" bIns="0" rtlCol="0" anchor="t"/>
+          <a:lstStyle/>
+          <a:p>
+            <a:pPr indent="0" marL="0">
+              <a:buNone/>
+            </a:pPr>
+            <a:r>
+              <a:rPr lang="en-US" sz="580" dirty="0">
+                <a:solidFill>
+                  <a:srgbClr val="5D6166"/>
+                </a:solidFill>
+                <a:latin typeface="Arial" pitchFamily="34" charset="0"/>
+                <a:ea typeface="Arial" pitchFamily="34" charset="-122"/>
+                <a:cs typeface="Arial" pitchFamily="34" charset="-120"/>
+              </a:rPr>
+              <a:t>OCR (Tesseract) and name matching (RapidFuzz)</a:t>
+            </a:r>
+            <a:endParaRPr lang="en-US" sz="580" dirty="0"/>
+          </a:p>
+        </p:txBody>
+      </p:sp>
+      <p:sp>
+        <p:nvSpPr>
+          <p:cNvPr id="59" name="Text 57"/>
+          <p:cNvSpPr txBox="1"/>
+          <p:nvPr/>
+        </p:nvSpPr>
+        <p:spPr>
+          <a:xfrm>
+            <a:off x="621792" y="4201668"/>
+            <a:ext cx="2670048" cy="118872"/>
+          </a:xfrm>
+          <a:prstGeom prst="rect">
+            <a:avLst/>
+          </a:prstGeom>
+          <a:noFill/>
+          <a:ln/>
+        </p:spPr>
+        <p:txBody>
+          <a:bodyPr wrap="square" lIns="0" tIns="0" rIns="0" bIns="0" rtlCol="0" anchor="t"/>
+          <a:lstStyle/>
+          <a:p>
+            <a:pPr indent="0" marL="0">
+              <a:buNone/>
+            </a:pPr>
+            <a:r>
+              <a:rPr lang="en-US" sz="580" u="sng" dirty="0">
+                <a:solidFill>
+                  <a:srgbClr val="1155CC"/>
+                </a:solidFill>
+                <a:latin typeface="Arial" pitchFamily="34" charset="0"/>
+                <a:ea typeface="Arial" pitchFamily="34" charset="-122"/>
+                <a:cs typeface="Arial" pitchFamily="34" charset="-120"/>
+                <a:hlinkClick r:id="rId8" invalidUrl="" action="" tgtFrame="" tooltip="https://github.com/tesseract-ocr/tesseract" history="1" highlightClick="0" endSnd="0">
+                  <a:extLst>
+                    <a:ext uri="{A12FA001-AC4F-418D-AE19-62706E023703}">
+                      <ahyp:hlinkClr xmlns:ahyp="http://schemas.microsoft.com/office/drawing/2018/hyperlinkcolor" val="tx"/>
+                    </a:ext>
+                  </a:extLst>
+                </a:hlinkClick>
+              </a:rPr>
+              <a:t>github.com/tesseract-ocr · github.com/rapidfuzz</a:t>
+            </a:r>
+            <a:endParaRPr lang="en-US" sz="580" dirty="0"/>
+          </a:p>
+        </p:txBody>
+      </p:sp>
+      <p:sp>
+        <p:nvSpPr>
+          <p:cNvPr id="60" name="Shape 58"/>
+          <p:cNvSpPr/>
+          <p:nvPr/>
+        </p:nvSpPr>
+        <p:spPr>
+          <a:xfrm>
+            <a:off x="301752" y="4361688"/>
+            <a:ext cx="3017520" cy="384048"/>
+          </a:xfrm>
+          <a:prstGeom prst="roundRect">
+            <a:avLst>
+              <a:gd name="adj" fmla="val 9524"/>
+            </a:avLst>
+          </a:prstGeom>
+          <a:solidFill>
+            <a:srgbClr val="F6F3F3"/>
+          </a:solidFill>
+          <a:ln w="9525">
+            <a:solidFill>
+              <a:srgbClr val="D9CFCF"/>
+            </a:solidFill>
+            <a:prstDash val="solid"/>
+          </a:ln>
+        </p:spPr>
+      </p:sp>
+      <p:sp>
+        <p:nvSpPr>
+          <p:cNvPr id="61" name="Shape 59"/>
+          <p:cNvSpPr/>
+          <p:nvPr/>
+        </p:nvSpPr>
+        <p:spPr>
+          <a:xfrm>
+            <a:off x="347472" y="4462272"/>
+            <a:ext cx="219456" cy="219456"/>
+          </a:xfrm>
+          <a:prstGeom prst="ellipse">
+            <a:avLst/>
+          </a:prstGeom>
+          <a:solidFill>
+            <a:srgbClr val="8B2A2A"/>
+          </a:solidFill>
+          <a:ln w="12700">
+            <a:solidFill>
+              <a:srgbClr val="8B2A2A"/>
+            </a:solidFill>
+            <a:prstDash val="solid"/>
+          </a:ln>
+        </p:spPr>
+      </p:sp>
+      <p:sp>
+        <p:nvSpPr>
           <p:cNvPr id="62" name="Text 60"/>
           <p:cNvSpPr txBox="1"/>
           <p:nvPr/>
@@ -4880,7 +6453,7 @@
       </p:sp>
       <p:graphicFrame>
         <p:nvGraphicFramePr>
-          <p:cNvPr id="11" name="Table 0"/>
+          <p:cNvPr id="12" name="Table 0"/>
           <p:cNvGraphicFramePr>
             <a:graphicFrameLocks noGrp="1"/>
           </p:cNvGraphicFramePr>
@@ -21842,7 +23415,7 @@
                 <a:ea typeface="Times New Roman" pitchFamily="34" charset="-122"/>
                 <a:cs typeface="Times New Roman" pitchFamily="34" charset="-120"/>
               </a:rPr>
-              <a:t>FUTURE SCOPE</a:t>
+              <a:t>REVENUE MODEL</a:t>
             </a:r>
             <a:endParaRPr lang="en-US" sz="2000" dirty="0"/>
           </a:p>
@@ -21966,7 +23539,7 @@
                 <a:ea typeface="Arial" pitchFamily="34" charset="-122"/>
                 <a:cs typeface="Arial" pitchFamily="34" charset="-120"/>
               </a:rPr>
-              <a:t>TakeSure · Confidence before taking something · Team Bug Hunters · Kritical Hacks 2026 · Decision support, not diagnosis</a:t>
+              <a:t>TakeSure · Confidence before taking something · Team Bug Hunters · Kritical Hacks 2026 · Prices are launch assumptions, to be validated in the pilot</a:t>
             </a:r>
             <a:endParaRPr lang="en-US" sz="700" dirty="0"/>
           </a:p>
@@ -22019,12 +23592,12 @@
         </p:nvSpPr>
         <p:spPr>
           <a:xfrm>
-            <a:off x="228600" y="777240"/>
-            <a:ext cx="4251960" cy="4023360"/>
+            <a:off x="228600" y="749808"/>
+            <a:ext cx="4846320" cy="2514600"/>
           </a:xfrm>
           <a:prstGeom prst="roundRect">
             <a:avLst>
-              <a:gd name="adj" fmla="val 1136"/>
+              <a:gd name="adj" fmla="val 1818"/>
             </a:avLst>
           </a:prstGeom>
           <a:solidFill>
@@ -22046,8 +23619,8 @@
         </p:nvSpPr>
         <p:spPr>
           <a:xfrm>
-            <a:off x="228600" y="777240"/>
-            <a:ext cx="4251960" cy="237744"/>
+            <a:off x="228600" y="749808"/>
+            <a:ext cx="4846320" cy="237744"/>
           </a:xfrm>
           <a:prstGeom prst="rect">
             <a:avLst/>
@@ -22071,8 +23644,8 @@
         </p:nvSpPr>
         <p:spPr>
           <a:xfrm>
-            <a:off x="320040" y="777240"/>
-            <a:ext cx="4069080" cy="237744"/>
+            <a:off x="320040" y="749808"/>
+            <a:ext cx="4663440" cy="237744"/>
           </a:xfrm>
           <a:prstGeom prst="rect">
             <a:avLst/>
@@ -22096,238 +23669,1642 @@
                 <a:ea typeface="Arial" pitchFamily="34" charset="-122"/>
                 <a:cs typeface="Arial" pitchFamily="34" charset="-120"/>
               </a:rPr>
-              <a:t>ROADMAP</a:t>
+              <a:t>PRICE ECONOMICS</a:t>
             </a:r>
             <a:endParaRPr lang="en-US" sz="850" dirty="0"/>
           </a:p>
         </p:txBody>
       </p:sp>
-      <p:sp>
-        <p:nvSpPr>
-          <p:cNvPr id="12" name="Text 10"/>
-          <p:cNvSpPr txBox="1"/>
-          <p:nvPr/>
-        </p:nvSpPr>
-        <p:spPr>
-          <a:xfrm>
-            <a:off x="365760" y="1078992"/>
-            <a:ext cx="4023360" cy="3657600"/>
-          </a:xfrm>
-          <a:prstGeom prst="rect">
-            <a:avLst/>
-          </a:prstGeom>
-          <a:noFill/>
-          <a:ln/>
-        </p:spPr>
-        <p:txBody>
-          <a:bodyPr wrap="square" lIns="0" tIns="0" rIns="0" bIns="0" rtlCol="0" anchor="t"/>
-          <a:lstStyle/>
-          <a:p>
-            <a:pPr marL="114300" indent="-114300">
-              <a:spcAft>
-                <a:spcPts val="200"/>
-              </a:spcAft>
-              <a:buSzPct val="100000"/>
-              <a:buChar char="•"/>
-            </a:pPr>
-            <a:r>
-              <a:rPr lang="en-US" sz="840" b="1" dirty="0">
-                <a:solidFill>
-                  <a:srgbClr val="8B2A2A"/>
-                </a:solidFill>
-                <a:latin typeface="Arial" pitchFamily="34" charset="0"/>
-                <a:ea typeface="Arial" pitchFamily="34" charset="-122"/>
-                <a:cs typeface="Arial" pitchFamily="34" charset="-120"/>
-              </a:rPr>
-              <a:t>Knowledge base: </a:t>
-            </a:r>
-            <a:pPr indent="0" marL="0">
-              <a:spcAft>
-                <a:spcPts val="200"/>
-              </a:spcAft>
-              <a:buNone/>
-            </a:pPr>
-            <a:r>
-              <a:rPr lang="en-US" sz="840" dirty="0">
-                <a:solidFill>
-                  <a:srgbClr val="333333"/>
-                </a:solidFill>
-                <a:latin typeface="Arial" pitchFamily="34" charset="0"/>
-                <a:ea typeface="Arial" pitchFamily="34" charset="-122"/>
-                <a:cs typeface="Arial" pitchFamily="34" charset="-120"/>
-              </a:rPr>
-              <a:t>200+ pairs; second-reviewer rule on every citation; faculty review with an Ayurveda college or pharmacology department before public release.</a:t>
-            </a:r>
-            <a:endParaRPr lang="en-US" sz="840" dirty="0"/>
-          </a:p>
-          <a:p>
-            <a:pPr marL="114300" indent="-114300">
-              <a:spcAft>
-                <a:spcPts val="200"/>
-              </a:spcAft>
-              <a:buSzPct val="100000"/>
-              <a:buChar char="•"/>
-            </a:pPr>
-            <a:r>
-              <a:rPr lang="en-US" sz="840" b="1" dirty="0">
-                <a:solidFill>
-                  <a:srgbClr val="8B2A2A"/>
-                </a:solidFill>
-                <a:latin typeface="Arial" pitchFamily="34" charset="0"/>
-                <a:ea typeface="Arial" pitchFamily="34" charset="-122"/>
-                <a:cs typeface="Arial" pitchFamily="34" charset="-120"/>
-              </a:rPr>
-              <a:t>ML once data exists: </a:t>
-            </a:r>
-            <a:pPr indent="0" marL="0">
-              <a:spcAft>
-                <a:spcPts val="200"/>
-              </a:spcAft>
-              <a:buNone/>
-            </a:pPr>
-            <a:r>
-              <a:rPr lang="en-US" sz="840" dirty="0">
-                <a:solidFill>
-                  <a:srgbClr val="333333"/>
-                </a:solidFill>
-                <a:latin typeface="Arial" pitchFamily="34" charset="0"/>
-                <a:ea typeface="Arial" pitchFamily="34" charset="-122"/>
-                <a:cs typeface="Arial" pitchFamily="34" charset="-120"/>
-              </a:rPr>
-              <a:t>OCR fine-tuned on Indian labels and handwriting; a named-entity model for prescriptions; ranking of under-reported pairs for curation priority.</a:t>
-            </a:r>
-            <a:endParaRPr lang="en-US" sz="840" dirty="0"/>
-          </a:p>
-          <a:p>
-            <a:pPr marL="114300" indent="-114300">
-              <a:spcAft>
-                <a:spcPts val="200"/>
-              </a:spcAft>
-              <a:buSzPct val="100000"/>
-              <a:buChar char="•"/>
-            </a:pPr>
-            <a:r>
-              <a:rPr lang="en-US" sz="840" b="1" dirty="0">
-                <a:solidFill>
-                  <a:srgbClr val="8B2A2A"/>
-                </a:solidFill>
-                <a:latin typeface="Arial" pitchFamily="34" charset="0"/>
-                <a:ea typeface="Arial" pitchFamily="34" charset="-122"/>
-                <a:cs typeface="Arial" pitchFamily="34" charset="-120"/>
-              </a:rPr>
-              <a:t>TinyFish: </a:t>
-            </a:r>
-            <a:pPr indent="0" marL="0">
-              <a:spcAft>
-                <a:spcPts val="200"/>
-              </a:spcAft>
-              <a:buNone/>
-            </a:pPr>
-            <a:r>
-              <a:rPr lang="en-US" sz="840" dirty="0">
-                <a:solidFill>
-                  <a:srgbClr val="333333"/>
-                </a:solidFill>
-                <a:latin typeface="Arial" pitchFamily="34" charset="0"/>
-                <a:ea typeface="Arial" pitchFamily="34" charset="-122"/>
-                <a:cs typeface="Arial" pitchFamily="34" charset="-120"/>
-              </a:rPr>
-              <a:t>scheduled monthly re-verification of every citation; agent monitoring of LiverTox and Ayush Suraksha for new signals; product-catalogue sweeps of Himalaya, Dabur, Patanjali, Baidyanath.</a:t>
-            </a:r>
-            <a:endParaRPr lang="en-US" sz="840" dirty="0"/>
-          </a:p>
-          <a:p>
-            <a:pPr marL="114300" indent="-114300">
-              <a:spcAft>
-                <a:spcPts val="200"/>
-              </a:spcAft>
-              <a:buSzPct val="100000"/>
-              <a:buChar char="•"/>
-            </a:pPr>
-            <a:r>
-              <a:rPr lang="en-US" sz="840" b="1" dirty="0">
-                <a:solidFill>
-                  <a:srgbClr val="8B2A2A"/>
-                </a:solidFill>
-                <a:latin typeface="Arial" pitchFamily="34" charset="0"/>
-                <a:ea typeface="Arial" pitchFamily="34" charset="-122"/>
-                <a:cs typeface="Arial" pitchFamily="34" charset="-120"/>
-              </a:rPr>
-              <a:t>Integration: </a:t>
-            </a:r>
-            <a:pPr indent="0" marL="0">
-              <a:spcAft>
-                <a:spcPts val="200"/>
-              </a:spcAft>
-              <a:buNone/>
-            </a:pPr>
-            <a:r>
-              <a:rPr lang="en-US" sz="840" dirty="0">
-                <a:solidFill>
-                  <a:srgbClr val="333333"/>
-                </a:solidFill>
-                <a:latin typeface="Arial" pitchFamily="34" charset="0"/>
-                <a:ea typeface="Arial" pitchFamily="34" charset="-122"/>
-                <a:cs typeface="Arial" pitchFamily="34" charset="-120"/>
-              </a:rPr>
-              <a:t>Ayush Grid / ABDM so the verdict and ADR sit on the ABHA record; pharmacy-chain API; chemist QR pilot in one city.</a:t>
-            </a:r>
-            <a:endParaRPr lang="en-US" sz="840" dirty="0"/>
-          </a:p>
-          <a:p>
-            <a:pPr marL="114300" indent="-114300">
-              <a:spcAft>
-                <a:spcPts val="200"/>
-              </a:spcAft>
-              <a:buSzPct val="100000"/>
-              <a:buChar char="•"/>
-            </a:pPr>
-            <a:r>
-              <a:rPr lang="en-US" sz="840" b="1" dirty="0">
-                <a:solidFill>
-                  <a:srgbClr val="8B2A2A"/>
-                </a:solidFill>
-                <a:latin typeface="Arial" pitchFamily="34" charset="0"/>
-                <a:ea typeface="Arial" pitchFamily="34" charset="-122"/>
-                <a:cs typeface="Arial" pitchFamily="34" charset="-120"/>
-              </a:rPr>
-              <a:t>Out of scope by design: </a:t>
-            </a:r>
-            <a:pPr indent="0" marL="0">
-              <a:spcAft>
-                <a:spcPts val="200"/>
-              </a:spcAft>
-              <a:buNone/>
-            </a:pPr>
-            <a:r>
-              <a:rPr lang="en-US" sz="840" dirty="0">
-                <a:solidFill>
-                  <a:srgbClr val="333333"/>
-                </a:solidFill>
-                <a:latin typeface="Arial" pitchFamily="34" charset="0"/>
-                <a:ea typeface="Arial" pitchFamily="34" charset="-122"/>
-                <a:cs typeface="Arial" pitchFamily="34" charset="-120"/>
-              </a:rPr>
-              <a:t>diagnosis, dosing, herb–herb interactions, any trained model deciding a verdict.</a:t>
-            </a:r>
-            <a:endParaRPr lang="en-US" sz="840" dirty="0"/>
-          </a:p>
-        </p:txBody>
-      </p:sp>
-      <p:sp>
-        <p:nvSpPr>
-          <p:cNvPr id="13" name="Shape 11"/>
+      <p:graphicFrame>
+        <p:nvGraphicFramePr>
+          <p:cNvPr id="10" name="Table 0"/>
+          <p:cNvGraphicFramePr>
+            <a:graphicFrameLocks noGrp="1"/>
+          </p:cNvGraphicFramePr>
+          <p:nvPr>
+            <p:extLst>
+              <p:ext uri="{D42A27DB-BD31-4B8C-83A1-F6EECF244321}">
+                <p14:modId xmlns:p14="http://schemas.microsoft.com/office/powerpoint/2010/main" val="1579011935"/>
+              </p:ext>
+            </p:extLst>
+          </p:nvPr>
+        </p:nvGraphicFramePr>
+        <p:xfrm>
+          <a:off x="320040" y="1051560"/>
+          <a:ext cx="4663440" cy="914400"/>
+        </p:xfrm>
+        <a:graphic>
+          <a:graphicData uri="http://schemas.openxmlformats.org/drawingml/2006/table">
+            <a:tbl>
+              <a:tblPr/>
+              <a:tblGrid>
+                <a:gridCol w="1097280"/>
+                <a:gridCol w="1143000"/>
+                <a:gridCol w="960120"/>
+                <a:gridCol w="1463040"/>
+              </a:tblGrid>
+              <a:tr h="237744">
+                <a:tc>
+                  <a:txBody>
+                    <a:bodyPr/>
+                    <a:lstStyle/>
+                    <a:p>
+                      <a:pPr indent="0" marL="0">
+                        <a:buNone/>
+                      </a:pPr>
+                      <a:r>
+                        <a:rPr lang="en-US" sz="720" b="1" dirty="0">
+                          <a:solidFill>
+                            <a:srgbClr val="FFFFFF"/>
+                          </a:solidFill>
+                          <a:latin typeface="Arial" pitchFamily="34" charset="0"/>
+                          <a:ea typeface="Arial" pitchFamily="34" charset="-122"/>
+                          <a:cs typeface="Arial" pitchFamily="34" charset="-120"/>
+                        </a:rPr>
+                        <a:t>Segment</a:t>
+                      </a:r>
+                      <a:endParaRPr lang="en-US" sz="720" dirty="0">
+                        <a:latin typeface="Arial" charset="0"/>
+                        <a:ea typeface="Arial" charset="0"/>
+                        <a:cs typeface="Arial" charset="0"/>
+                      </a:endParaRPr>
+                    </a:p>
+                  </a:txBody>
+                  <a:tcPr marL="27432" marR="27432" marT="27432" marB="27432" anchor="ctr">
+                    <a:lnL w="6350" cap="flat" cmpd="sng" algn="ctr">
+                      <a:solidFill>
+                        <a:srgbClr val="D9CFCF"/>
+                      </a:solidFill>
+                      <a:prstDash val="solid"/>
+                      <a:round/>
+                      <a:headEnd type="none" w="med" len="med"/>
+                      <a:tailEnd type="none" w="med" len="med"/>
+                    </a:lnL>
+                    <a:lnR w="6350" cap="flat" cmpd="sng" algn="ctr">
+                      <a:solidFill>
+                        <a:srgbClr val="D9CFCF"/>
+                      </a:solidFill>
+                      <a:prstDash val="solid"/>
+                      <a:round/>
+                      <a:headEnd type="none" w="med" len="med"/>
+                      <a:tailEnd type="none" w="med" len="med"/>
+                    </a:lnR>
+                    <a:lnT w="6350" cap="flat" cmpd="sng" algn="ctr">
+                      <a:solidFill>
+                        <a:srgbClr val="D9CFCF"/>
+                      </a:solidFill>
+                      <a:prstDash val="solid"/>
+                      <a:round/>
+                      <a:headEnd type="none" w="med" len="med"/>
+                      <a:tailEnd type="none" w="med" len="med"/>
+                    </a:lnT>
+                    <a:lnB w="6350" cap="flat" cmpd="sng" algn="ctr">
+                      <a:solidFill>
+                        <a:srgbClr val="D9CFCF"/>
+                      </a:solidFill>
+                      <a:prstDash val="solid"/>
+                      <a:round/>
+                      <a:headEnd type="none" w="med" len="med"/>
+                      <a:tailEnd type="none" w="med" len="med"/>
+                    </a:lnB>
+                    <a:solidFill>
+                      <a:srgbClr val="8B2A2A"/>
+                    </a:solidFill>
+                  </a:tcPr>
+                </a:tc>
+                <a:tc>
+                  <a:txBody>
+                    <a:bodyPr/>
+                    <a:lstStyle/>
+                    <a:p>
+                      <a:pPr indent="0" marL="0">
+                        <a:buNone/>
+                      </a:pPr>
+                      <a:r>
+                        <a:rPr lang="en-US" sz="720" b="1" dirty="0">
+                          <a:solidFill>
+                            <a:srgbClr val="FFFFFF"/>
+                          </a:solidFill>
+                          <a:latin typeface="Arial" pitchFamily="34" charset="0"/>
+                          <a:ea typeface="Arial" pitchFamily="34" charset="-122"/>
+                          <a:cs typeface="Arial" pitchFamily="34" charset="-120"/>
+                        </a:rPr>
+                        <a:t>Offer</a:t>
+                      </a:r>
+                      <a:endParaRPr lang="en-US" sz="720" dirty="0">
+                        <a:latin typeface="Arial" charset="0"/>
+                        <a:ea typeface="Arial" charset="0"/>
+                        <a:cs typeface="Arial" charset="0"/>
+                      </a:endParaRPr>
+                    </a:p>
+                  </a:txBody>
+                  <a:tcPr marL="27432" marR="27432" marT="27432" marB="27432" anchor="ctr">
+                    <a:lnL w="6350" cap="flat" cmpd="sng" algn="ctr">
+                      <a:solidFill>
+                        <a:srgbClr val="D9CFCF"/>
+                      </a:solidFill>
+                      <a:prstDash val="solid"/>
+                      <a:round/>
+                      <a:headEnd type="none" w="med" len="med"/>
+                      <a:tailEnd type="none" w="med" len="med"/>
+                    </a:lnL>
+                    <a:lnR w="6350" cap="flat" cmpd="sng" algn="ctr">
+                      <a:solidFill>
+                        <a:srgbClr val="D9CFCF"/>
+                      </a:solidFill>
+                      <a:prstDash val="solid"/>
+                      <a:round/>
+                      <a:headEnd type="none" w="med" len="med"/>
+                      <a:tailEnd type="none" w="med" len="med"/>
+                    </a:lnR>
+                    <a:lnT w="6350" cap="flat" cmpd="sng" algn="ctr">
+                      <a:solidFill>
+                        <a:srgbClr val="D9CFCF"/>
+                      </a:solidFill>
+                      <a:prstDash val="solid"/>
+                      <a:round/>
+                      <a:headEnd type="none" w="med" len="med"/>
+                      <a:tailEnd type="none" w="med" len="med"/>
+                    </a:lnT>
+                    <a:lnB w="6350" cap="flat" cmpd="sng" algn="ctr">
+                      <a:solidFill>
+                        <a:srgbClr val="D9CFCF"/>
+                      </a:solidFill>
+                      <a:prstDash val="solid"/>
+                      <a:round/>
+                      <a:headEnd type="none" w="med" len="med"/>
+                      <a:tailEnd type="none" w="med" len="med"/>
+                    </a:lnB>
+                    <a:solidFill>
+                      <a:srgbClr val="8B2A2A"/>
+                    </a:solidFill>
+                  </a:tcPr>
+                </a:tc>
+                <a:tc>
+                  <a:txBody>
+                    <a:bodyPr/>
+                    <a:lstStyle/>
+                    <a:p>
+                      <a:pPr indent="0" marL="0">
+                        <a:buNone/>
+                      </a:pPr>
+                      <a:r>
+                        <a:rPr lang="en-US" sz="720" b="1" dirty="0">
+                          <a:solidFill>
+                            <a:srgbClr val="FFFFFF"/>
+                          </a:solidFill>
+                          <a:latin typeface="Arial" pitchFamily="34" charset="0"/>
+                          <a:ea typeface="Arial" pitchFamily="34" charset="-122"/>
+                          <a:cs typeface="Arial" pitchFamily="34" charset="-120"/>
+                        </a:rPr>
+                        <a:t>Price (launch)</a:t>
+                      </a:r>
+                      <a:endParaRPr lang="en-US" sz="720" dirty="0">
+                        <a:latin typeface="Arial" charset="0"/>
+                        <a:ea typeface="Arial" charset="0"/>
+                        <a:cs typeface="Arial" charset="0"/>
+                      </a:endParaRPr>
+                    </a:p>
+                  </a:txBody>
+                  <a:tcPr marL="27432" marR="27432" marT="27432" marB="27432" anchor="ctr">
+                    <a:lnL w="6350" cap="flat" cmpd="sng" algn="ctr">
+                      <a:solidFill>
+                        <a:srgbClr val="D9CFCF"/>
+                      </a:solidFill>
+                      <a:prstDash val="solid"/>
+                      <a:round/>
+                      <a:headEnd type="none" w="med" len="med"/>
+                      <a:tailEnd type="none" w="med" len="med"/>
+                    </a:lnL>
+                    <a:lnR w="6350" cap="flat" cmpd="sng" algn="ctr">
+                      <a:solidFill>
+                        <a:srgbClr val="D9CFCF"/>
+                      </a:solidFill>
+                      <a:prstDash val="solid"/>
+                      <a:round/>
+                      <a:headEnd type="none" w="med" len="med"/>
+                      <a:tailEnd type="none" w="med" len="med"/>
+                    </a:lnR>
+                    <a:lnT w="6350" cap="flat" cmpd="sng" algn="ctr">
+                      <a:solidFill>
+                        <a:srgbClr val="D9CFCF"/>
+                      </a:solidFill>
+                      <a:prstDash val="solid"/>
+                      <a:round/>
+                      <a:headEnd type="none" w="med" len="med"/>
+                      <a:tailEnd type="none" w="med" len="med"/>
+                    </a:lnT>
+                    <a:lnB w="6350" cap="flat" cmpd="sng" algn="ctr">
+                      <a:solidFill>
+                        <a:srgbClr val="D9CFCF"/>
+                      </a:solidFill>
+                      <a:prstDash val="solid"/>
+                      <a:round/>
+                      <a:headEnd type="none" w="med" len="med"/>
+                      <a:tailEnd type="none" w="med" len="med"/>
+                    </a:lnB>
+                    <a:solidFill>
+                      <a:srgbClr val="8B2A2A"/>
+                    </a:solidFill>
+                  </a:tcPr>
+                </a:tc>
+                <a:tc>
+                  <a:txBody>
+                    <a:bodyPr/>
+                    <a:lstStyle/>
+                    <a:p>
+                      <a:pPr indent="0" marL="0">
+                        <a:buNone/>
+                      </a:pPr>
+                      <a:r>
+                        <a:rPr lang="en-US" sz="720" b="1" dirty="0">
+                          <a:solidFill>
+                            <a:srgbClr val="FFFFFF"/>
+                          </a:solidFill>
+                          <a:latin typeface="Arial" pitchFamily="34" charset="0"/>
+                          <a:ea typeface="Arial" pitchFamily="34" charset="-122"/>
+                          <a:cs typeface="Arial" pitchFamily="34" charset="-120"/>
+                        </a:rPr>
+                        <a:t>Why this price</a:t>
+                      </a:r>
+                      <a:endParaRPr lang="en-US" sz="720" dirty="0">
+                        <a:latin typeface="Arial" charset="0"/>
+                        <a:ea typeface="Arial" charset="0"/>
+                        <a:cs typeface="Arial" charset="0"/>
+                      </a:endParaRPr>
+                    </a:p>
+                  </a:txBody>
+                  <a:tcPr marL="27432" marR="27432" marT="27432" marB="27432" anchor="ctr">
+                    <a:lnL w="6350" cap="flat" cmpd="sng" algn="ctr">
+                      <a:solidFill>
+                        <a:srgbClr val="D9CFCF"/>
+                      </a:solidFill>
+                      <a:prstDash val="solid"/>
+                      <a:round/>
+                      <a:headEnd type="none" w="med" len="med"/>
+                      <a:tailEnd type="none" w="med" len="med"/>
+                    </a:lnL>
+                    <a:lnR w="6350" cap="flat" cmpd="sng" algn="ctr">
+                      <a:solidFill>
+                        <a:srgbClr val="D9CFCF"/>
+                      </a:solidFill>
+                      <a:prstDash val="solid"/>
+                      <a:round/>
+                      <a:headEnd type="none" w="med" len="med"/>
+                      <a:tailEnd type="none" w="med" len="med"/>
+                    </a:lnR>
+                    <a:lnT w="6350" cap="flat" cmpd="sng" algn="ctr">
+                      <a:solidFill>
+                        <a:srgbClr val="D9CFCF"/>
+                      </a:solidFill>
+                      <a:prstDash val="solid"/>
+                      <a:round/>
+                      <a:headEnd type="none" w="med" len="med"/>
+                      <a:tailEnd type="none" w="med" len="med"/>
+                    </a:lnT>
+                    <a:lnB w="6350" cap="flat" cmpd="sng" algn="ctr">
+                      <a:solidFill>
+                        <a:srgbClr val="D9CFCF"/>
+                      </a:solidFill>
+                      <a:prstDash val="solid"/>
+                      <a:round/>
+                      <a:headEnd type="none" w="med" len="med"/>
+                      <a:tailEnd type="none" w="med" len="med"/>
+                    </a:lnB>
+                    <a:solidFill>
+                      <a:srgbClr val="8B2A2A"/>
+                    </a:solidFill>
+                  </a:tcPr>
+                </a:tc>
+              </a:tr>
+              <a:tr h="347472">
+                <a:tc>
+                  <a:txBody>
+                    <a:bodyPr/>
+                    <a:lstStyle/>
+                    <a:p>
+                      <a:pPr indent="0" marL="0">
+                        <a:buNone/>
+                      </a:pPr>
+                      <a:r>
+                        <a:rPr lang="en-US" sz="690" b="1" dirty="0">
+                          <a:solidFill>
+                            <a:srgbClr val="8B2A2A"/>
+                          </a:solidFill>
+                          <a:latin typeface="Arial" pitchFamily="34" charset="0"/>
+                          <a:ea typeface="Arial" pitchFamily="34" charset="-122"/>
+                          <a:cs typeface="Arial" pitchFamily="34" charset="-120"/>
+                        </a:rPr>
+                        <a:t>B2C · patients &amp; caregivers</a:t>
+                      </a:r>
+                      <a:endParaRPr lang="en-US" sz="690" dirty="0">
+                        <a:latin typeface="Arial" charset="0"/>
+                        <a:ea typeface="Arial" charset="0"/>
+                        <a:cs typeface="Arial" charset="0"/>
+                      </a:endParaRPr>
+                    </a:p>
+                  </a:txBody>
+                  <a:tcPr marL="27432" marR="27432" marT="27432" marB="27432" anchor="ctr">
+                    <a:lnL w="6350" cap="flat" cmpd="sng" algn="ctr">
+                      <a:solidFill>
+                        <a:srgbClr val="D9CFCF"/>
+                      </a:solidFill>
+                      <a:prstDash val="solid"/>
+                      <a:round/>
+                      <a:headEnd type="none" w="med" len="med"/>
+                      <a:tailEnd type="none" w="med" len="med"/>
+                    </a:lnL>
+                    <a:lnR w="6350" cap="flat" cmpd="sng" algn="ctr">
+                      <a:solidFill>
+                        <a:srgbClr val="D9CFCF"/>
+                      </a:solidFill>
+                      <a:prstDash val="solid"/>
+                      <a:round/>
+                      <a:headEnd type="none" w="med" len="med"/>
+                      <a:tailEnd type="none" w="med" len="med"/>
+                    </a:lnR>
+                    <a:lnT w="6350" cap="flat" cmpd="sng" algn="ctr">
+                      <a:solidFill>
+                        <a:srgbClr val="D9CFCF"/>
+                      </a:solidFill>
+                      <a:prstDash val="solid"/>
+                      <a:round/>
+                      <a:headEnd type="none" w="med" len="med"/>
+                      <a:tailEnd type="none" w="med" len="med"/>
+                    </a:lnT>
+                    <a:lnB w="6350" cap="flat" cmpd="sng" algn="ctr">
+                      <a:solidFill>
+                        <a:srgbClr val="D9CFCF"/>
+                      </a:solidFill>
+                      <a:prstDash val="solid"/>
+                      <a:round/>
+                      <a:headEnd type="none" w="med" len="med"/>
+                      <a:tailEnd type="none" w="med" len="med"/>
+                    </a:lnB>
+                  </a:tcPr>
+                </a:tc>
+                <a:tc>
+                  <a:txBody>
+                    <a:bodyPr/>
+                    <a:lstStyle/>
+                    <a:p>
+                      <a:pPr indent="0" marL="0">
+                        <a:buNone/>
+                      </a:pPr>
+                      <a:r>
+                        <a:rPr lang="en-US" sz="690" dirty="0">
+                          <a:solidFill>
+                            <a:srgbClr val="333333"/>
+                          </a:solidFill>
+                          <a:latin typeface="Arial" pitchFamily="34" charset="0"/>
+                          <a:ea typeface="Arial" pitchFamily="34" charset="-122"/>
+                          <a:cs typeface="Arial" pitchFamily="34" charset="-120"/>
+                        </a:rPr>
+                        <a:t>Web / PWA checker, Hindi + English</a:t>
+                      </a:r>
+                      <a:endParaRPr lang="en-US" sz="690" dirty="0">
+                        <a:latin typeface="Arial" charset="0"/>
+                        <a:ea typeface="Arial" charset="0"/>
+                        <a:cs typeface="Arial" charset="0"/>
+                      </a:endParaRPr>
+                    </a:p>
+                  </a:txBody>
+                  <a:tcPr marL="27432" marR="27432" marT="27432" marB="27432" anchor="ctr">
+                    <a:lnL w="6350" cap="flat" cmpd="sng" algn="ctr">
+                      <a:solidFill>
+                        <a:srgbClr val="D9CFCF"/>
+                      </a:solidFill>
+                      <a:prstDash val="solid"/>
+                      <a:round/>
+                      <a:headEnd type="none" w="med" len="med"/>
+                      <a:tailEnd type="none" w="med" len="med"/>
+                    </a:lnL>
+                    <a:lnR w="6350" cap="flat" cmpd="sng" algn="ctr">
+                      <a:solidFill>
+                        <a:srgbClr val="D9CFCF"/>
+                      </a:solidFill>
+                      <a:prstDash val="solid"/>
+                      <a:round/>
+                      <a:headEnd type="none" w="med" len="med"/>
+                      <a:tailEnd type="none" w="med" len="med"/>
+                    </a:lnR>
+                    <a:lnT w="6350" cap="flat" cmpd="sng" algn="ctr">
+                      <a:solidFill>
+                        <a:srgbClr val="D9CFCF"/>
+                      </a:solidFill>
+                      <a:prstDash val="solid"/>
+                      <a:round/>
+                      <a:headEnd type="none" w="med" len="med"/>
+                      <a:tailEnd type="none" w="med" len="med"/>
+                    </a:lnT>
+                    <a:lnB w="6350" cap="flat" cmpd="sng" algn="ctr">
+                      <a:solidFill>
+                        <a:srgbClr val="D9CFCF"/>
+                      </a:solidFill>
+                      <a:prstDash val="solid"/>
+                      <a:round/>
+                      <a:headEnd type="none" w="med" len="med"/>
+                      <a:tailEnd type="none" w="med" len="med"/>
+                    </a:lnB>
+                  </a:tcPr>
+                </a:tc>
+                <a:tc>
+                  <a:txBody>
+                    <a:bodyPr/>
+                    <a:lstStyle/>
+                    <a:p>
+                      <a:pPr indent="0" marL="0">
+                        <a:buNone/>
+                      </a:pPr>
+                      <a:r>
+                        <a:rPr lang="en-US" sz="690" b="1" dirty="0">
+                          <a:solidFill>
+                            <a:srgbClr val="333333"/>
+                          </a:solidFill>
+                          <a:latin typeface="Arial" pitchFamily="34" charset="0"/>
+                          <a:ea typeface="Arial" pitchFamily="34" charset="-122"/>
+                          <a:cs typeface="Arial" pitchFamily="34" charset="-120"/>
+                        </a:rPr>
+                        <a:t>Free</a:t>
+                      </a:r>
+                      <a:endParaRPr lang="en-US" sz="690" dirty="0">
+                        <a:latin typeface="Arial" charset="0"/>
+                        <a:ea typeface="Arial" charset="0"/>
+                        <a:cs typeface="Arial" charset="0"/>
+                      </a:endParaRPr>
+                    </a:p>
+                  </a:txBody>
+                  <a:tcPr marL="27432" marR="27432" marT="27432" marB="27432" anchor="ctr">
+                    <a:lnL w="6350" cap="flat" cmpd="sng" algn="ctr">
+                      <a:solidFill>
+                        <a:srgbClr val="D9CFCF"/>
+                      </a:solidFill>
+                      <a:prstDash val="solid"/>
+                      <a:round/>
+                      <a:headEnd type="none" w="med" len="med"/>
+                      <a:tailEnd type="none" w="med" len="med"/>
+                    </a:lnL>
+                    <a:lnR w="6350" cap="flat" cmpd="sng" algn="ctr">
+                      <a:solidFill>
+                        <a:srgbClr val="D9CFCF"/>
+                      </a:solidFill>
+                      <a:prstDash val="solid"/>
+                      <a:round/>
+                      <a:headEnd type="none" w="med" len="med"/>
+                      <a:tailEnd type="none" w="med" len="med"/>
+                    </a:lnR>
+                    <a:lnT w="6350" cap="flat" cmpd="sng" algn="ctr">
+                      <a:solidFill>
+                        <a:srgbClr val="D9CFCF"/>
+                      </a:solidFill>
+                      <a:prstDash val="solid"/>
+                      <a:round/>
+                      <a:headEnd type="none" w="med" len="med"/>
+                      <a:tailEnd type="none" w="med" len="med"/>
+                    </a:lnT>
+                    <a:lnB w="6350" cap="flat" cmpd="sng" algn="ctr">
+                      <a:solidFill>
+                        <a:srgbClr val="D9CFCF"/>
+                      </a:solidFill>
+                      <a:prstDash val="solid"/>
+                      <a:round/>
+                      <a:headEnd type="none" w="med" len="med"/>
+                      <a:tailEnd type="none" w="med" len="med"/>
+                    </a:lnB>
+                  </a:tcPr>
+                </a:tc>
+                <a:tc>
+                  <a:txBody>
+                    <a:bodyPr/>
+                    <a:lstStyle/>
+                    <a:p>
+                      <a:pPr indent="0" marL="0">
+                        <a:buNone/>
+                      </a:pPr>
+                      <a:r>
+                        <a:rPr lang="en-US" sz="690" dirty="0">
+                          <a:solidFill>
+                            <a:srgbClr val="333333"/>
+                          </a:solidFill>
+                          <a:latin typeface="Arial" pitchFamily="34" charset="0"/>
+                          <a:ea typeface="Arial" pitchFamily="34" charset="-122"/>
+                          <a:cs typeface="Arial" pitchFamily="34" charset="-120"/>
+                        </a:rPr>
+                        <a:t>Adoption and the ADR signal are the asset; a paywall would re-create the gap we are closing</a:t>
+                      </a:r>
+                      <a:endParaRPr lang="en-US" sz="690" dirty="0">
+                        <a:latin typeface="Arial" charset="0"/>
+                        <a:ea typeface="Arial" charset="0"/>
+                        <a:cs typeface="Arial" charset="0"/>
+                      </a:endParaRPr>
+                    </a:p>
+                  </a:txBody>
+                  <a:tcPr marL="27432" marR="27432" marT="27432" marB="27432" anchor="ctr">
+                    <a:lnL w="6350" cap="flat" cmpd="sng" algn="ctr">
+                      <a:solidFill>
+                        <a:srgbClr val="D9CFCF"/>
+                      </a:solidFill>
+                      <a:prstDash val="solid"/>
+                      <a:round/>
+                      <a:headEnd type="none" w="med" len="med"/>
+                      <a:tailEnd type="none" w="med" len="med"/>
+                    </a:lnL>
+                    <a:lnR w="6350" cap="flat" cmpd="sng" algn="ctr">
+                      <a:solidFill>
+                        <a:srgbClr val="D9CFCF"/>
+                      </a:solidFill>
+                      <a:prstDash val="solid"/>
+                      <a:round/>
+                      <a:headEnd type="none" w="med" len="med"/>
+                      <a:tailEnd type="none" w="med" len="med"/>
+                    </a:lnR>
+                    <a:lnT w="6350" cap="flat" cmpd="sng" algn="ctr">
+                      <a:solidFill>
+                        <a:srgbClr val="D9CFCF"/>
+                      </a:solidFill>
+                      <a:prstDash val="solid"/>
+                      <a:round/>
+                      <a:headEnd type="none" w="med" len="med"/>
+                      <a:tailEnd type="none" w="med" len="med"/>
+                    </a:lnT>
+                    <a:lnB w="6350" cap="flat" cmpd="sng" algn="ctr">
+                      <a:solidFill>
+                        <a:srgbClr val="D9CFCF"/>
+                      </a:solidFill>
+                      <a:prstDash val="solid"/>
+                      <a:round/>
+                      <a:headEnd type="none" w="med" len="med"/>
+                      <a:tailEnd type="none" w="med" len="med"/>
+                    </a:lnB>
+                  </a:tcPr>
+                </a:tc>
+              </a:tr>
+              <a:tr h="347472">
+                <a:tc>
+                  <a:txBody>
+                    <a:bodyPr/>
+                    <a:lstStyle/>
+                    <a:p>
+                      <a:pPr indent="0" marL="0">
+                        <a:buNone/>
+                      </a:pPr>
+                      <a:r>
+                        <a:rPr lang="en-US" sz="690" b="1" dirty="0">
+                          <a:solidFill>
+                            <a:srgbClr val="8B2A2A"/>
+                          </a:solidFill>
+                          <a:latin typeface="Arial" pitchFamily="34" charset="0"/>
+                          <a:ea typeface="Arial" pitchFamily="34" charset="-122"/>
+                          <a:cs typeface="Arial" pitchFamily="34" charset="-120"/>
+                        </a:rPr>
+                        <a:t>B2B · chemists (per outlet)</a:t>
+                      </a:r>
+                      <a:endParaRPr lang="en-US" sz="690" dirty="0">
+                        <a:latin typeface="Arial" charset="0"/>
+                        <a:ea typeface="Arial" charset="0"/>
+                        <a:cs typeface="Arial" charset="0"/>
+                      </a:endParaRPr>
+                    </a:p>
+                  </a:txBody>
+                  <a:tcPr marL="27432" marR="27432" marT="27432" marB="27432" anchor="ctr">
+                    <a:lnL w="6350" cap="flat" cmpd="sng" algn="ctr">
+                      <a:solidFill>
+                        <a:srgbClr val="D9CFCF"/>
+                      </a:solidFill>
+                      <a:prstDash val="solid"/>
+                      <a:round/>
+                      <a:headEnd type="none" w="med" len="med"/>
+                      <a:tailEnd type="none" w="med" len="med"/>
+                    </a:lnL>
+                    <a:lnR w="6350" cap="flat" cmpd="sng" algn="ctr">
+                      <a:solidFill>
+                        <a:srgbClr val="D9CFCF"/>
+                      </a:solidFill>
+                      <a:prstDash val="solid"/>
+                      <a:round/>
+                      <a:headEnd type="none" w="med" len="med"/>
+                      <a:tailEnd type="none" w="med" len="med"/>
+                    </a:lnR>
+                    <a:lnT w="6350" cap="flat" cmpd="sng" algn="ctr">
+                      <a:solidFill>
+                        <a:srgbClr val="D9CFCF"/>
+                      </a:solidFill>
+                      <a:prstDash val="solid"/>
+                      <a:round/>
+                      <a:headEnd type="none" w="med" len="med"/>
+                      <a:tailEnd type="none" w="med" len="med"/>
+                    </a:lnT>
+                    <a:lnB w="6350" cap="flat" cmpd="sng" algn="ctr">
+                      <a:solidFill>
+                        <a:srgbClr val="D9CFCF"/>
+                      </a:solidFill>
+                      <a:prstDash val="solid"/>
+                      <a:round/>
+                      <a:headEnd type="none" w="med" len="med"/>
+                      <a:tailEnd type="none" w="med" len="med"/>
+                    </a:lnB>
+                  </a:tcPr>
+                </a:tc>
+                <a:tc>
+                  <a:txBody>
+                    <a:bodyPr/>
+                    <a:lstStyle/>
+                    <a:p>
+                      <a:pPr indent="0" marL="0">
+                        <a:buNone/>
+                      </a:pPr>
+                      <a:r>
+                        <a:rPr lang="en-US" sz="690" dirty="0">
+                          <a:solidFill>
+                            <a:srgbClr val="333333"/>
+                          </a:solidFill>
+                          <a:latin typeface="Arial" pitchFamily="34" charset="0"/>
+                          <a:ea typeface="Arial" pitchFamily="34" charset="-122"/>
+                          <a:cs typeface="Arial" pitchFamily="34" charset="-120"/>
+                        </a:rPr>
+                        <a:t>Counter cross-check + QR on the bill</a:t>
+                      </a:r>
+                      <a:endParaRPr lang="en-US" sz="690" dirty="0">
+                        <a:latin typeface="Arial" charset="0"/>
+                        <a:ea typeface="Arial" charset="0"/>
+                        <a:cs typeface="Arial" charset="0"/>
+                      </a:endParaRPr>
+                    </a:p>
+                  </a:txBody>
+                  <a:tcPr marL="27432" marR="27432" marT="27432" marB="27432" anchor="ctr">
+                    <a:lnL w="6350" cap="flat" cmpd="sng" algn="ctr">
+                      <a:solidFill>
+                        <a:srgbClr val="D9CFCF"/>
+                      </a:solidFill>
+                      <a:prstDash val="solid"/>
+                      <a:round/>
+                      <a:headEnd type="none" w="med" len="med"/>
+                      <a:tailEnd type="none" w="med" len="med"/>
+                    </a:lnL>
+                    <a:lnR w="6350" cap="flat" cmpd="sng" algn="ctr">
+                      <a:solidFill>
+                        <a:srgbClr val="D9CFCF"/>
+                      </a:solidFill>
+                      <a:prstDash val="solid"/>
+                      <a:round/>
+                      <a:headEnd type="none" w="med" len="med"/>
+                      <a:tailEnd type="none" w="med" len="med"/>
+                    </a:lnR>
+                    <a:lnT w="6350" cap="flat" cmpd="sng" algn="ctr">
+                      <a:solidFill>
+                        <a:srgbClr val="D9CFCF"/>
+                      </a:solidFill>
+                      <a:prstDash val="solid"/>
+                      <a:round/>
+                      <a:headEnd type="none" w="med" len="med"/>
+                      <a:tailEnd type="none" w="med" len="med"/>
+                    </a:lnT>
+                    <a:lnB w="6350" cap="flat" cmpd="sng" algn="ctr">
+                      <a:solidFill>
+                        <a:srgbClr val="D9CFCF"/>
+                      </a:solidFill>
+                      <a:prstDash val="solid"/>
+                      <a:round/>
+                      <a:headEnd type="none" w="med" len="med"/>
+                      <a:tailEnd type="none" w="med" len="med"/>
+                    </a:lnB>
+                  </a:tcPr>
+                </a:tc>
+                <a:tc>
+                  <a:txBody>
+                    <a:bodyPr/>
+                    <a:lstStyle/>
+                    <a:p>
+                      <a:pPr indent="0" marL="0">
+                        <a:buNone/>
+                      </a:pPr>
+                      <a:r>
+                        <a:rPr lang="en-US" sz="690" b="1" dirty="0">
+                          <a:solidFill>
+                            <a:srgbClr val="333333"/>
+                          </a:solidFill>
+                          <a:latin typeface="Arial" pitchFamily="34" charset="0"/>
+                          <a:ea typeface="Arial" pitchFamily="34" charset="-122"/>
+                          <a:cs typeface="Arial" pitchFamily="34" charset="-120"/>
+                        </a:rPr>
+                        <a:t>₹499 / month</a:t>
+                      </a:r>
+                      <a:endParaRPr lang="en-US" sz="690" dirty="0">
+                        <a:latin typeface="Arial" charset="0"/>
+                        <a:ea typeface="Arial" charset="0"/>
+                        <a:cs typeface="Arial" charset="0"/>
+                      </a:endParaRPr>
+                    </a:p>
+                  </a:txBody>
+                  <a:tcPr marL="27432" marR="27432" marT="27432" marB="27432" anchor="ctr">
+                    <a:lnL w="6350" cap="flat" cmpd="sng" algn="ctr">
+                      <a:solidFill>
+                        <a:srgbClr val="D9CFCF"/>
+                      </a:solidFill>
+                      <a:prstDash val="solid"/>
+                      <a:round/>
+                      <a:headEnd type="none" w="med" len="med"/>
+                      <a:tailEnd type="none" w="med" len="med"/>
+                    </a:lnL>
+                    <a:lnR w="6350" cap="flat" cmpd="sng" algn="ctr">
+                      <a:solidFill>
+                        <a:srgbClr val="D9CFCF"/>
+                      </a:solidFill>
+                      <a:prstDash val="solid"/>
+                      <a:round/>
+                      <a:headEnd type="none" w="med" len="med"/>
+                      <a:tailEnd type="none" w="med" len="med"/>
+                    </a:lnR>
+                    <a:lnT w="6350" cap="flat" cmpd="sng" algn="ctr">
+                      <a:solidFill>
+                        <a:srgbClr val="D9CFCF"/>
+                      </a:solidFill>
+                      <a:prstDash val="solid"/>
+                      <a:round/>
+                      <a:headEnd type="none" w="med" len="med"/>
+                      <a:tailEnd type="none" w="med" len="med"/>
+                    </a:lnT>
+                    <a:lnB w="6350" cap="flat" cmpd="sng" algn="ctr">
+                      <a:solidFill>
+                        <a:srgbClr val="D9CFCF"/>
+                      </a:solidFill>
+                      <a:prstDash val="solid"/>
+                      <a:round/>
+                      <a:headEnd type="none" w="med" len="med"/>
+                      <a:tailEnd type="none" w="med" len="med"/>
+                    </a:lnB>
+                  </a:tcPr>
+                </a:tc>
+                <a:tc>
+                  <a:txBody>
+                    <a:bodyPr/>
+                    <a:lstStyle/>
+                    <a:p>
+                      <a:pPr indent="0" marL="0">
+                        <a:buNone/>
+                      </a:pPr>
+                      <a:r>
+                        <a:rPr lang="en-US" sz="690" dirty="0">
+                          <a:solidFill>
+                            <a:srgbClr val="333333"/>
+                          </a:solidFill>
+                          <a:latin typeface="Arial" pitchFamily="34" charset="0"/>
+                          <a:ea typeface="Arial" pitchFamily="34" charset="-122"/>
+                          <a:cs typeface="Arial" pitchFamily="34" charset="-120"/>
+                        </a:rPr>
+                        <a:t>Below one day's margin on a mid-size counter; comparable to billing-software add-ons (₹300–800/month)</a:t>
+                      </a:r>
+                      <a:endParaRPr lang="en-US" sz="690" dirty="0">
+                        <a:latin typeface="Arial" charset="0"/>
+                        <a:ea typeface="Arial" charset="0"/>
+                        <a:cs typeface="Arial" charset="0"/>
+                      </a:endParaRPr>
+                    </a:p>
+                  </a:txBody>
+                  <a:tcPr marL="27432" marR="27432" marT="27432" marB="27432" anchor="ctr">
+                    <a:lnL w="6350" cap="flat" cmpd="sng" algn="ctr">
+                      <a:solidFill>
+                        <a:srgbClr val="D9CFCF"/>
+                      </a:solidFill>
+                      <a:prstDash val="solid"/>
+                      <a:round/>
+                      <a:headEnd type="none" w="med" len="med"/>
+                      <a:tailEnd type="none" w="med" len="med"/>
+                    </a:lnL>
+                    <a:lnR w="6350" cap="flat" cmpd="sng" algn="ctr">
+                      <a:solidFill>
+                        <a:srgbClr val="D9CFCF"/>
+                      </a:solidFill>
+                      <a:prstDash val="solid"/>
+                      <a:round/>
+                      <a:headEnd type="none" w="med" len="med"/>
+                      <a:tailEnd type="none" w="med" len="med"/>
+                    </a:lnR>
+                    <a:lnT w="6350" cap="flat" cmpd="sng" algn="ctr">
+                      <a:solidFill>
+                        <a:srgbClr val="D9CFCF"/>
+                      </a:solidFill>
+                      <a:prstDash val="solid"/>
+                      <a:round/>
+                      <a:headEnd type="none" w="med" len="med"/>
+                      <a:tailEnd type="none" w="med" len="med"/>
+                    </a:lnT>
+                    <a:lnB w="6350" cap="flat" cmpd="sng" algn="ctr">
+                      <a:solidFill>
+                        <a:srgbClr val="D9CFCF"/>
+                      </a:solidFill>
+                      <a:prstDash val="solid"/>
+                      <a:round/>
+                      <a:headEnd type="none" w="med" len="med"/>
+                      <a:tailEnd type="none" w="med" len="med"/>
+                    </a:lnB>
+                  </a:tcPr>
+                </a:tc>
+              </a:tr>
+              <a:tr h="347472">
+                <a:tc>
+                  <a:txBody>
+                    <a:bodyPr/>
+                    <a:lstStyle/>
+                    <a:p>
+                      <a:pPr indent="0" marL="0">
+                        <a:buNone/>
+                      </a:pPr>
+                      <a:r>
+                        <a:rPr lang="en-US" sz="690" b="1" dirty="0">
+                          <a:solidFill>
+                            <a:srgbClr val="8B2A2A"/>
+                          </a:solidFill>
+                          <a:latin typeface="Arial" pitchFamily="34" charset="0"/>
+                          <a:ea typeface="Arial" pitchFamily="34" charset="-122"/>
+                          <a:cs typeface="Arial" pitchFamily="34" charset="-120"/>
+                        </a:rPr>
+                        <a:t>B2B · telemedicine / HIS (API)</a:t>
+                      </a:r>
+                      <a:endParaRPr lang="en-US" sz="690" dirty="0">
+                        <a:latin typeface="Arial" charset="0"/>
+                        <a:ea typeface="Arial" charset="0"/>
+                        <a:cs typeface="Arial" charset="0"/>
+                      </a:endParaRPr>
+                    </a:p>
+                  </a:txBody>
+                  <a:tcPr marL="27432" marR="27432" marT="27432" marB="27432" anchor="ctr">
+                    <a:lnL w="6350" cap="flat" cmpd="sng" algn="ctr">
+                      <a:solidFill>
+                        <a:srgbClr val="D9CFCF"/>
+                      </a:solidFill>
+                      <a:prstDash val="solid"/>
+                      <a:round/>
+                      <a:headEnd type="none" w="med" len="med"/>
+                      <a:tailEnd type="none" w="med" len="med"/>
+                    </a:lnL>
+                    <a:lnR w="6350" cap="flat" cmpd="sng" algn="ctr">
+                      <a:solidFill>
+                        <a:srgbClr val="D9CFCF"/>
+                      </a:solidFill>
+                      <a:prstDash val="solid"/>
+                      <a:round/>
+                      <a:headEnd type="none" w="med" len="med"/>
+                      <a:tailEnd type="none" w="med" len="med"/>
+                    </a:lnR>
+                    <a:lnT w="6350" cap="flat" cmpd="sng" algn="ctr">
+                      <a:solidFill>
+                        <a:srgbClr val="D9CFCF"/>
+                      </a:solidFill>
+                      <a:prstDash val="solid"/>
+                      <a:round/>
+                      <a:headEnd type="none" w="med" len="med"/>
+                      <a:tailEnd type="none" w="med" len="med"/>
+                    </a:lnT>
+                    <a:lnB w="6350" cap="flat" cmpd="sng" algn="ctr">
+                      <a:solidFill>
+                        <a:srgbClr val="D9CFCF"/>
+                      </a:solidFill>
+                      <a:prstDash val="solid"/>
+                      <a:round/>
+                      <a:headEnd type="none" w="med" len="med"/>
+                      <a:tailEnd type="none" w="med" len="med"/>
+                    </a:lnB>
+                  </a:tcPr>
+                </a:tc>
+                <a:tc>
+                  <a:txBody>
+                    <a:bodyPr/>
+                    <a:lstStyle/>
+                    <a:p>
+                      <a:pPr indent="0" marL="0">
+                        <a:buNone/>
+                      </a:pPr>
+                      <a:r>
+                        <a:rPr lang="en-US" sz="690" dirty="0">
+                          <a:solidFill>
+                            <a:srgbClr val="333333"/>
+                          </a:solidFill>
+                          <a:latin typeface="Arial" pitchFamily="34" charset="0"/>
+                          <a:ea typeface="Arial" pitchFamily="34" charset="-122"/>
+                          <a:cs typeface="Arial" pitchFamily="34" charset="-120"/>
+                        </a:rPr>
+                        <a:t>Per-query verdict API</a:t>
+                      </a:r>
+                      <a:endParaRPr lang="en-US" sz="690" dirty="0">
+                        <a:latin typeface="Arial" charset="0"/>
+                        <a:ea typeface="Arial" charset="0"/>
+                        <a:cs typeface="Arial" charset="0"/>
+                      </a:endParaRPr>
+                    </a:p>
+                  </a:txBody>
+                  <a:tcPr marL="27432" marR="27432" marT="27432" marB="27432" anchor="ctr">
+                    <a:lnL w="6350" cap="flat" cmpd="sng" algn="ctr">
+                      <a:solidFill>
+                        <a:srgbClr val="D9CFCF"/>
+                      </a:solidFill>
+                      <a:prstDash val="solid"/>
+                      <a:round/>
+                      <a:headEnd type="none" w="med" len="med"/>
+                      <a:tailEnd type="none" w="med" len="med"/>
+                    </a:lnL>
+                    <a:lnR w="6350" cap="flat" cmpd="sng" algn="ctr">
+                      <a:solidFill>
+                        <a:srgbClr val="D9CFCF"/>
+                      </a:solidFill>
+                      <a:prstDash val="solid"/>
+                      <a:round/>
+                      <a:headEnd type="none" w="med" len="med"/>
+                      <a:tailEnd type="none" w="med" len="med"/>
+                    </a:lnR>
+                    <a:lnT w="6350" cap="flat" cmpd="sng" algn="ctr">
+                      <a:solidFill>
+                        <a:srgbClr val="D9CFCF"/>
+                      </a:solidFill>
+                      <a:prstDash val="solid"/>
+                      <a:round/>
+                      <a:headEnd type="none" w="med" len="med"/>
+                      <a:tailEnd type="none" w="med" len="med"/>
+                    </a:lnT>
+                    <a:lnB w="6350" cap="flat" cmpd="sng" algn="ctr">
+                      <a:solidFill>
+                        <a:srgbClr val="D9CFCF"/>
+                      </a:solidFill>
+                      <a:prstDash val="solid"/>
+                      <a:round/>
+                      <a:headEnd type="none" w="med" len="med"/>
+                      <a:tailEnd type="none" w="med" len="med"/>
+                    </a:lnB>
+                  </a:tcPr>
+                </a:tc>
+                <a:tc>
+                  <a:txBody>
+                    <a:bodyPr/>
+                    <a:lstStyle/>
+                    <a:p>
+                      <a:pPr indent="0" marL="0">
+                        <a:buNone/>
+                      </a:pPr>
+                      <a:r>
+                        <a:rPr lang="en-US" sz="690" b="1" dirty="0">
+                          <a:solidFill>
+                            <a:srgbClr val="333333"/>
+                          </a:solidFill>
+                          <a:latin typeface="Arial" pitchFamily="34" charset="0"/>
+                          <a:ea typeface="Arial" pitchFamily="34" charset="-122"/>
+                          <a:cs typeface="Arial" pitchFamily="34" charset="-120"/>
+                        </a:rPr>
+                        <a:t>₹2 per check, ₹25,000 / year floor</a:t>
+                      </a:r>
+                      <a:endParaRPr lang="en-US" sz="690" dirty="0">
+                        <a:latin typeface="Arial" charset="0"/>
+                        <a:ea typeface="Arial" charset="0"/>
+                        <a:cs typeface="Arial" charset="0"/>
+                      </a:endParaRPr>
+                    </a:p>
+                  </a:txBody>
+                  <a:tcPr marL="27432" marR="27432" marT="27432" marB="27432" anchor="ctr">
+                    <a:lnL w="6350" cap="flat" cmpd="sng" algn="ctr">
+                      <a:solidFill>
+                        <a:srgbClr val="D9CFCF"/>
+                      </a:solidFill>
+                      <a:prstDash val="solid"/>
+                      <a:round/>
+                      <a:headEnd type="none" w="med" len="med"/>
+                      <a:tailEnd type="none" w="med" len="med"/>
+                    </a:lnL>
+                    <a:lnR w="6350" cap="flat" cmpd="sng" algn="ctr">
+                      <a:solidFill>
+                        <a:srgbClr val="D9CFCF"/>
+                      </a:solidFill>
+                      <a:prstDash val="solid"/>
+                      <a:round/>
+                      <a:headEnd type="none" w="med" len="med"/>
+                      <a:tailEnd type="none" w="med" len="med"/>
+                    </a:lnR>
+                    <a:lnT w="6350" cap="flat" cmpd="sng" algn="ctr">
+                      <a:solidFill>
+                        <a:srgbClr val="D9CFCF"/>
+                      </a:solidFill>
+                      <a:prstDash val="solid"/>
+                      <a:round/>
+                      <a:headEnd type="none" w="med" len="med"/>
+                      <a:tailEnd type="none" w="med" len="med"/>
+                    </a:lnT>
+                    <a:lnB w="6350" cap="flat" cmpd="sng" algn="ctr">
+                      <a:solidFill>
+                        <a:srgbClr val="D9CFCF"/>
+                      </a:solidFill>
+                      <a:prstDash val="solid"/>
+                      <a:round/>
+                      <a:headEnd type="none" w="med" len="med"/>
+                      <a:tailEnd type="none" w="med" len="med"/>
+                    </a:lnB>
+                  </a:tcPr>
+                </a:tc>
+                <a:tc>
+                  <a:txBody>
+                    <a:bodyPr/>
+                    <a:lstStyle/>
+                    <a:p>
+                      <a:pPr indent="0" marL="0">
+                        <a:buNone/>
+                      </a:pPr>
+                      <a:r>
+                        <a:rPr lang="en-US" sz="690" dirty="0">
+                          <a:solidFill>
+                            <a:srgbClr val="333333"/>
+                          </a:solidFill>
+                          <a:latin typeface="Arial" pitchFamily="34" charset="0"/>
+                          <a:ea typeface="Arial" pitchFamily="34" charset="-122"/>
+                          <a:cs typeface="Arial" pitchFamily="34" charset="-120"/>
+                        </a:rPr>
+                        <a:t>Pure marginal cost is near zero (rules + SQL); ₹2 sits under the ₹5–15 lab/health-ID API norms</a:t>
+                      </a:r>
+                      <a:endParaRPr lang="en-US" sz="690" dirty="0">
+                        <a:latin typeface="Arial" charset="0"/>
+                        <a:ea typeface="Arial" charset="0"/>
+                        <a:cs typeface="Arial" charset="0"/>
+                      </a:endParaRPr>
+                    </a:p>
+                  </a:txBody>
+                  <a:tcPr marL="27432" marR="27432" marT="27432" marB="27432" anchor="ctr">
+                    <a:lnL w="6350" cap="flat" cmpd="sng" algn="ctr">
+                      <a:solidFill>
+                        <a:srgbClr val="D9CFCF"/>
+                      </a:solidFill>
+                      <a:prstDash val="solid"/>
+                      <a:round/>
+                      <a:headEnd type="none" w="med" len="med"/>
+                      <a:tailEnd type="none" w="med" len="med"/>
+                    </a:lnL>
+                    <a:lnR w="6350" cap="flat" cmpd="sng" algn="ctr">
+                      <a:solidFill>
+                        <a:srgbClr val="D9CFCF"/>
+                      </a:solidFill>
+                      <a:prstDash val="solid"/>
+                      <a:round/>
+                      <a:headEnd type="none" w="med" len="med"/>
+                      <a:tailEnd type="none" w="med" len="med"/>
+                    </a:lnR>
+                    <a:lnT w="6350" cap="flat" cmpd="sng" algn="ctr">
+                      <a:solidFill>
+                        <a:srgbClr val="D9CFCF"/>
+                      </a:solidFill>
+                      <a:prstDash val="solid"/>
+                      <a:round/>
+                      <a:headEnd type="none" w="med" len="med"/>
+                      <a:tailEnd type="none" w="med" len="med"/>
+                    </a:lnT>
+                    <a:lnB w="6350" cap="flat" cmpd="sng" algn="ctr">
+                      <a:solidFill>
+                        <a:srgbClr val="D9CFCF"/>
+                      </a:solidFill>
+                      <a:prstDash val="solid"/>
+                      <a:round/>
+                      <a:headEnd type="none" w="med" len="med"/>
+                      <a:tailEnd type="none" w="med" len="med"/>
+                    </a:lnB>
+                  </a:tcPr>
+                </a:tc>
+              </a:tr>
+              <a:tr h="347472">
+                <a:tc>
+                  <a:txBody>
+                    <a:bodyPr/>
+                    <a:lstStyle/>
+                    <a:p>
+                      <a:pPr indent="0" marL="0">
+                        <a:buNone/>
+                      </a:pPr>
+                      <a:r>
+                        <a:rPr lang="en-US" sz="690" b="1" dirty="0">
+                          <a:solidFill>
+                            <a:srgbClr val="8B2A2A"/>
+                          </a:solidFill>
+                          <a:latin typeface="Arial" pitchFamily="34" charset="0"/>
+                          <a:ea typeface="Arial" pitchFamily="34" charset="-122"/>
+                          <a:cs typeface="Arial" pitchFamily="34" charset="-120"/>
+                        </a:rPr>
+                        <a:t>B2B · hospital licence</a:t>
+                      </a:r>
+                      <a:endParaRPr lang="en-US" sz="690" dirty="0">
+                        <a:latin typeface="Arial" charset="0"/>
+                        <a:ea typeface="Arial" charset="0"/>
+                        <a:cs typeface="Arial" charset="0"/>
+                      </a:endParaRPr>
+                    </a:p>
+                  </a:txBody>
+                  <a:tcPr marL="27432" marR="27432" marT="27432" marB="27432" anchor="ctr">
+                    <a:lnL w="6350" cap="flat" cmpd="sng" algn="ctr">
+                      <a:solidFill>
+                        <a:srgbClr val="D9CFCF"/>
+                      </a:solidFill>
+                      <a:prstDash val="solid"/>
+                      <a:round/>
+                      <a:headEnd type="none" w="med" len="med"/>
+                      <a:tailEnd type="none" w="med" len="med"/>
+                    </a:lnL>
+                    <a:lnR w="6350" cap="flat" cmpd="sng" algn="ctr">
+                      <a:solidFill>
+                        <a:srgbClr val="D9CFCF"/>
+                      </a:solidFill>
+                      <a:prstDash val="solid"/>
+                      <a:round/>
+                      <a:headEnd type="none" w="med" len="med"/>
+                      <a:tailEnd type="none" w="med" len="med"/>
+                    </a:lnR>
+                    <a:lnT w="6350" cap="flat" cmpd="sng" algn="ctr">
+                      <a:solidFill>
+                        <a:srgbClr val="D9CFCF"/>
+                      </a:solidFill>
+                      <a:prstDash val="solid"/>
+                      <a:round/>
+                      <a:headEnd type="none" w="med" len="med"/>
+                      <a:tailEnd type="none" w="med" len="med"/>
+                    </a:lnT>
+                    <a:lnB w="6350" cap="flat" cmpd="sng" algn="ctr">
+                      <a:solidFill>
+                        <a:srgbClr val="D9CFCF"/>
+                      </a:solidFill>
+                      <a:prstDash val="solid"/>
+                      <a:round/>
+                      <a:headEnd type="none" w="med" len="med"/>
+                      <a:tailEnd type="none" w="med" len="med"/>
+                    </a:lnB>
+                  </a:tcPr>
+                </a:tc>
+                <a:tc>
+                  <a:txBody>
+                    <a:bodyPr/>
+                    <a:lstStyle/>
+                    <a:p>
+                      <a:pPr indent="0" marL="0">
+                        <a:buNone/>
+                      </a:pPr>
+                      <a:r>
+                        <a:rPr lang="en-US" sz="690" dirty="0">
+                          <a:solidFill>
+                            <a:srgbClr val="333333"/>
+                          </a:solidFill>
+                          <a:latin typeface="Arial" pitchFamily="34" charset="0"/>
+                          <a:ea typeface="Arial" pitchFamily="34" charset="-122"/>
+                          <a:cs typeface="Arial" pitchFamily="34" charset="-120"/>
+                        </a:rPr>
+                        <a:t>On-prem / private cloud, Hindi PDFs, ADR export</a:t>
+                      </a:r>
+                      <a:endParaRPr lang="en-US" sz="690" dirty="0">
+                        <a:latin typeface="Arial" charset="0"/>
+                        <a:ea typeface="Arial" charset="0"/>
+                        <a:cs typeface="Arial" charset="0"/>
+                      </a:endParaRPr>
+                    </a:p>
+                  </a:txBody>
+                  <a:tcPr marL="27432" marR="27432" marT="27432" marB="27432" anchor="ctr">
+                    <a:lnL w="6350" cap="flat" cmpd="sng" algn="ctr">
+                      <a:solidFill>
+                        <a:srgbClr val="D9CFCF"/>
+                      </a:solidFill>
+                      <a:prstDash val="solid"/>
+                      <a:round/>
+                      <a:headEnd type="none" w="med" len="med"/>
+                      <a:tailEnd type="none" w="med" len="med"/>
+                    </a:lnL>
+                    <a:lnR w="6350" cap="flat" cmpd="sng" algn="ctr">
+                      <a:solidFill>
+                        <a:srgbClr val="D9CFCF"/>
+                      </a:solidFill>
+                      <a:prstDash val="solid"/>
+                      <a:round/>
+                      <a:headEnd type="none" w="med" len="med"/>
+                      <a:tailEnd type="none" w="med" len="med"/>
+                    </a:lnR>
+                    <a:lnT w="6350" cap="flat" cmpd="sng" algn="ctr">
+                      <a:solidFill>
+                        <a:srgbClr val="D9CFCF"/>
+                      </a:solidFill>
+                      <a:prstDash val="solid"/>
+                      <a:round/>
+                      <a:headEnd type="none" w="med" len="med"/>
+                      <a:tailEnd type="none" w="med" len="med"/>
+                    </a:lnT>
+                    <a:lnB w="6350" cap="flat" cmpd="sng" algn="ctr">
+                      <a:solidFill>
+                        <a:srgbClr val="D9CFCF"/>
+                      </a:solidFill>
+                      <a:prstDash val="solid"/>
+                      <a:round/>
+                      <a:headEnd type="none" w="med" len="med"/>
+                      <a:tailEnd type="none" w="med" len="med"/>
+                    </a:lnB>
+                  </a:tcPr>
+                </a:tc>
+                <a:tc>
+                  <a:txBody>
+                    <a:bodyPr/>
+                    <a:lstStyle/>
+                    <a:p>
+                      <a:pPr indent="0" marL="0">
+                        <a:buNone/>
+                      </a:pPr>
+                      <a:r>
+                        <a:rPr lang="en-US" sz="690" b="1" dirty="0">
+                          <a:solidFill>
+                            <a:srgbClr val="333333"/>
+                          </a:solidFill>
+                          <a:latin typeface="Arial" pitchFamily="34" charset="0"/>
+                          <a:ea typeface="Arial" pitchFamily="34" charset="-122"/>
+                          <a:cs typeface="Arial" pitchFamily="34" charset="-120"/>
+                        </a:rPr>
+                        <a:t>₹1.5 lakh / year</a:t>
+                      </a:r>
+                      <a:endParaRPr lang="en-US" sz="690" dirty="0">
+                        <a:latin typeface="Arial" charset="0"/>
+                        <a:ea typeface="Arial" charset="0"/>
+                        <a:cs typeface="Arial" charset="0"/>
+                      </a:endParaRPr>
+                    </a:p>
+                  </a:txBody>
+                  <a:tcPr marL="27432" marR="27432" marT="27432" marB="27432" anchor="ctr">
+                    <a:lnL w="6350" cap="flat" cmpd="sng" algn="ctr">
+                      <a:solidFill>
+                        <a:srgbClr val="D9CFCF"/>
+                      </a:solidFill>
+                      <a:prstDash val="solid"/>
+                      <a:round/>
+                      <a:headEnd type="none" w="med" len="med"/>
+                      <a:tailEnd type="none" w="med" len="med"/>
+                    </a:lnL>
+                    <a:lnR w="6350" cap="flat" cmpd="sng" algn="ctr">
+                      <a:solidFill>
+                        <a:srgbClr val="D9CFCF"/>
+                      </a:solidFill>
+                      <a:prstDash val="solid"/>
+                      <a:round/>
+                      <a:headEnd type="none" w="med" len="med"/>
+                      <a:tailEnd type="none" w="med" len="med"/>
+                    </a:lnR>
+                    <a:lnT w="6350" cap="flat" cmpd="sng" algn="ctr">
+                      <a:solidFill>
+                        <a:srgbClr val="D9CFCF"/>
+                      </a:solidFill>
+                      <a:prstDash val="solid"/>
+                      <a:round/>
+                      <a:headEnd type="none" w="med" len="med"/>
+                      <a:tailEnd type="none" w="med" len="med"/>
+                    </a:lnT>
+                    <a:lnB w="6350" cap="flat" cmpd="sng" algn="ctr">
+                      <a:solidFill>
+                        <a:srgbClr val="D9CFCF"/>
+                      </a:solidFill>
+                      <a:prstDash val="solid"/>
+                      <a:round/>
+                      <a:headEnd type="none" w="med" len="med"/>
+                      <a:tailEnd type="none" w="med" len="med"/>
+                    </a:lnB>
+                  </a:tcPr>
+                </a:tc>
+                <a:tc>
+                  <a:txBody>
+                    <a:bodyPr/>
+                    <a:lstStyle/>
+                    <a:p>
+                      <a:pPr indent="0" marL="0">
+                        <a:buNone/>
+                      </a:pPr>
+                      <a:r>
+                        <a:rPr lang="en-US" sz="690" dirty="0">
+                          <a:solidFill>
+                            <a:srgbClr val="333333"/>
+                          </a:solidFill>
+                          <a:latin typeface="Arial" pitchFamily="34" charset="0"/>
+                          <a:ea typeface="Arial" pitchFamily="34" charset="-122"/>
+                          <a:cs typeface="Arial" pitchFamily="34" charset="-120"/>
+                        </a:rPr>
+                        <a:t>One pharmacist-hour per day saved covers it; priced like a single clinical-reference subscription</a:t>
+                      </a:r>
+                      <a:endParaRPr lang="en-US" sz="690" dirty="0">
+                        <a:latin typeface="Arial" charset="0"/>
+                        <a:ea typeface="Arial" charset="0"/>
+                        <a:cs typeface="Arial" charset="0"/>
+                      </a:endParaRPr>
+                    </a:p>
+                  </a:txBody>
+                  <a:tcPr marL="27432" marR="27432" marT="27432" marB="27432" anchor="ctr">
+                    <a:lnL w="6350" cap="flat" cmpd="sng" algn="ctr">
+                      <a:solidFill>
+                        <a:srgbClr val="D9CFCF"/>
+                      </a:solidFill>
+                      <a:prstDash val="solid"/>
+                      <a:round/>
+                      <a:headEnd type="none" w="med" len="med"/>
+                      <a:tailEnd type="none" w="med" len="med"/>
+                    </a:lnL>
+                    <a:lnR w="6350" cap="flat" cmpd="sng" algn="ctr">
+                      <a:solidFill>
+                        <a:srgbClr val="D9CFCF"/>
+                      </a:solidFill>
+                      <a:prstDash val="solid"/>
+                      <a:round/>
+                      <a:headEnd type="none" w="med" len="med"/>
+                      <a:tailEnd type="none" w="med" len="med"/>
+                    </a:lnR>
+                    <a:lnT w="6350" cap="flat" cmpd="sng" algn="ctr">
+                      <a:solidFill>
+                        <a:srgbClr val="D9CFCF"/>
+                      </a:solidFill>
+                      <a:prstDash val="solid"/>
+                      <a:round/>
+                      <a:headEnd type="none" w="med" len="med"/>
+                      <a:tailEnd type="none" w="med" len="med"/>
+                    </a:lnT>
+                    <a:lnB w="6350" cap="flat" cmpd="sng" algn="ctr">
+                      <a:solidFill>
+                        <a:srgbClr val="D9CFCF"/>
+                      </a:solidFill>
+                      <a:prstDash val="solid"/>
+                      <a:round/>
+                      <a:headEnd type="none" w="med" len="med"/>
+                      <a:tailEnd type="none" w="med" len="med"/>
+                    </a:lnB>
+                  </a:tcPr>
+                </a:tc>
+              </a:tr>
+              <a:tr h="347472">
+                <a:tc>
+                  <a:txBody>
+                    <a:bodyPr/>
+                    <a:lstStyle/>
+                    <a:p>
+                      <a:pPr indent="0" marL="0">
+                        <a:buNone/>
+                      </a:pPr>
+                      <a:r>
+                        <a:rPr lang="en-US" sz="690" b="1" dirty="0">
+                          <a:solidFill>
+                            <a:srgbClr val="8B2A2A"/>
+                          </a:solidFill>
+                          <a:latin typeface="Arial" pitchFamily="34" charset="0"/>
+                          <a:ea typeface="Arial" pitchFamily="34" charset="-122"/>
+                          <a:cs typeface="Arial" pitchFamily="34" charset="-120"/>
+                        </a:rPr>
+                        <a:t>B2G / CSR</a:t>
+                      </a:r>
+                      <a:endParaRPr lang="en-US" sz="690" dirty="0">
+                        <a:latin typeface="Arial" charset="0"/>
+                        <a:ea typeface="Arial" charset="0"/>
+                        <a:cs typeface="Arial" charset="0"/>
+                      </a:endParaRPr>
+                    </a:p>
+                  </a:txBody>
+                  <a:tcPr marL="27432" marR="27432" marT="27432" marB="27432" anchor="ctr">
+                    <a:lnL w="6350" cap="flat" cmpd="sng" algn="ctr">
+                      <a:solidFill>
+                        <a:srgbClr val="D9CFCF"/>
+                      </a:solidFill>
+                      <a:prstDash val="solid"/>
+                      <a:round/>
+                      <a:headEnd type="none" w="med" len="med"/>
+                      <a:tailEnd type="none" w="med" len="med"/>
+                    </a:lnL>
+                    <a:lnR w="6350" cap="flat" cmpd="sng" algn="ctr">
+                      <a:solidFill>
+                        <a:srgbClr val="D9CFCF"/>
+                      </a:solidFill>
+                      <a:prstDash val="solid"/>
+                      <a:round/>
+                      <a:headEnd type="none" w="med" len="med"/>
+                      <a:tailEnd type="none" w="med" len="med"/>
+                    </a:lnR>
+                    <a:lnT w="6350" cap="flat" cmpd="sng" algn="ctr">
+                      <a:solidFill>
+                        <a:srgbClr val="D9CFCF"/>
+                      </a:solidFill>
+                      <a:prstDash val="solid"/>
+                      <a:round/>
+                      <a:headEnd type="none" w="med" len="med"/>
+                      <a:tailEnd type="none" w="med" len="med"/>
+                    </a:lnT>
+                    <a:lnB w="6350" cap="flat" cmpd="sng" algn="ctr">
+                      <a:solidFill>
+                        <a:srgbClr val="D9CFCF"/>
+                      </a:solidFill>
+                      <a:prstDash val="solid"/>
+                      <a:round/>
+                      <a:headEnd type="none" w="med" len="med"/>
+                      <a:tailEnd type="none" w="med" len="med"/>
+                    </a:lnB>
+                  </a:tcPr>
+                </a:tc>
+                <a:tc>
+                  <a:txBody>
+                    <a:bodyPr/>
+                    <a:lstStyle/>
+                    <a:p>
+                      <a:pPr indent="0" marL="0">
+                        <a:buNone/>
+                      </a:pPr>
+                      <a:r>
+                        <a:rPr lang="en-US" sz="690" dirty="0">
+                          <a:solidFill>
+                            <a:srgbClr val="333333"/>
+                          </a:solidFill>
+                          <a:latin typeface="Arial" pitchFamily="34" charset="0"/>
+                          <a:ea typeface="Arial" pitchFamily="34" charset="-122"/>
+                          <a:cs typeface="Arial" pitchFamily="34" charset="-120"/>
+                        </a:rPr>
+                        <a:t>Co-use analytics, structured ICSRs, college co-curation</a:t>
+                      </a:r>
+                      <a:endParaRPr lang="en-US" sz="690" dirty="0">
+                        <a:latin typeface="Arial" charset="0"/>
+                        <a:ea typeface="Arial" charset="0"/>
+                        <a:cs typeface="Arial" charset="0"/>
+                      </a:endParaRPr>
+                    </a:p>
+                  </a:txBody>
+                  <a:tcPr marL="27432" marR="27432" marT="27432" marB="27432" anchor="ctr">
+                    <a:lnL w="6350" cap="flat" cmpd="sng" algn="ctr">
+                      <a:solidFill>
+                        <a:srgbClr val="D9CFCF"/>
+                      </a:solidFill>
+                      <a:prstDash val="solid"/>
+                      <a:round/>
+                      <a:headEnd type="none" w="med" len="med"/>
+                      <a:tailEnd type="none" w="med" len="med"/>
+                    </a:lnL>
+                    <a:lnR w="6350" cap="flat" cmpd="sng" algn="ctr">
+                      <a:solidFill>
+                        <a:srgbClr val="D9CFCF"/>
+                      </a:solidFill>
+                      <a:prstDash val="solid"/>
+                      <a:round/>
+                      <a:headEnd type="none" w="med" len="med"/>
+                      <a:tailEnd type="none" w="med" len="med"/>
+                    </a:lnR>
+                    <a:lnT w="6350" cap="flat" cmpd="sng" algn="ctr">
+                      <a:solidFill>
+                        <a:srgbClr val="D9CFCF"/>
+                      </a:solidFill>
+                      <a:prstDash val="solid"/>
+                      <a:round/>
+                      <a:headEnd type="none" w="med" len="med"/>
+                      <a:tailEnd type="none" w="med" len="med"/>
+                    </a:lnT>
+                    <a:lnB w="6350" cap="flat" cmpd="sng" algn="ctr">
+                      <a:solidFill>
+                        <a:srgbClr val="D9CFCF"/>
+                      </a:solidFill>
+                      <a:prstDash val="solid"/>
+                      <a:round/>
+                      <a:headEnd type="none" w="med" len="med"/>
+                      <a:tailEnd type="none" w="med" len="med"/>
+                    </a:lnB>
+                  </a:tcPr>
+                </a:tc>
+                <a:tc>
+                  <a:txBody>
+                    <a:bodyPr/>
+                    <a:lstStyle/>
+                    <a:p>
+                      <a:pPr indent="0" marL="0">
+                        <a:buNone/>
+                      </a:pPr>
+                      <a:r>
+                        <a:rPr lang="en-US" sz="690" b="1" dirty="0">
+                          <a:solidFill>
+                            <a:srgbClr val="333333"/>
+                          </a:solidFill>
+                          <a:latin typeface="Arial" pitchFamily="34" charset="0"/>
+                          <a:ea typeface="Arial" pitchFamily="34" charset="-122"/>
+                          <a:cs typeface="Arial" pitchFamily="34" charset="-120"/>
+                        </a:rPr>
+                        <a:t>Programme grants ₹10–25 lakh</a:t>
+                      </a:r>
+                      <a:endParaRPr lang="en-US" sz="690" dirty="0">
+                        <a:latin typeface="Arial" charset="0"/>
+                        <a:ea typeface="Arial" charset="0"/>
+                        <a:cs typeface="Arial" charset="0"/>
+                      </a:endParaRPr>
+                    </a:p>
+                  </a:txBody>
+                  <a:tcPr marL="27432" marR="27432" marT="27432" marB="27432" anchor="ctr">
+                    <a:lnL w="6350" cap="flat" cmpd="sng" algn="ctr">
+                      <a:solidFill>
+                        <a:srgbClr val="D9CFCF"/>
+                      </a:solidFill>
+                      <a:prstDash val="solid"/>
+                      <a:round/>
+                      <a:headEnd type="none" w="med" len="med"/>
+                      <a:tailEnd type="none" w="med" len="med"/>
+                    </a:lnL>
+                    <a:lnR w="6350" cap="flat" cmpd="sng" algn="ctr">
+                      <a:solidFill>
+                        <a:srgbClr val="D9CFCF"/>
+                      </a:solidFill>
+                      <a:prstDash val="solid"/>
+                      <a:round/>
+                      <a:headEnd type="none" w="med" len="med"/>
+                      <a:tailEnd type="none" w="med" len="med"/>
+                    </a:lnR>
+                    <a:lnT w="6350" cap="flat" cmpd="sng" algn="ctr">
+                      <a:solidFill>
+                        <a:srgbClr val="D9CFCF"/>
+                      </a:solidFill>
+                      <a:prstDash val="solid"/>
+                      <a:round/>
+                      <a:headEnd type="none" w="med" len="med"/>
+                      <a:tailEnd type="none" w="med" len="med"/>
+                    </a:lnT>
+                    <a:lnB w="6350" cap="flat" cmpd="sng" algn="ctr">
+                      <a:solidFill>
+                        <a:srgbClr val="D9CFCF"/>
+                      </a:solidFill>
+                      <a:prstDash val="solid"/>
+                      <a:round/>
+                      <a:headEnd type="none" w="med" len="med"/>
+                      <a:tailEnd type="none" w="med" len="med"/>
+                    </a:lnB>
+                  </a:tcPr>
+                </a:tc>
+                <a:tc>
+                  <a:txBody>
+                    <a:bodyPr/>
+                    <a:lstStyle/>
+                    <a:p>
+                      <a:pPr indent="0" marL="0">
+                        <a:buNone/>
+                      </a:pPr>
+                      <a:r>
+                        <a:rPr lang="en-US" sz="690" dirty="0">
+                          <a:solidFill>
+                            <a:srgbClr val="333333"/>
+                          </a:solidFill>
+                          <a:latin typeface="Arial" pitchFamily="34" charset="0"/>
+                          <a:ea typeface="Arial" pitchFamily="34" charset="-122"/>
+                          <a:cs typeface="Arial" pitchFamily="34" charset="-120"/>
+                        </a:rPr>
+                        <a:t>In line with Ministry of Ayush pharmacovigilance programme funding and brand CSR budgets</a:t>
+                      </a:r>
+                      <a:endParaRPr lang="en-US" sz="690" dirty="0">
+                        <a:latin typeface="Arial" charset="0"/>
+                        <a:ea typeface="Arial" charset="0"/>
+                        <a:cs typeface="Arial" charset="0"/>
+                      </a:endParaRPr>
+                    </a:p>
+                  </a:txBody>
+                  <a:tcPr marL="27432" marR="27432" marT="27432" marB="27432" anchor="ctr">
+                    <a:lnL w="6350" cap="flat" cmpd="sng" algn="ctr">
+                      <a:solidFill>
+                        <a:srgbClr val="D9CFCF"/>
+                      </a:solidFill>
+                      <a:prstDash val="solid"/>
+                      <a:round/>
+                      <a:headEnd type="none" w="med" len="med"/>
+                      <a:tailEnd type="none" w="med" len="med"/>
+                    </a:lnL>
+                    <a:lnR w="6350" cap="flat" cmpd="sng" algn="ctr">
+                      <a:solidFill>
+                        <a:srgbClr val="D9CFCF"/>
+                      </a:solidFill>
+                      <a:prstDash val="solid"/>
+                      <a:round/>
+                      <a:headEnd type="none" w="med" len="med"/>
+                      <a:tailEnd type="none" w="med" len="med"/>
+                    </a:lnR>
+                    <a:lnT w="6350" cap="flat" cmpd="sng" algn="ctr">
+                      <a:solidFill>
+                        <a:srgbClr val="D9CFCF"/>
+                      </a:solidFill>
+                      <a:prstDash val="solid"/>
+                      <a:round/>
+                      <a:headEnd type="none" w="med" len="med"/>
+                      <a:tailEnd type="none" w="med" len="med"/>
+                    </a:lnT>
+                    <a:lnB w="6350" cap="flat" cmpd="sng" algn="ctr">
+                      <a:solidFill>
+                        <a:srgbClr val="D9CFCF"/>
+                      </a:solidFill>
+                      <a:prstDash val="solid"/>
+                      <a:round/>
+                      <a:headEnd type="none" w="med" len="med"/>
+                      <a:tailEnd type="none" w="med" len="med"/>
+                    </a:lnB>
+                  </a:tcPr>
+                </a:tc>
+              </a:tr>
+            </a:tbl>
+          </a:graphicData>
+        </a:graphic>
+      </p:graphicFrame>
+      <p:sp>
+        <p:nvSpPr>
+          <p:cNvPr id="13" name="Shape 10"/>
           <p:cNvSpPr/>
           <p:nvPr/>
         </p:nvSpPr>
         <p:spPr>
           <a:xfrm>
-            <a:off x="4663440" y="777240"/>
-            <a:ext cx="4251960" cy="4023360"/>
+            <a:off x="5212080" y="749808"/>
+            <a:ext cx="3703320" cy="2514600"/>
           </a:xfrm>
           <a:prstGeom prst="roundRect">
             <a:avLst>
-              <a:gd name="adj" fmla="val 1136"/>
+              <a:gd name="adj" fmla="val 1818"/>
             </a:avLst>
           </a:prstGeom>
           <a:solidFill>
@@ -22343,14 +25320,14 @@
       </p:sp>
       <p:sp>
         <p:nvSpPr>
-          <p:cNvPr id="14" name="Shape 12"/>
+          <p:cNvPr id="14" name="Shape 11"/>
           <p:cNvSpPr/>
           <p:nvPr/>
         </p:nvSpPr>
         <p:spPr>
           <a:xfrm>
-            <a:off x="4663440" y="777240"/>
-            <a:ext cx="4251960" cy="237744"/>
+            <a:off x="5212080" y="749808"/>
+            <a:ext cx="3703320" cy="237744"/>
           </a:xfrm>
           <a:prstGeom prst="rect">
             <a:avLst/>
@@ -22368,14 +25345,14 @@
       </p:sp>
       <p:sp>
         <p:nvSpPr>
-          <p:cNvPr id="15" name="Text 13"/>
-          <p:cNvSpPr txBox="1"/>
-          <p:nvPr/>
-        </p:nvSpPr>
-        <p:spPr>
-          <a:xfrm>
-            <a:off x="4754880" y="777240"/>
-            <a:ext cx="4069080" cy="237744"/>
+          <p:cNvPr id="15" name="Text 12"/>
+          <p:cNvSpPr txBox="1"/>
+          <p:nvPr/>
+        </p:nvSpPr>
+        <p:spPr>
+          <a:xfrm>
+            <a:off x="5303520" y="749808"/>
+            <a:ext cx="3520440" cy="237744"/>
           </a:xfrm>
           <a:prstGeom prst="rect">
             <a:avLst/>
@@ -22399,7 +25376,7 @@
                 <a:ea typeface="Arial" pitchFamily="34" charset="-122"/>
                 <a:cs typeface="Arial" pitchFamily="34" charset="-120"/>
               </a:rPr>
-              <a:t>24-HOUR BUILD PLAN · 31 OCT – 1 NOV</a:t>
+              <a:t>MARKET RESEARCH</a:t>
             </a:r>
             <a:endParaRPr lang="en-US" sz="850" dirty="0"/>
           </a:p>
@@ -22407,18 +25384,321 @@
       </p:sp>
       <p:sp>
         <p:nvSpPr>
-          <p:cNvPr id="16" name="Shape 14"/>
+          <p:cNvPr id="16" name="Text 13"/>
+          <p:cNvSpPr txBox="1"/>
+          <p:nvPr/>
+        </p:nvSpPr>
+        <p:spPr>
+          <a:xfrm>
+            <a:off x="5303520" y="1024128"/>
+            <a:ext cx="3520440" cy="2194560"/>
+          </a:xfrm>
+          <a:prstGeom prst="rect">
+            <a:avLst/>
+          </a:prstGeom>
+          <a:noFill/>
+          <a:ln/>
+        </p:spPr>
+        <p:txBody>
+          <a:bodyPr wrap="square" lIns="0" tIns="0" rIns="0" bIns="0" rtlCol="0" anchor="t"/>
+          <a:lstStyle/>
+          <a:p>
+            <a:pPr marL="114300" indent="-114300">
+              <a:spcAft>
+                <a:spcPts val="200"/>
+              </a:spcAft>
+              <a:buSzPct val="100000"/>
+              <a:buChar char="•"/>
+            </a:pPr>
+            <a:r>
+              <a:rPr lang="en-US" sz="730" b="1" dirty="0">
+                <a:solidFill>
+                  <a:srgbClr val="8B2A2A"/>
+                </a:solidFill>
+                <a:latin typeface="Arial" pitchFamily="34" charset="0"/>
+                <a:ea typeface="Arial" pitchFamily="34" charset="-122"/>
+                <a:cs typeface="Arial" pitchFamily="34" charset="-120"/>
+              </a:rPr>
+              <a:t>Demand: </a:t>
+            </a:r>
+            <a:pPr indent="0" marL="0">
+              <a:spcAft>
+                <a:spcPts val="200"/>
+              </a:spcAft>
+              <a:buNone/>
+            </a:pPr>
+            <a:r>
+              <a:rPr lang="en-US" sz="730" dirty="0">
+                <a:solidFill>
+                  <a:srgbClr val="333333"/>
+                </a:solidFill>
+                <a:latin typeface="Arial" pitchFamily="34" charset="0"/>
+                <a:ea typeface="Arial" pitchFamily="34" charset="-122"/>
+                <a:cs typeface="Arial" pitchFamily="34" charset="-120"/>
+              </a:rPr>
+              <a:t>37% of hospital patients already combine both systems; only 19% tell their doctor (references slide).</a:t>
+            </a:r>
+            <a:endParaRPr lang="en-US" sz="730" dirty="0"/>
+          </a:p>
+          <a:p>
+            <a:pPr marL="114300" indent="-114300">
+              <a:spcAft>
+                <a:spcPts val="200"/>
+              </a:spcAft>
+              <a:buSzPct val="100000"/>
+              <a:buChar char="•"/>
+            </a:pPr>
+            <a:r>
+              <a:rPr lang="en-US" sz="730" b="1" dirty="0">
+                <a:solidFill>
+                  <a:srgbClr val="8B2A2A"/>
+                </a:solidFill>
+                <a:latin typeface="Arial" pitchFamily="34" charset="0"/>
+                <a:ea typeface="Arial" pitchFamily="34" charset="-122"/>
+                <a:cs typeface="Arial" pitchFamily="34" charset="-120"/>
+              </a:rPr>
+              <a:t>Counters: </a:t>
+            </a:r>
+            <a:pPr indent="0" marL="0">
+              <a:spcAft>
+                <a:spcPts val="200"/>
+              </a:spcAft>
+              <a:buNone/>
+            </a:pPr>
+            <a:r>
+              <a:rPr lang="en-US" sz="730" dirty="0">
+                <a:solidFill>
+                  <a:srgbClr val="333333"/>
+                </a:solidFill>
+                <a:latin typeface="Arial" pitchFamily="34" charset="0"/>
+                <a:ea typeface="Arial" pitchFamily="34" charset="-122"/>
+                <a:cs typeface="Arial" pitchFamily="34" charset="-120"/>
+              </a:rPr>
+              <a:t>India has ≈ 8.5 lakh retail chemists (AIOCD); 1% adoption = 8,500 outlets × ₹499 × 12 = ₹5.1 crore ARR.</a:t>
+            </a:r>
+            <a:endParaRPr lang="en-US" sz="730" dirty="0"/>
+          </a:p>
+          <a:p>
+            <a:pPr marL="114300" indent="-114300">
+              <a:spcAft>
+                <a:spcPts val="200"/>
+              </a:spcAft>
+              <a:buSzPct val="100000"/>
+              <a:buChar char="•"/>
+            </a:pPr>
+            <a:r>
+              <a:rPr lang="en-US" sz="730" b="1" dirty="0">
+                <a:solidFill>
+                  <a:srgbClr val="8B2A2A"/>
+                </a:solidFill>
+                <a:latin typeface="Arial" pitchFamily="34" charset="0"/>
+                <a:ea typeface="Arial" pitchFamily="34" charset="-122"/>
+                <a:cs typeface="Arial" pitchFamily="34" charset="-120"/>
+              </a:rPr>
+              <a:t>Telemedicine: </a:t>
+            </a:r>
+            <a:pPr indent="0" marL="0">
+              <a:spcAft>
+                <a:spcPts val="200"/>
+              </a:spcAft>
+              <a:buNone/>
+            </a:pPr>
+            <a:r>
+              <a:rPr lang="en-US" sz="730" dirty="0">
+                <a:solidFill>
+                  <a:srgbClr val="333333"/>
+                </a:solidFill>
+                <a:latin typeface="Arial" pitchFamily="34" charset="0"/>
+                <a:ea typeface="Arial" pitchFamily="34" charset="-122"/>
+                <a:cs typeface="Arial" pitchFamily="34" charset="-120"/>
+              </a:rPr>
+              <a:t>eSanjeevani alone crossed 30 crore consultations; at 1% of consults checked × ₹2 = ₹6 crore / year.</a:t>
+            </a:r>
+            <a:endParaRPr lang="en-US" sz="730" dirty="0"/>
+          </a:p>
+          <a:p>
+            <a:pPr marL="114300" indent="-114300">
+              <a:spcAft>
+                <a:spcPts val="200"/>
+              </a:spcAft>
+              <a:buSzPct val="100000"/>
+              <a:buChar char="•"/>
+            </a:pPr>
+            <a:r>
+              <a:rPr lang="en-US" sz="730" b="1" dirty="0">
+                <a:solidFill>
+                  <a:srgbClr val="8B2A2A"/>
+                </a:solidFill>
+                <a:latin typeface="Arial" pitchFamily="34" charset="0"/>
+                <a:ea typeface="Arial" pitchFamily="34" charset="-122"/>
+                <a:cs typeface="Arial" pitchFamily="34" charset="-120"/>
+              </a:rPr>
+              <a:t>Ayush sector: </a:t>
+            </a:r>
+            <a:pPr indent="0" marL="0">
+              <a:spcAft>
+                <a:spcPts val="200"/>
+              </a:spcAft>
+              <a:buNone/>
+            </a:pPr>
+            <a:r>
+              <a:rPr lang="en-US" sz="730" dirty="0">
+                <a:solidFill>
+                  <a:srgbClr val="333333"/>
+                </a:solidFill>
+                <a:latin typeface="Arial" pitchFamily="34" charset="0"/>
+                <a:ea typeface="Arial" pitchFamily="34" charset="-122"/>
+                <a:cs typeface="Arial" pitchFamily="34" charset="-120"/>
+              </a:rPr>
+              <a:t>Ministry of Ayush values the Ayush market at US$ 24 billion (2020, RIS); no product offers a herb × drug safety layer.</a:t>
+            </a:r>
+            <a:endParaRPr lang="en-US" sz="730" dirty="0"/>
+          </a:p>
+          <a:p>
+            <a:pPr marL="114300" indent="-114300">
+              <a:spcAft>
+                <a:spcPts val="200"/>
+              </a:spcAft>
+              <a:buSzPct val="100000"/>
+              <a:buChar char="•"/>
+            </a:pPr>
+            <a:r>
+              <a:rPr lang="en-US" sz="730" b="1" dirty="0">
+                <a:solidFill>
+                  <a:srgbClr val="8B2A2A"/>
+                </a:solidFill>
+                <a:latin typeface="Arial" pitchFamily="34" charset="0"/>
+                <a:ea typeface="Arial" pitchFamily="34" charset="-122"/>
+                <a:cs typeface="Arial" pitchFamily="34" charset="-120"/>
+              </a:rPr>
+              <a:t>Cost side: </a:t>
+            </a:r>
+            <a:pPr indent="0" marL="0">
+              <a:spcAft>
+                <a:spcPts val="200"/>
+              </a:spcAft>
+              <a:buNone/>
+            </a:pPr>
+            <a:r>
+              <a:rPr lang="en-US" sz="730" dirty="0">
+                <a:solidFill>
+                  <a:srgbClr val="333333"/>
+                </a:solidFill>
+                <a:latin typeface="Arial" pitchFamily="34" charset="0"/>
+                <a:ea typeface="Arial" pitchFamily="34" charset="-122"/>
+                <a:cs typeface="Arial" pitchFamily="34" charset="-120"/>
+              </a:rPr>
+              <a:t>verdicts cost ≈ ₹0 (rules + SQLite/Postgres); AI rewording ≈ ₹0.02 per check (Groq); TinyFish curation is a fixed monthly cost (Search/Fetch free, Agent ≈ $0.016 per step).</a:t>
+            </a:r>
+            <a:endParaRPr lang="en-US" sz="730" dirty="0"/>
+          </a:p>
+        </p:txBody>
+      </p:sp>
+      <p:sp>
+        <p:nvSpPr>
+          <p:cNvPr id="17" name="Shape 14"/>
           <p:cNvSpPr/>
           <p:nvPr/>
         </p:nvSpPr>
         <p:spPr>
           <a:xfrm>
-            <a:off x="4800600" y="1097280"/>
-            <a:ext cx="3977640" cy="530352"/>
+            <a:off x="228600" y="3383280"/>
+            <a:ext cx="8686800" cy="1417320"/>
           </a:xfrm>
           <a:prstGeom prst="roundRect">
             <a:avLst>
-              <a:gd name="adj" fmla="val 8621"/>
+              <a:gd name="adj" fmla="val 3226"/>
+            </a:avLst>
+          </a:prstGeom>
+          <a:solidFill>
+            <a:srgbClr val="FFFFFF"/>
+          </a:solidFill>
+          <a:ln w="9525">
+            <a:solidFill>
+              <a:srgbClr val="D9CFCF"/>
+            </a:solidFill>
+            <a:prstDash val="solid"/>
+          </a:ln>
+        </p:spPr>
+      </p:sp>
+      <p:sp>
+        <p:nvSpPr>
+          <p:cNvPr id="18" name="Shape 15"/>
+          <p:cNvSpPr/>
+          <p:nvPr/>
+        </p:nvSpPr>
+        <p:spPr>
+          <a:xfrm>
+            <a:off x="228600" y="3383280"/>
+            <a:ext cx="8686800" cy="237744"/>
+          </a:xfrm>
+          <a:prstGeom prst="rect">
+            <a:avLst/>
+          </a:prstGeom>
+          <a:solidFill>
+            <a:srgbClr val="8B2A2A"/>
+          </a:solidFill>
+          <a:ln w="12700">
+            <a:solidFill>
+              <a:srgbClr val="8B2A2A"/>
+            </a:solidFill>
+            <a:prstDash val="solid"/>
+          </a:ln>
+        </p:spPr>
+      </p:sp>
+      <p:sp>
+        <p:nvSpPr>
+          <p:cNvPr id="19" name="Text 16"/>
+          <p:cNvSpPr txBox="1"/>
+          <p:nvPr/>
+        </p:nvSpPr>
+        <p:spPr>
+          <a:xfrm>
+            <a:off x="320040" y="3383280"/>
+            <a:ext cx="8503920" cy="237744"/>
+          </a:xfrm>
+          <a:prstGeom prst="rect">
+            <a:avLst/>
+          </a:prstGeom>
+          <a:noFill/>
+          <a:ln/>
+        </p:spPr>
+        <p:txBody>
+          <a:bodyPr wrap="square" lIns="0" tIns="0" rIns="0" bIns="0" rtlCol="0" anchor="ctr"/>
+          <a:lstStyle/>
+          <a:p>
+            <a:pPr indent="0" marL="0">
+              <a:buNone/>
+            </a:pPr>
+            <a:r>
+              <a:rPr lang="en-US" sz="850" b="1" spc="100" kern="0" dirty="0">
+                <a:solidFill>
+                  <a:srgbClr val="FFFFFF"/>
+                </a:solidFill>
+                <a:latin typeface="Arial" pitchFamily="34" charset="0"/>
+                <a:ea typeface="Arial" pitchFamily="34" charset="-122"/>
+                <a:cs typeface="Arial" pitchFamily="34" charset="-120"/>
+              </a:rPr>
+              <a:t>THREE-YEAR PATH · CONSERVATIVE</a:t>
+            </a:r>
+            <a:endParaRPr lang="en-US" sz="850" dirty="0"/>
+          </a:p>
+        </p:txBody>
+      </p:sp>
+      <p:sp>
+        <p:nvSpPr>
+          <p:cNvPr id="20" name="Shape 17"/>
+          <p:cNvSpPr/>
+          <p:nvPr/>
+        </p:nvSpPr>
+        <p:spPr>
+          <a:xfrm>
+            <a:off x="365760" y="3675888"/>
+            <a:ext cx="2743200" cy="1051560"/>
+          </a:xfrm>
+          <a:prstGeom prst="roundRect">
+            <a:avLst>
+              <a:gd name="adj" fmla="val 4348"/>
             </a:avLst>
           </a:prstGeom>
           <a:solidFill>
@@ -22434,123 +25714,174 @@
       </p:sp>
       <p:sp>
         <p:nvSpPr>
-          <p:cNvPr id="17" name="Shape 15"/>
+          <p:cNvPr id="21" name="Text 18"/>
+          <p:cNvSpPr txBox="1"/>
+          <p:nvPr/>
+        </p:nvSpPr>
+        <p:spPr>
+          <a:xfrm>
+            <a:off x="457200" y="3712464"/>
+            <a:ext cx="2560320" cy="201168"/>
+          </a:xfrm>
+          <a:prstGeom prst="rect">
+            <a:avLst/>
+          </a:prstGeom>
+          <a:noFill/>
+          <a:ln/>
+        </p:spPr>
+        <p:txBody>
+          <a:bodyPr wrap="square" lIns="0" tIns="0" rIns="0" bIns="0" rtlCol="0" anchor="t"/>
+          <a:lstStyle/>
+          <a:p>
+            <a:pPr indent="0" marL="0">
+              <a:buNone/>
+            </a:pPr>
+            <a:r>
+              <a:rPr lang="en-US" sz="850" b="1" dirty="0">
+                <a:solidFill>
+                  <a:srgbClr val="8B2A2A"/>
+                </a:solidFill>
+                <a:latin typeface="Arial" pitchFamily="34" charset="0"/>
+                <a:ea typeface="Arial" pitchFamily="34" charset="-122"/>
+                <a:cs typeface="Arial" pitchFamily="34" charset="-120"/>
+              </a:rPr>
+              <a:t>Year 1 · pilot</a:t>
+            </a:r>
+            <a:endParaRPr lang="en-US" sz="850" dirty="0"/>
+          </a:p>
+        </p:txBody>
+      </p:sp>
+      <p:sp>
+        <p:nvSpPr>
+          <p:cNvPr id="22" name="Text 19"/>
+          <p:cNvSpPr txBox="1"/>
+          <p:nvPr/>
+        </p:nvSpPr>
+        <p:spPr>
+          <a:xfrm>
+            <a:off x="457200" y="3931920"/>
+            <a:ext cx="2560320" cy="237744"/>
+          </a:xfrm>
+          <a:prstGeom prst="rect">
+            <a:avLst/>
+          </a:prstGeom>
+          <a:noFill/>
+          <a:ln/>
+        </p:spPr>
+        <p:txBody>
+          <a:bodyPr wrap="square" lIns="0" tIns="0" rIns="0" bIns="0" rtlCol="0" anchor="t"/>
+          <a:lstStyle/>
+          <a:p>
+            <a:pPr indent="0" marL="0">
+              <a:buNone/>
+            </a:pPr>
+            <a:r>
+              <a:rPr lang="en-US" sz="700" dirty="0">
+                <a:solidFill>
+                  <a:srgbClr val="333333"/>
+                </a:solidFill>
+                <a:latin typeface="Arial" pitchFamily="34" charset="0"/>
+                <a:ea typeface="Arial" pitchFamily="34" charset="-122"/>
+                <a:cs typeface="Arial" pitchFamily="34" charset="-120"/>
+              </a:rPr>
+              <a:t>1 city · 50 chemists · 1 telemedicine partner</a:t>
+            </a:r>
+            <a:endParaRPr lang="en-US" sz="700" dirty="0"/>
+          </a:p>
+        </p:txBody>
+      </p:sp>
+      <p:sp>
+        <p:nvSpPr>
+          <p:cNvPr id="23" name="Text 20"/>
+          <p:cNvSpPr txBox="1"/>
+          <p:nvPr/>
+        </p:nvSpPr>
+        <p:spPr>
+          <a:xfrm>
+            <a:off x="457200" y="4187952"/>
+            <a:ext cx="2560320" cy="219456"/>
+          </a:xfrm>
+          <a:prstGeom prst="rect">
+            <a:avLst/>
+          </a:prstGeom>
+          <a:noFill/>
+          <a:ln/>
+        </p:spPr>
+        <p:txBody>
+          <a:bodyPr wrap="square" lIns="0" tIns="0" rIns="0" bIns="0" rtlCol="0" anchor="t"/>
+          <a:lstStyle/>
+          <a:p>
+            <a:pPr indent="0" marL="0">
+              <a:buNone/>
+            </a:pPr>
+            <a:r>
+              <a:rPr lang="en-US" sz="740" b="1" dirty="0">
+                <a:solidFill>
+                  <a:srgbClr val="1B1B1B"/>
+                </a:solidFill>
+                <a:latin typeface="Arial" pitchFamily="34" charset="0"/>
+                <a:ea typeface="Arial" pitchFamily="34" charset="-122"/>
+                <a:cs typeface="Arial" pitchFamily="34" charset="-120"/>
+              </a:rPr>
+              <a:t>₹3–5 lakh revenue · CSR grant ₹10 lakh</a:t>
+            </a:r>
+            <a:endParaRPr lang="en-US" sz="740" dirty="0"/>
+          </a:p>
+        </p:txBody>
+      </p:sp>
+      <p:sp>
+        <p:nvSpPr>
+          <p:cNvPr id="24" name="Text 21"/>
+          <p:cNvSpPr txBox="1"/>
+          <p:nvPr/>
+        </p:nvSpPr>
+        <p:spPr>
+          <a:xfrm>
+            <a:off x="457200" y="4425696"/>
+            <a:ext cx="2560320" cy="274320"/>
+          </a:xfrm>
+          <a:prstGeom prst="rect">
+            <a:avLst/>
+          </a:prstGeom>
+          <a:noFill/>
+          <a:ln/>
+        </p:spPr>
+        <p:txBody>
+          <a:bodyPr wrap="square" lIns="0" tIns="0" rIns="0" bIns="0" rtlCol="0" anchor="t"/>
+          <a:lstStyle/>
+          <a:p>
+            <a:pPr indent="0" marL="0">
+              <a:buNone/>
+            </a:pPr>
+            <a:r>
+              <a:rPr lang="en-US" sz="680" i="1" dirty="0">
+                <a:solidFill>
+                  <a:srgbClr val="5D6166"/>
+                </a:solidFill>
+                <a:latin typeface="Arial" pitchFamily="34" charset="0"/>
+                <a:ea typeface="Arial" pitchFamily="34" charset="-122"/>
+                <a:cs typeface="Arial" pitchFamily="34" charset="-120"/>
+              </a:rPr>
+              <a:t>Prove counter adoption and ADR flow</a:t>
+            </a:r>
+            <a:endParaRPr lang="en-US" sz="680" dirty="0"/>
+          </a:p>
+        </p:txBody>
+      </p:sp>
+      <p:sp>
+        <p:nvSpPr>
+          <p:cNvPr id="25" name="Shape 22"/>
           <p:cNvSpPr/>
           <p:nvPr/>
         </p:nvSpPr>
         <p:spPr>
           <a:xfrm>
-            <a:off x="4864608" y="1207008"/>
-            <a:ext cx="731520" cy="310896"/>
+            <a:off x="3246120" y="3675888"/>
+            <a:ext cx="2743200" cy="1051560"/>
           </a:xfrm>
           <a:prstGeom prst="roundRect">
             <a:avLst>
-              <a:gd name="adj" fmla="val 14706"/>
-            </a:avLst>
-          </a:prstGeom>
-          <a:solidFill>
-            <a:srgbClr val="8B2A2A"/>
-          </a:solidFill>
-          <a:ln w="9525">
-            <a:solidFill>
-              <a:srgbClr val="8B2A2A"/>
-            </a:solidFill>
-            <a:prstDash val="solid"/>
-          </a:ln>
-        </p:spPr>
-      </p:sp>
-      <p:sp>
-        <p:nvSpPr>
-          <p:cNvPr id="18" name="Text 16"/>
-          <p:cNvSpPr txBox="1"/>
-          <p:nvPr/>
-        </p:nvSpPr>
-        <p:spPr>
-          <a:xfrm>
-            <a:off x="4864608" y="1207008"/>
-            <a:ext cx="731520" cy="310896"/>
-          </a:xfrm>
-          <a:prstGeom prst="rect">
-            <a:avLst/>
-          </a:prstGeom>
-          <a:noFill/>
-          <a:ln/>
-        </p:spPr>
-        <p:txBody>
-          <a:bodyPr wrap="square" lIns="0" tIns="0" rIns="0" bIns="0" rtlCol="0" anchor="ctr"/>
-          <a:lstStyle/>
-          <a:p>
-            <a:pPr algn="ctr" indent="0" marL="0">
-              <a:buNone/>
-            </a:pPr>
-            <a:r>
-              <a:rPr lang="en-US" sz="850" b="1" dirty="0">
-                <a:solidFill>
-                  <a:srgbClr val="FFFFFF"/>
-                </a:solidFill>
-                <a:latin typeface="Arial" pitchFamily="34" charset="0"/>
-                <a:ea typeface="Arial" pitchFamily="34" charset="-122"/>
-                <a:cs typeface="Arial" pitchFamily="34" charset="-120"/>
-              </a:rPr>
-              <a:t>0–3 h</a:t>
-            </a:r>
-            <a:endParaRPr lang="en-US" sz="850" dirty="0"/>
-          </a:p>
-        </p:txBody>
-      </p:sp>
-      <p:sp>
-        <p:nvSpPr>
-          <p:cNvPr id="19" name="Text 17"/>
-          <p:cNvSpPr txBox="1"/>
-          <p:nvPr/>
-        </p:nvSpPr>
-        <p:spPr>
-          <a:xfrm>
-            <a:off x="5687568" y="1152144"/>
-            <a:ext cx="3017520" cy="438912"/>
-          </a:xfrm>
-          <a:prstGeom prst="rect">
-            <a:avLst/>
-          </a:prstGeom>
-          <a:noFill/>
-          <a:ln/>
-        </p:spPr>
-        <p:txBody>
-          <a:bodyPr wrap="square" lIns="0" tIns="0" rIns="0" bIns="0" rtlCol="0" anchor="ctr"/>
-          <a:lstStyle/>
-          <a:p>
-            <a:pPr indent="0" marL="0">
-              <a:buNone/>
-            </a:pPr>
-            <a:r>
-              <a:rPr lang="en-US" sz="780" dirty="0">
-                <a:solidFill>
-                  <a:srgbClr val="333333"/>
-                </a:solidFill>
-                <a:latin typeface="Arial" pitchFamily="34" charset="0"/>
-                <a:ea typeface="Arial" pitchFamily="34" charset="-122"/>
-                <a:cs typeface="Arial" pitchFamily="34" charset="-120"/>
-              </a:rPr>
-              <a:t>Set up at venue; load KB; core loop photo → OCR → confirm → verdict green.</a:t>
-            </a:r>
-            <a:endParaRPr lang="en-US" sz="780" dirty="0"/>
-          </a:p>
-        </p:txBody>
-      </p:sp>
-      <p:sp>
-        <p:nvSpPr>
-          <p:cNvPr id="20" name="Shape 18"/>
-          <p:cNvSpPr/>
-          <p:nvPr/>
-        </p:nvSpPr>
-        <p:spPr>
-          <a:xfrm>
-            <a:off x="4800600" y="1700784"/>
-            <a:ext cx="3977640" cy="530352"/>
-          </a:xfrm>
-          <a:prstGeom prst="roundRect">
-            <a:avLst>
-              <a:gd name="adj" fmla="val 8621"/>
+              <a:gd name="adj" fmla="val 4348"/>
             </a:avLst>
           </a:prstGeom>
           <a:solidFill>
@@ -22566,123 +25897,174 @@
       </p:sp>
       <p:sp>
         <p:nvSpPr>
-          <p:cNvPr id="21" name="Shape 19"/>
+          <p:cNvPr id="26" name="Text 23"/>
+          <p:cNvSpPr txBox="1"/>
+          <p:nvPr/>
+        </p:nvSpPr>
+        <p:spPr>
+          <a:xfrm>
+            <a:off x="3337560" y="3712464"/>
+            <a:ext cx="2560320" cy="201168"/>
+          </a:xfrm>
+          <a:prstGeom prst="rect">
+            <a:avLst/>
+          </a:prstGeom>
+          <a:noFill/>
+          <a:ln/>
+        </p:spPr>
+        <p:txBody>
+          <a:bodyPr wrap="square" lIns="0" tIns="0" rIns="0" bIns="0" rtlCol="0" anchor="t"/>
+          <a:lstStyle/>
+          <a:p>
+            <a:pPr indent="0" marL="0">
+              <a:buNone/>
+            </a:pPr>
+            <a:r>
+              <a:rPr lang="en-US" sz="850" b="1" dirty="0">
+                <a:solidFill>
+                  <a:srgbClr val="8B2A2A"/>
+                </a:solidFill>
+                <a:latin typeface="Arial" pitchFamily="34" charset="0"/>
+                <a:ea typeface="Arial" pitchFamily="34" charset="-122"/>
+                <a:cs typeface="Arial" pitchFamily="34" charset="-120"/>
+              </a:rPr>
+              <a:t>Year 2 · scale</a:t>
+            </a:r>
+            <a:endParaRPr lang="en-US" sz="850" dirty="0"/>
+          </a:p>
+        </p:txBody>
+      </p:sp>
+      <p:sp>
+        <p:nvSpPr>
+          <p:cNvPr id="27" name="Text 24"/>
+          <p:cNvSpPr txBox="1"/>
+          <p:nvPr/>
+        </p:nvSpPr>
+        <p:spPr>
+          <a:xfrm>
+            <a:off x="3337560" y="3931920"/>
+            <a:ext cx="2560320" cy="237744"/>
+          </a:xfrm>
+          <a:prstGeom prst="rect">
+            <a:avLst/>
+          </a:prstGeom>
+          <a:noFill/>
+          <a:ln/>
+        </p:spPr>
+        <p:txBody>
+          <a:bodyPr wrap="square" lIns="0" tIns="0" rIns="0" bIns="0" rtlCol="0" anchor="t"/>
+          <a:lstStyle/>
+          <a:p>
+            <a:pPr indent="0" marL="0">
+              <a:buNone/>
+            </a:pPr>
+            <a:r>
+              <a:rPr lang="en-US" sz="700" dirty="0">
+                <a:solidFill>
+                  <a:srgbClr val="333333"/>
+                </a:solidFill>
+                <a:latin typeface="Arial" pitchFamily="34" charset="0"/>
+                <a:ea typeface="Arial" pitchFamily="34" charset="-122"/>
+                <a:cs typeface="Arial" pitchFamily="34" charset="-120"/>
+              </a:rPr>
+              <a:t>3 states · 2,000 chemists · 3 HIS integrations</a:t>
+            </a:r>
+            <a:endParaRPr lang="en-US" sz="700" dirty="0"/>
+          </a:p>
+        </p:txBody>
+      </p:sp>
+      <p:sp>
+        <p:nvSpPr>
+          <p:cNvPr id="28" name="Text 25"/>
+          <p:cNvSpPr txBox="1"/>
+          <p:nvPr/>
+        </p:nvSpPr>
+        <p:spPr>
+          <a:xfrm>
+            <a:off x="3337560" y="4187952"/>
+            <a:ext cx="2560320" cy="219456"/>
+          </a:xfrm>
+          <a:prstGeom prst="rect">
+            <a:avLst/>
+          </a:prstGeom>
+          <a:noFill/>
+          <a:ln/>
+        </p:spPr>
+        <p:txBody>
+          <a:bodyPr wrap="square" lIns="0" tIns="0" rIns="0" bIns="0" rtlCol="0" anchor="t"/>
+          <a:lstStyle/>
+          <a:p>
+            <a:pPr indent="0" marL="0">
+              <a:buNone/>
+            </a:pPr>
+            <a:r>
+              <a:rPr lang="en-US" sz="740" b="1" dirty="0">
+                <a:solidFill>
+                  <a:srgbClr val="1B1B1B"/>
+                </a:solidFill>
+                <a:latin typeface="Arial" pitchFamily="34" charset="0"/>
+                <a:ea typeface="Arial" pitchFamily="34" charset="-122"/>
+                <a:cs typeface="Arial" pitchFamily="34" charset="-120"/>
+              </a:rPr>
+              <a:t>₹1.2–1.5 crore ARR</a:t>
+            </a:r>
+            <a:endParaRPr lang="en-US" sz="740" dirty="0"/>
+          </a:p>
+        </p:txBody>
+      </p:sp>
+      <p:sp>
+        <p:nvSpPr>
+          <p:cNvPr id="29" name="Text 26"/>
+          <p:cNvSpPr txBox="1"/>
+          <p:nvPr/>
+        </p:nvSpPr>
+        <p:spPr>
+          <a:xfrm>
+            <a:off x="3337560" y="4425696"/>
+            <a:ext cx="2560320" cy="274320"/>
+          </a:xfrm>
+          <a:prstGeom prst="rect">
+            <a:avLst/>
+          </a:prstGeom>
+          <a:noFill/>
+          <a:ln/>
+        </p:spPr>
+        <p:txBody>
+          <a:bodyPr wrap="square" lIns="0" tIns="0" rIns="0" bIns="0" rtlCol="0" anchor="t"/>
+          <a:lstStyle/>
+          <a:p>
+            <a:pPr indent="0" marL="0">
+              <a:buNone/>
+            </a:pPr>
+            <a:r>
+              <a:rPr lang="en-US" sz="680" i="1" dirty="0">
+                <a:solidFill>
+                  <a:srgbClr val="5D6166"/>
+                </a:solidFill>
+                <a:latin typeface="Arial" pitchFamily="34" charset="0"/>
+                <a:ea typeface="Arial" pitchFamily="34" charset="-122"/>
+                <a:cs typeface="Arial" pitchFamily="34" charset="-120"/>
+              </a:rPr>
+              <a:t>Knowledge base 300+ rows reviewed by a college</a:t>
+            </a:r>
+            <a:endParaRPr lang="en-US" sz="680" dirty="0"/>
+          </a:p>
+        </p:txBody>
+      </p:sp>
+      <p:sp>
+        <p:nvSpPr>
+          <p:cNvPr id="30" name="Shape 27"/>
           <p:cNvSpPr/>
           <p:nvPr/>
         </p:nvSpPr>
         <p:spPr>
           <a:xfrm>
-            <a:off x="4864608" y="1810512"/>
-            <a:ext cx="731520" cy="310896"/>
+            <a:off x="6126480" y="3675888"/>
+            <a:ext cx="2743200" cy="1051560"/>
           </a:xfrm>
           <a:prstGeom prst="roundRect">
             <a:avLst>
-              <a:gd name="adj" fmla="val 14706"/>
-            </a:avLst>
-          </a:prstGeom>
-          <a:solidFill>
-            <a:srgbClr val="6D28D9"/>
-          </a:solidFill>
-          <a:ln w="9525">
-            <a:solidFill>
-              <a:srgbClr val="6D28D9"/>
-            </a:solidFill>
-            <a:prstDash val="solid"/>
-          </a:ln>
-        </p:spPr>
-      </p:sp>
-      <p:sp>
-        <p:nvSpPr>
-          <p:cNvPr id="22" name="Text 20"/>
-          <p:cNvSpPr txBox="1"/>
-          <p:nvPr/>
-        </p:nvSpPr>
-        <p:spPr>
-          <a:xfrm>
-            <a:off x="4864608" y="1810512"/>
-            <a:ext cx="731520" cy="310896"/>
-          </a:xfrm>
-          <a:prstGeom prst="rect">
-            <a:avLst/>
-          </a:prstGeom>
-          <a:noFill/>
-          <a:ln/>
-        </p:spPr>
-        <p:txBody>
-          <a:bodyPr wrap="square" lIns="0" tIns="0" rIns="0" bIns="0" rtlCol="0" anchor="ctr"/>
-          <a:lstStyle/>
-          <a:p>
-            <a:pPr algn="ctr" indent="0" marL="0">
-              <a:buNone/>
-            </a:pPr>
-            <a:r>
-              <a:rPr lang="en-US" sz="850" b="1" dirty="0">
-                <a:solidFill>
-                  <a:srgbClr val="FFFFFF"/>
-                </a:solidFill>
-                <a:latin typeface="Arial" pitchFamily="34" charset="0"/>
-                <a:ea typeface="Arial" pitchFamily="34" charset="-122"/>
-                <a:cs typeface="Arial" pitchFamily="34" charset="-120"/>
-              </a:rPr>
-              <a:t>3–9 h</a:t>
-            </a:r>
-            <a:endParaRPr lang="en-US" sz="850" dirty="0"/>
-          </a:p>
-        </p:txBody>
-      </p:sp>
-      <p:sp>
-        <p:nvSpPr>
-          <p:cNvPr id="23" name="Text 21"/>
-          <p:cNvSpPr txBox="1"/>
-          <p:nvPr/>
-        </p:nvSpPr>
-        <p:spPr>
-          <a:xfrm>
-            <a:off x="5687568" y="1755648"/>
-            <a:ext cx="3017520" cy="438912"/>
-          </a:xfrm>
-          <a:prstGeom prst="rect">
-            <a:avLst/>
-          </a:prstGeom>
-          <a:noFill/>
-          <a:ln/>
-        </p:spPr>
-        <p:txBody>
-          <a:bodyPr wrap="square" lIns="0" tIns="0" rIns="0" bIns="0" rtlCol="0" anchor="ctr"/>
-          <a:lstStyle/>
-          <a:p>
-            <a:pPr indent="0" marL="0">
-              <a:buNone/>
-            </a:pPr>
-            <a:r>
-              <a:rPr lang="en-US" sz="780" dirty="0">
-                <a:solidFill>
-                  <a:srgbClr val="333333"/>
-                </a:solidFill>
-                <a:latin typeface="Arial" pitchFamily="34" charset="0"/>
-                <a:ea typeface="Arial" pitchFamily="34" charset="-122"/>
-                <a:cs typeface="Arial" pitchFamily="34" charset="-120"/>
-              </a:rPr>
-              <a:t>TinyFish verifier over all 78 citations; reviewer pass on mismatches.</a:t>
-            </a:r>
-            <a:endParaRPr lang="en-US" sz="780" dirty="0"/>
-          </a:p>
-        </p:txBody>
-      </p:sp>
-      <p:sp>
-        <p:nvSpPr>
-          <p:cNvPr id="24" name="Shape 22"/>
-          <p:cNvSpPr/>
-          <p:nvPr/>
-        </p:nvSpPr>
-        <p:spPr>
-          <a:xfrm>
-            <a:off x="4800600" y="2304288"/>
-            <a:ext cx="3977640" cy="530352"/>
-          </a:xfrm>
-          <a:prstGeom prst="roundRect">
-            <a:avLst>
-              <a:gd name="adj" fmla="val 8621"/>
+              <a:gd name="adj" fmla="val 4348"/>
             </a:avLst>
           </a:prstGeom>
           <a:solidFill>
@@ -22698,65 +26080,38 @@
       </p:sp>
       <p:sp>
         <p:nvSpPr>
-          <p:cNvPr id="25" name="Shape 23"/>
-          <p:cNvSpPr/>
-          <p:nvPr/>
-        </p:nvSpPr>
-        <p:spPr>
-          <a:xfrm>
-            <a:off x="4864608" y="2414016"/>
-            <a:ext cx="731520" cy="310896"/>
-          </a:xfrm>
-          <a:prstGeom prst="roundRect">
-            <a:avLst>
-              <a:gd name="adj" fmla="val 14706"/>
-            </a:avLst>
-          </a:prstGeom>
-          <a:solidFill>
-            <a:srgbClr val="6D28D9"/>
-          </a:solidFill>
-          <a:ln w="9525">
-            <a:solidFill>
-              <a:srgbClr val="6D28D9"/>
-            </a:solidFill>
-            <a:prstDash val="solid"/>
-          </a:ln>
-        </p:spPr>
-      </p:sp>
-      <p:sp>
-        <p:nvSpPr>
-          <p:cNvPr id="26" name="Text 24"/>
-          <p:cNvSpPr txBox="1"/>
-          <p:nvPr/>
-        </p:nvSpPr>
-        <p:spPr>
-          <a:xfrm>
-            <a:off x="4864608" y="2414016"/>
-            <a:ext cx="731520" cy="310896"/>
-          </a:xfrm>
-          <a:prstGeom prst="rect">
-            <a:avLst/>
-          </a:prstGeom>
-          <a:noFill/>
-          <a:ln/>
-        </p:spPr>
-        <p:txBody>
-          <a:bodyPr wrap="square" lIns="0" tIns="0" rIns="0" bIns="0" rtlCol="0" anchor="ctr"/>
-          <a:lstStyle/>
-          <a:p>
-            <a:pPr algn="ctr" indent="0" marL="0">
+          <p:cNvPr id="31" name="Text 28"/>
+          <p:cNvSpPr txBox="1"/>
+          <p:nvPr/>
+        </p:nvSpPr>
+        <p:spPr>
+          <a:xfrm>
+            <a:off x="6217920" y="3712464"/>
+            <a:ext cx="2560320" cy="201168"/>
+          </a:xfrm>
+          <a:prstGeom prst="rect">
+            <a:avLst/>
+          </a:prstGeom>
+          <a:noFill/>
+          <a:ln/>
+        </p:spPr>
+        <p:txBody>
+          <a:bodyPr wrap="square" lIns="0" tIns="0" rIns="0" bIns="0" rtlCol="0" anchor="t"/>
+          <a:lstStyle/>
+          <a:p>
+            <a:pPr indent="0" marL="0">
               <a:buNone/>
             </a:pPr>
             <a:r>
               <a:rPr lang="en-US" sz="850" b="1" dirty="0">
                 <a:solidFill>
-                  <a:srgbClr val="FFFFFF"/>
-                </a:solidFill>
-                <a:latin typeface="Arial" pitchFamily="34" charset="0"/>
-                <a:ea typeface="Arial" pitchFamily="34" charset="-122"/>
-                <a:cs typeface="Arial" pitchFamily="34" charset="-120"/>
-              </a:rPr>
-              <a:t>9–15 h</a:t>
+                  <a:srgbClr val="8B2A2A"/>
+                </a:solidFill>
+                <a:latin typeface="Arial" pitchFamily="34" charset="0"/>
+                <a:ea typeface="Arial" pitchFamily="34" charset="-122"/>
+                <a:cs typeface="Arial" pitchFamily="34" charset="-120"/>
+              </a:rPr>
+              <a:t>Year 3 · platform</a:t>
             </a:r>
             <a:endParaRPr lang="en-US" sz="850" dirty="0"/>
           </a:p>
@@ -22764,30 +26119,30 @@
       </p:sp>
       <p:sp>
         <p:nvSpPr>
-          <p:cNvPr id="27" name="Text 25"/>
-          <p:cNvSpPr txBox="1"/>
-          <p:nvPr/>
-        </p:nvSpPr>
-        <p:spPr>
-          <a:xfrm>
-            <a:off x="5687568" y="2359152"/>
-            <a:ext cx="3017520" cy="438912"/>
-          </a:xfrm>
-          <a:prstGeom prst="rect">
-            <a:avLst/>
-          </a:prstGeom>
-          <a:noFill/>
-          <a:ln/>
-        </p:spPr>
-        <p:txBody>
-          <a:bodyPr wrap="square" lIns="0" tIns="0" rIns="0" bIns="0" rtlCol="0" anchor="ctr"/>
+          <p:cNvPr id="32" name="Text 29"/>
+          <p:cNvSpPr txBox="1"/>
+          <p:nvPr/>
+        </p:nvSpPr>
+        <p:spPr>
+          <a:xfrm>
+            <a:off x="6217920" y="3931920"/>
+            <a:ext cx="2560320" cy="237744"/>
+          </a:xfrm>
+          <a:prstGeom prst="rect">
+            <a:avLst/>
+          </a:prstGeom>
+          <a:noFill/>
+          <a:ln/>
+        </p:spPr>
+        <p:txBody>
+          <a:bodyPr wrap="square" lIns="0" tIns="0" rIns="0" bIns="0" rtlCol="0" anchor="t"/>
           <a:lstStyle/>
           <a:p>
             <a:pPr indent="0" marL="0">
               <a:buNone/>
             </a:pPr>
             <a:r>
-              <a:rPr lang="en-US" sz="780" dirty="0">
+              <a:rPr lang="en-US" sz="700" dirty="0">
                 <a:solidFill>
                   <a:srgbClr val="333333"/>
                 </a:solidFill>
@@ -22795,405 +26150,87 @@
                 <a:ea typeface="Arial" pitchFamily="34" charset="-122"/>
                 <a:cs typeface="Arial" pitchFamily="34" charset="-120"/>
               </a:rPr>
-              <a:t>Agent discovery for 16 herbs → draft rows → review → 100+ rows.</a:t>
-            </a:r>
-            <a:endParaRPr lang="en-US" sz="780" dirty="0"/>
-          </a:p>
-        </p:txBody>
-      </p:sp>
-      <p:sp>
-        <p:nvSpPr>
-          <p:cNvPr id="28" name="Shape 26"/>
-          <p:cNvSpPr/>
-          <p:nvPr/>
-        </p:nvSpPr>
-        <p:spPr>
-          <a:xfrm>
-            <a:off x="4800600" y="2907792"/>
-            <a:ext cx="3977640" cy="530352"/>
-          </a:xfrm>
-          <a:prstGeom prst="roundRect">
-            <a:avLst>
-              <a:gd name="adj" fmla="val 8621"/>
-            </a:avLst>
-          </a:prstGeom>
-          <a:solidFill>
-            <a:srgbClr val="F6F3F3"/>
-          </a:solidFill>
-          <a:ln w="9525">
-            <a:solidFill>
-              <a:srgbClr val="D9CFCF"/>
-            </a:solidFill>
-            <a:prstDash val="solid"/>
-          </a:ln>
-        </p:spPr>
-      </p:sp>
-      <p:sp>
-        <p:nvSpPr>
-          <p:cNvPr id="29" name="Shape 27"/>
-          <p:cNvSpPr/>
-          <p:nvPr/>
-        </p:nvSpPr>
-        <p:spPr>
-          <a:xfrm>
-            <a:off x="4864608" y="3017520"/>
-            <a:ext cx="731520" cy="310896"/>
-          </a:xfrm>
-          <a:prstGeom prst="roundRect">
-            <a:avLst>
-              <a:gd name="adj" fmla="val 14706"/>
-            </a:avLst>
-          </a:prstGeom>
-          <a:solidFill>
-            <a:srgbClr val="6D28D9"/>
-          </a:solidFill>
-          <a:ln w="9525">
-            <a:solidFill>
-              <a:srgbClr val="6D28D9"/>
-            </a:solidFill>
-            <a:prstDash val="solid"/>
-          </a:ln>
-        </p:spPr>
-      </p:sp>
-      <p:sp>
-        <p:nvSpPr>
-          <p:cNvPr id="30" name="Text 28"/>
-          <p:cNvSpPr txBox="1"/>
-          <p:nvPr/>
-        </p:nvSpPr>
-        <p:spPr>
-          <a:xfrm>
-            <a:off x="4864608" y="3017520"/>
-            <a:ext cx="731520" cy="310896"/>
-          </a:xfrm>
-          <a:prstGeom prst="rect">
-            <a:avLst/>
-          </a:prstGeom>
-          <a:noFill/>
-          <a:ln/>
-        </p:spPr>
-        <p:txBody>
-          <a:bodyPr wrap="square" lIns="0" tIns="0" rIns="0" bIns="0" rtlCol="0" anchor="ctr"/>
-          <a:lstStyle/>
-          <a:p>
-            <a:pPr algn="ctr" indent="0" marL="0">
-              <a:buNone/>
-            </a:pPr>
-            <a:r>
-              <a:rPr lang="en-US" sz="850" b="1" dirty="0">
-                <a:solidFill>
-                  <a:srgbClr val="FFFFFF"/>
-                </a:solidFill>
-                <a:latin typeface="Arial" pitchFamily="34" charset="0"/>
-                <a:ea typeface="Arial" pitchFamily="34" charset="-122"/>
-                <a:cs typeface="Arial" pitchFamily="34" charset="-120"/>
-              </a:rPr>
-              <a:t>15–19 h</a:t>
-            </a:r>
-            <a:endParaRPr lang="en-US" sz="850" dirty="0"/>
-          </a:p>
-        </p:txBody>
-      </p:sp>
-      <p:sp>
-        <p:nvSpPr>
-          <p:cNvPr id="31" name="Text 29"/>
-          <p:cNvSpPr txBox="1"/>
-          <p:nvPr/>
-        </p:nvSpPr>
-        <p:spPr>
-          <a:xfrm>
-            <a:off x="5687568" y="2962656"/>
-            <a:ext cx="3017520" cy="438912"/>
-          </a:xfrm>
-          <a:prstGeom prst="rect">
-            <a:avLst/>
-          </a:prstGeom>
-          <a:noFill/>
-          <a:ln/>
-        </p:spPr>
-        <p:txBody>
-          <a:bodyPr wrap="square" lIns="0" tIns="0" rIns="0" bIns="0" rtlCol="0" anchor="ctr"/>
+              <a:t>ABDM / Ayush Grid integration · pharmacy chains</a:t>
+            </a:r>
+            <a:endParaRPr lang="en-US" sz="700" dirty="0"/>
+          </a:p>
+        </p:txBody>
+      </p:sp>
+      <p:sp>
+        <p:nvSpPr>
+          <p:cNvPr id="33" name="Text 30"/>
+          <p:cNvSpPr txBox="1"/>
+          <p:nvPr/>
+        </p:nvSpPr>
+        <p:spPr>
+          <a:xfrm>
+            <a:off x="6217920" y="4187952"/>
+            <a:ext cx="2560320" cy="219456"/>
+          </a:xfrm>
+          <a:prstGeom prst="rect">
+            <a:avLst/>
+          </a:prstGeom>
+          <a:noFill/>
+          <a:ln/>
+        </p:spPr>
+        <p:txBody>
+          <a:bodyPr wrap="square" lIns="0" tIns="0" rIns="0" bIns="0" rtlCol="0" anchor="t"/>
           <a:lstStyle/>
           <a:p>
             <a:pPr indent="0" marL="0">
               <a:buNone/>
             </a:pPr>
             <a:r>
-              <a:rPr lang="en-US" sz="780" dirty="0">
-                <a:solidFill>
-                  <a:srgbClr val="333333"/>
-                </a:solidFill>
-                <a:latin typeface="Arial" pitchFamily="34" charset="0"/>
-                <a:ea typeface="Arial" pitchFamily="34" charset="-122"/>
-                <a:cs typeface="Arial" pitchFamily="34" charset="-120"/>
-              </a:rPr>
-              <a:t>Product mapping for top 30 Indian products; Hindi in every PDF.</a:t>
-            </a:r>
-            <a:endParaRPr lang="en-US" sz="780" dirty="0"/>
-          </a:p>
-        </p:txBody>
-      </p:sp>
-      <p:sp>
-        <p:nvSpPr>
-          <p:cNvPr id="32" name="Shape 30"/>
-          <p:cNvSpPr/>
-          <p:nvPr/>
-        </p:nvSpPr>
-        <p:spPr>
-          <a:xfrm>
-            <a:off x="4800600" y="3511296"/>
-            <a:ext cx="3977640" cy="530352"/>
-          </a:xfrm>
-          <a:prstGeom prst="roundRect">
-            <a:avLst>
-              <a:gd name="adj" fmla="val 8621"/>
-            </a:avLst>
-          </a:prstGeom>
-          <a:solidFill>
-            <a:srgbClr val="F6F3F3"/>
-          </a:solidFill>
-          <a:ln w="9525">
-            <a:solidFill>
-              <a:srgbClr val="D9CFCF"/>
-            </a:solidFill>
-            <a:prstDash val="solid"/>
-          </a:ln>
-        </p:spPr>
-      </p:sp>
-      <p:sp>
-        <p:nvSpPr>
-          <p:cNvPr id="33" name="Shape 31"/>
-          <p:cNvSpPr/>
-          <p:nvPr/>
-        </p:nvSpPr>
-        <p:spPr>
-          <a:xfrm>
-            <a:off x="4864608" y="3621024"/>
-            <a:ext cx="731520" cy="310896"/>
-          </a:xfrm>
-          <a:prstGeom prst="roundRect">
-            <a:avLst>
-              <a:gd name="adj" fmla="val 14706"/>
-            </a:avLst>
-          </a:prstGeom>
-          <a:solidFill>
-            <a:srgbClr val="8B2A2A"/>
-          </a:solidFill>
-          <a:ln w="9525">
-            <a:solidFill>
-              <a:srgbClr val="8B2A2A"/>
-            </a:solidFill>
-            <a:prstDash val="solid"/>
-          </a:ln>
-        </p:spPr>
-      </p:sp>
-      <p:sp>
-        <p:nvSpPr>
-          <p:cNvPr id="34" name="Text 32"/>
-          <p:cNvSpPr txBox="1"/>
-          <p:nvPr/>
-        </p:nvSpPr>
-        <p:spPr>
-          <a:xfrm>
-            <a:off x="4864608" y="3621024"/>
-            <a:ext cx="731520" cy="310896"/>
-          </a:xfrm>
-          <a:prstGeom prst="rect">
-            <a:avLst/>
-          </a:prstGeom>
-          <a:noFill/>
-          <a:ln/>
-        </p:spPr>
-        <p:txBody>
-          <a:bodyPr wrap="square" lIns="0" tIns="0" rIns="0" bIns="0" rtlCol="0" anchor="ctr"/>
-          <a:lstStyle/>
-          <a:p>
-            <a:pPr algn="ctr" indent="0" marL="0">
-              <a:buNone/>
-            </a:pPr>
-            <a:r>
-              <a:rPr lang="en-US" sz="850" b="1" dirty="0">
-                <a:solidFill>
-                  <a:srgbClr val="FFFFFF"/>
-                </a:solidFill>
-                <a:latin typeface="Arial" pitchFamily="34" charset="0"/>
-                <a:ea typeface="Arial" pitchFamily="34" charset="-122"/>
-                <a:cs typeface="Arial" pitchFamily="34" charset="-120"/>
-              </a:rPr>
-              <a:t>19–22 h</a:t>
-            </a:r>
-            <a:endParaRPr lang="en-US" sz="850" dirty="0"/>
-          </a:p>
-        </p:txBody>
-      </p:sp>
-      <p:sp>
-        <p:nvSpPr>
-          <p:cNvPr id="35" name="Text 33"/>
-          <p:cNvSpPr txBox="1"/>
-          <p:nvPr/>
-        </p:nvSpPr>
-        <p:spPr>
-          <a:xfrm>
-            <a:off x="5687568" y="3566160"/>
-            <a:ext cx="3017520" cy="438912"/>
-          </a:xfrm>
-          <a:prstGeom prst="rect">
-            <a:avLst/>
-          </a:prstGeom>
-          <a:noFill/>
-          <a:ln/>
-        </p:spPr>
-        <p:txBody>
-          <a:bodyPr wrap="square" lIns="0" tIns="0" rIns="0" bIns="0" rtlCol="0" anchor="ctr"/>
+              <a:rPr lang="en-US" sz="740" b="1" dirty="0">
+                <a:solidFill>
+                  <a:srgbClr val="1B1B1B"/>
+                </a:solidFill>
+                <a:latin typeface="Arial" pitchFamily="34" charset="0"/>
+                <a:ea typeface="Arial" pitchFamily="34" charset="-122"/>
+                <a:cs typeface="Arial" pitchFamily="34" charset="-120"/>
+              </a:rPr>
+              <a:t>₹5+ crore ARR</a:t>
+            </a:r>
+            <a:endParaRPr lang="en-US" sz="740" dirty="0"/>
+          </a:p>
+        </p:txBody>
+      </p:sp>
+      <p:sp>
+        <p:nvSpPr>
+          <p:cNvPr id="34" name="Text 31"/>
+          <p:cNvSpPr txBox="1"/>
+          <p:nvPr/>
+        </p:nvSpPr>
+        <p:spPr>
+          <a:xfrm>
+            <a:off x="6217920" y="4425696"/>
+            <a:ext cx="2560320" cy="274320"/>
+          </a:xfrm>
+          <a:prstGeom prst="rect">
+            <a:avLst/>
+          </a:prstGeom>
+          <a:noFill/>
+          <a:ln/>
+        </p:spPr>
+        <p:txBody>
+          <a:bodyPr wrap="square" lIns="0" tIns="0" rIns="0" bIns="0" rtlCol="0" anchor="t"/>
           <a:lstStyle/>
           <a:p>
             <a:pPr indent="0" marL="0">
               <a:buNone/>
             </a:pPr>
             <a:r>
-              <a:rPr lang="en-US" sz="780" dirty="0">
-                <a:solidFill>
-                  <a:srgbClr val="333333"/>
-                </a:solidFill>
-                <a:latin typeface="Arial" pitchFamily="34" charset="0"/>
-                <a:ea typeface="Arial" pitchFamily="34" charset="-122"/>
-                <a:cs typeface="Arial" pitchFamily="34" charset="-120"/>
-              </a:rPr>
-              <a:t>Public deploy (Vercel + Render + Supabase); chemist QR flow.</a:t>
-            </a:r>
-            <a:endParaRPr lang="en-US" sz="780" dirty="0"/>
-          </a:p>
-        </p:txBody>
-      </p:sp>
-      <p:sp>
-        <p:nvSpPr>
-          <p:cNvPr id="36" name="Shape 34"/>
-          <p:cNvSpPr/>
-          <p:nvPr/>
-        </p:nvSpPr>
-        <p:spPr>
-          <a:xfrm>
-            <a:off x="4800600" y="4114800"/>
-            <a:ext cx="3977640" cy="530352"/>
-          </a:xfrm>
-          <a:prstGeom prst="roundRect">
-            <a:avLst>
-              <a:gd name="adj" fmla="val 8621"/>
-            </a:avLst>
-          </a:prstGeom>
-          <a:solidFill>
-            <a:srgbClr val="F6F3F3"/>
-          </a:solidFill>
-          <a:ln w="9525">
-            <a:solidFill>
-              <a:srgbClr val="D9CFCF"/>
-            </a:solidFill>
-            <a:prstDash val="solid"/>
-          </a:ln>
-        </p:spPr>
-      </p:sp>
-      <p:sp>
-        <p:nvSpPr>
-          <p:cNvPr id="37" name="Shape 35"/>
-          <p:cNvSpPr/>
-          <p:nvPr/>
-        </p:nvSpPr>
-        <p:spPr>
-          <a:xfrm>
-            <a:off x="4864608" y="4224528"/>
-            <a:ext cx="731520" cy="310896"/>
-          </a:xfrm>
-          <a:prstGeom prst="roundRect">
-            <a:avLst>
-              <a:gd name="adj" fmla="val 14706"/>
-            </a:avLst>
-          </a:prstGeom>
-          <a:solidFill>
-            <a:srgbClr val="8B2A2A"/>
-          </a:solidFill>
-          <a:ln w="9525">
-            <a:solidFill>
-              <a:srgbClr val="8B2A2A"/>
-            </a:solidFill>
-            <a:prstDash val="solid"/>
-          </a:ln>
-        </p:spPr>
-      </p:sp>
-      <p:sp>
-        <p:nvSpPr>
-          <p:cNvPr id="38" name="Text 36"/>
-          <p:cNvSpPr txBox="1"/>
-          <p:nvPr/>
-        </p:nvSpPr>
-        <p:spPr>
-          <a:xfrm>
-            <a:off x="4864608" y="4224528"/>
-            <a:ext cx="731520" cy="310896"/>
-          </a:xfrm>
-          <a:prstGeom prst="rect">
-            <a:avLst/>
-          </a:prstGeom>
-          <a:noFill/>
-          <a:ln/>
-        </p:spPr>
-        <p:txBody>
-          <a:bodyPr wrap="square" lIns="0" tIns="0" rIns="0" bIns="0" rtlCol="0" anchor="ctr"/>
-          <a:lstStyle/>
-          <a:p>
-            <a:pPr algn="ctr" indent="0" marL="0">
-              <a:buNone/>
-            </a:pPr>
-            <a:r>
-              <a:rPr lang="en-US" sz="850" b="1" dirty="0">
-                <a:solidFill>
-                  <a:srgbClr val="FFFFFF"/>
-                </a:solidFill>
-                <a:latin typeface="Arial" pitchFamily="34" charset="0"/>
-                <a:ea typeface="Arial" pitchFamily="34" charset="-122"/>
-                <a:cs typeface="Arial" pitchFamily="34" charset="-120"/>
-              </a:rPr>
-              <a:t>22–24 h</a:t>
-            </a:r>
-            <a:endParaRPr lang="en-US" sz="850" dirty="0"/>
-          </a:p>
-        </p:txBody>
-      </p:sp>
-      <p:sp>
-        <p:nvSpPr>
-          <p:cNvPr id="39" name="Text 37"/>
-          <p:cNvSpPr txBox="1"/>
-          <p:nvPr/>
-        </p:nvSpPr>
-        <p:spPr>
-          <a:xfrm>
-            <a:off x="5687568" y="4169664"/>
-            <a:ext cx="3017520" cy="438912"/>
-          </a:xfrm>
-          <a:prstGeom prst="rect">
-            <a:avLst/>
-          </a:prstGeom>
-          <a:noFill/>
-          <a:ln/>
-        </p:spPr>
-        <p:txBody>
-          <a:bodyPr wrap="square" lIns="0" tIns="0" rIns="0" bIns="0" rtlCol="0" anchor="ctr"/>
-          <a:lstStyle/>
-          <a:p>
-            <a:pPr indent="0" marL="0">
-              <a:buNone/>
-            </a:pPr>
-            <a:r>
-              <a:rPr lang="en-US" sz="780" dirty="0">
-                <a:solidFill>
-                  <a:srgbClr val="333333"/>
-                </a:solidFill>
-                <a:latin typeface="Arial" pitchFamily="34" charset="0"/>
-                <a:ea typeface="Arial" pitchFamily="34" charset="-122"/>
-                <a:cs typeface="Arial" pitchFamily="34" charset="-120"/>
-              </a:rPr>
-              <a:t>Freeze, run tests, rehearse the demo on the deployed link.</a:t>
-            </a:r>
-            <a:endParaRPr lang="en-US" sz="780" dirty="0"/>
+              <a:rPr lang="en-US" sz="680" i="1" dirty="0">
+                <a:solidFill>
+                  <a:srgbClr val="5D6166"/>
+                </a:solidFill>
+                <a:latin typeface="Arial" pitchFamily="34" charset="0"/>
+                <a:ea typeface="Arial" pitchFamily="34" charset="-122"/>
+                <a:cs typeface="Arial" pitchFamily="34" charset="-120"/>
+              </a:rPr>
+              <a:t>Verdict on the ABHA record; national co-use analytics</a:t>
+            </a:r>
+            <a:endParaRPr lang="en-US" sz="680" dirty="0"/>
           </a:p>
         </p:txBody>
       </p:sp>

--- a/docs/kritical/TakeSure_BugHunters_KriticalHacks2026.pptx
+++ b/docs/kritical/TakeSure_BugHunters_KriticalHacks2026.pptx
@@ -1962,8 +1962,8 @@
         </p:nvSpPr>
         <p:spPr>
           <a:xfrm>
-            <a:off x="365760" y="1143000"/>
-            <a:ext cx="1737360" cy="566928"/>
+            <a:off x="365760" y="1097280"/>
+            <a:ext cx="1737360" cy="512064"/>
           </a:xfrm>
           <a:prstGeom prst="rect">
             <a:avLst/>
@@ -2001,8 +2001,8 @@
         </p:nvSpPr>
         <p:spPr>
           <a:xfrm>
-            <a:off x="2148840" y="1143000"/>
-            <a:ext cx="6675120" cy="566928"/>
+            <a:off x="2148840" y="1097280"/>
+            <a:ext cx="6675120" cy="512064"/>
           </a:xfrm>
           <a:prstGeom prst="rect">
             <a:avLst/>
@@ -2060,8 +2060,8 @@
         </p:nvSpPr>
         <p:spPr>
           <a:xfrm>
-            <a:off x="365760" y="1801368"/>
-            <a:ext cx="1737360" cy="310896"/>
+            <a:off x="365760" y="1682496"/>
+            <a:ext cx="1737360" cy="274320"/>
           </a:xfrm>
           <a:prstGeom prst="rect">
             <a:avLst/>
@@ -2099,8 +2099,8 @@
         </p:nvSpPr>
         <p:spPr>
           <a:xfrm>
-            <a:off x="2148840" y="1801368"/>
-            <a:ext cx="6675120" cy="310896"/>
+            <a:off x="2148840" y="1682496"/>
+            <a:ext cx="6675120" cy="274320"/>
           </a:xfrm>
           <a:prstGeom prst="rect">
             <a:avLst/>
@@ -2141,8 +2141,8 @@
         </p:nvSpPr>
         <p:spPr>
           <a:xfrm>
-            <a:off x="365760" y="2203704"/>
-            <a:ext cx="1737360" cy="713232"/>
+            <a:off x="365760" y="2029968"/>
+            <a:ext cx="1737360" cy="658368"/>
           </a:xfrm>
           <a:prstGeom prst="rect">
             <a:avLst/>
@@ -2180,8 +2180,8 @@
         </p:nvSpPr>
         <p:spPr>
           <a:xfrm>
-            <a:off x="2148840" y="2203704"/>
-            <a:ext cx="6675120" cy="713232"/>
+            <a:off x="2148840" y="2029968"/>
+            <a:ext cx="6675120" cy="658368"/>
           </a:xfrm>
           <a:prstGeom prst="rect">
             <a:avLst/>
@@ -2313,8 +2313,8 @@
         </p:nvSpPr>
         <p:spPr>
           <a:xfrm>
-            <a:off x="365760" y="3008376"/>
-            <a:ext cx="1737360" cy="310896"/>
+            <a:off x="365760" y="2761488"/>
+            <a:ext cx="1737360" cy="274320"/>
           </a:xfrm>
           <a:prstGeom prst="rect">
             <a:avLst/>
@@ -2352,8 +2352,8 @@
         </p:nvSpPr>
         <p:spPr>
           <a:xfrm>
-            <a:off x="2148840" y="3008376"/>
-            <a:ext cx="6675120" cy="310896"/>
+            <a:off x="2148840" y="2761488"/>
+            <a:ext cx="6675120" cy="274320"/>
           </a:xfrm>
           <a:prstGeom prst="rect">
             <a:avLst/>
@@ -2394,8 +2394,8 @@
         </p:nvSpPr>
         <p:spPr>
           <a:xfrm>
-            <a:off x="365760" y="3410712"/>
-            <a:ext cx="1737360" cy="566928"/>
+            <a:off x="365760" y="3108960"/>
+            <a:ext cx="1737360" cy="512064"/>
           </a:xfrm>
           <a:prstGeom prst="rect">
             <a:avLst/>
@@ -2433,8 +2433,8 @@
         </p:nvSpPr>
         <p:spPr>
           <a:xfrm>
-            <a:off x="2148840" y="3410712"/>
-            <a:ext cx="6675120" cy="566928"/>
+            <a:off x="2148840" y="3108960"/>
+            <a:ext cx="6675120" cy="512064"/>
           </a:xfrm>
           <a:prstGeom prst="rect">
             <a:avLst/>
@@ -2492,8 +2492,8 @@
         </p:nvSpPr>
         <p:spPr>
           <a:xfrm>
-            <a:off x="365760" y="4069080"/>
-            <a:ext cx="1737360" cy="310896"/>
+            <a:off x="365760" y="3694176"/>
+            <a:ext cx="1737360" cy="274320"/>
           </a:xfrm>
           <a:prstGeom prst="rect">
             <a:avLst/>
@@ -2531,8 +2531,8 @@
         </p:nvSpPr>
         <p:spPr>
           <a:xfrm>
-            <a:off x="2148840" y="4069080"/>
-            <a:ext cx="6675120" cy="310896"/>
+            <a:off x="2148840" y="3694176"/>
+            <a:ext cx="6675120" cy="274320"/>
           </a:xfrm>
           <a:prstGeom prst="rect">
             <a:avLst/>
@@ -2568,6 +2568,135 @@
       <p:sp>
         <p:nvSpPr>
           <p:cNvPr id="20" name="Text 17"/>
+          <p:cNvSpPr txBox="1"/>
+          <p:nvPr/>
+        </p:nvSpPr>
+        <p:spPr>
+          <a:xfrm>
+            <a:off x="365760" y="4041648"/>
+            <a:ext cx="1737360" cy="274320"/>
+          </a:xfrm>
+          <a:prstGeom prst="rect">
+            <a:avLst/>
+          </a:prstGeom>
+          <a:noFill/>
+          <a:ln/>
+        </p:spPr>
+        <p:txBody>
+          <a:bodyPr wrap="square" lIns="0" tIns="0" rIns="0" bIns="0" rtlCol="0" anchor="t"/>
+          <a:lstStyle/>
+          <a:p>
+            <a:pPr indent="0" marL="0">
+              <a:buNone/>
+            </a:pPr>
+            <a:r>
+              <a:rPr lang="en-US" sz="1300" b="1" dirty="0">
+                <a:solidFill>
+                  <a:srgbClr val="000000"/>
+                </a:solidFill>
+                <a:latin typeface="Arial" pitchFamily="34" charset="0"/>
+                <a:ea typeface="Arial" pitchFamily="34" charset="-122"/>
+                <a:cs typeface="Arial" pitchFamily="34" charset="-120"/>
+              </a:rPr>
+              <a:t>Live link :</a:t>
+            </a:r>
+            <a:endParaRPr lang="en-US" sz="1300" dirty="0"/>
+          </a:p>
+        </p:txBody>
+      </p:sp>
+      <p:sp>
+        <p:nvSpPr>
+          <p:cNvPr id="21" name="Text 18"/>
+          <p:cNvSpPr txBox="1"/>
+          <p:nvPr/>
+        </p:nvSpPr>
+        <p:spPr>
+          <a:xfrm>
+            <a:off x="2148840" y="4041648"/>
+            <a:ext cx="6675120" cy="274320"/>
+          </a:xfrm>
+          <a:prstGeom prst="rect">
+            <a:avLst/>
+          </a:prstGeom>
+          <a:noFill/>
+          <a:ln/>
+        </p:spPr>
+        <p:txBody>
+          <a:bodyPr wrap="square" lIns="0" tIns="0" rIns="0" bIns="0" rtlCol="0" anchor="t"/>
+          <a:lstStyle/>
+          <a:p>
+            <a:pPr indent="0" marL="0">
+              <a:lnSpc>
+                <a:spcPct val="108000"/>
+              </a:lnSpc>
+              <a:buNone/>
+            </a:pPr>
+            <a:r>
+              <a:rPr lang="en-US" sz="1050" b="1" u="sng" dirty="0">
+                <a:solidFill>
+                  <a:srgbClr val="1155CC"/>
+                </a:solidFill>
+                <a:latin typeface="Arial" pitchFamily="34" charset="0"/>
+                <a:ea typeface="Arial" pitchFamily="34" charset="-122"/>
+                <a:cs typeface="Arial" pitchFamily="34" charset="-120"/>
+                <a:hlinkClick r:id="rId2" invalidUrl="" action="" tgtFrame="" tooltip="" history="1" highlightClick="0" endSnd="0">
+                  <a:extLst>
+                    <a:ext uri="{A12FA001-AC4F-418D-AE19-62706E023703}">
+                      <ahyp:hlinkClr xmlns:ahyp="http://schemas.microsoft.com/office/drawing/2018/hyperlinkcolor" val="tx"/>
+                    </a:ext>
+                  </a:extLst>
+                </a:hlinkClick>
+              </a:rPr>
+              <a:t>https://take-sure.vercel.app</a:t>
+            </a:r>
+            <a:pPr indent="0" marL="0">
+              <a:lnSpc>
+                <a:spcPct val="108000"/>
+              </a:lnSpc>
+              <a:buNone/>
+            </a:pPr>
+            <a:r>
+              <a:rPr lang="en-US" sz="1050" dirty="0">
+                <a:solidFill>
+                  <a:srgbClr val="333333"/>
+                </a:solidFill>
+                <a:latin typeface="Arial" pitchFamily="34" charset="0"/>
+                <a:ea typeface="Arial" pitchFamily="34" charset="-122"/>
+                <a:cs typeface="Arial" pitchFamily="34" charset="-120"/>
+              </a:rPr>
+              <a:t>   ·   GitHub: </a:t>
+            </a:r>
+            <a:pPr indent="0" marL="0">
+              <a:lnSpc>
+                <a:spcPct val="108000"/>
+              </a:lnSpc>
+              <a:buNone/>
+            </a:pPr>
+            <a:r>
+              <a:rPr lang="en-US" sz="1050" u="sng" dirty="0">
+                <a:solidFill>
+                  <a:srgbClr val="1155CC"/>
+                </a:solidFill>
+                <a:latin typeface="Arial" pitchFamily="34" charset="0"/>
+                <a:ea typeface="Arial" pitchFamily="34" charset="-122"/>
+                <a:cs typeface="Arial" pitchFamily="34" charset="-120"/>
+                <a:hlinkClick r:id="rId3" invalidUrl="" action="" tgtFrame="" tooltip="" history="1" highlightClick="0" endSnd="0">
+                  <a:extLst>
+                    <a:ext uri="{A12FA001-AC4F-418D-AE19-62706E023703}">
+                      <ahyp:hlinkClr xmlns:ahyp="http://schemas.microsoft.com/office/drawing/2018/hyperlinkcolor" val="tx"/>
+                    </a:ext>
+                  </a:extLst>
+                </a:hlinkClick>
+              </a:rPr>
+              <a:t>github.com/khushi082007-netizen/takesure</a:t>
+            </a:r>
+            <a:endParaRPr lang="en-US" sz="1050" dirty="0"/>
+          </a:p>
+        </p:txBody>
+      </p:sp>
+      <p:sp>
+        <p:nvSpPr>
+          <p:cNvPr id="22" name="Text 19"/>
           <p:cNvSpPr txBox="1"/>
           <p:nvPr/>
         </p:nvSpPr>
